--- a/W5/1. W5S1 final/W5S1.pptx
+++ b/W5/1. W5S1 final/W5S1.pptx
@@ -5,7 +5,7 @@
     <p:sldMasterId id="2147483648" r:id="rId1"/>
   </p:sldMasterIdLst>
   <p:notesMasterIdLst>
-    <p:notesMasterId r:id="rId55"/>
+    <p:notesMasterId r:id="rId56"/>
   </p:notesMasterIdLst>
   <p:sldIdLst>
     <p:sldId id="377" r:id="rId2"/>
@@ -18,49 +18,50 @@
     <p:sldId id="380" r:id="rId9"/>
     <p:sldId id="382" r:id="rId10"/>
     <p:sldId id="384" r:id="rId11"/>
-    <p:sldId id="381" r:id="rId12"/>
-    <p:sldId id="386" r:id="rId13"/>
-    <p:sldId id="665" r:id="rId14"/>
-    <p:sldId id="666" r:id="rId15"/>
-    <p:sldId id="393" r:id="rId16"/>
-    <p:sldId id="394" r:id="rId17"/>
-    <p:sldId id="395" r:id="rId18"/>
-    <p:sldId id="392" r:id="rId19"/>
-    <p:sldId id="391" r:id="rId20"/>
-    <p:sldId id="396" r:id="rId21"/>
-    <p:sldId id="397" r:id="rId22"/>
-    <p:sldId id="400" r:id="rId23"/>
-    <p:sldId id="398" r:id="rId24"/>
-    <p:sldId id="399" r:id="rId25"/>
-    <p:sldId id="402" r:id="rId26"/>
-    <p:sldId id="403" r:id="rId27"/>
-    <p:sldId id="575" r:id="rId28"/>
-    <p:sldId id="405" r:id="rId29"/>
-    <p:sldId id="577" r:id="rId30"/>
-    <p:sldId id="576" r:id="rId31"/>
-    <p:sldId id="580" r:id="rId32"/>
-    <p:sldId id="578" r:id="rId33"/>
-    <p:sldId id="581" r:id="rId34"/>
-    <p:sldId id="406" r:id="rId35"/>
-    <p:sldId id="582" r:id="rId36"/>
-    <p:sldId id="596" r:id="rId37"/>
-    <p:sldId id="583" r:id="rId38"/>
-    <p:sldId id="585" r:id="rId39"/>
-    <p:sldId id="584" r:id="rId40"/>
-    <p:sldId id="586" r:id="rId41"/>
-    <p:sldId id="588" r:id="rId42"/>
-    <p:sldId id="404" r:id="rId43"/>
-    <p:sldId id="589" r:id="rId44"/>
-    <p:sldId id="574" r:id="rId45"/>
-    <p:sldId id="592" r:id="rId46"/>
-    <p:sldId id="593" r:id="rId47"/>
-    <p:sldId id="590" r:id="rId48"/>
-    <p:sldId id="598" r:id="rId49"/>
-    <p:sldId id="407" r:id="rId50"/>
-    <p:sldId id="670" r:id="rId51"/>
-    <p:sldId id="669" r:id="rId52"/>
-    <p:sldId id="668" r:id="rId53"/>
-    <p:sldId id="599" r:id="rId54"/>
+    <p:sldId id="672" r:id="rId12"/>
+    <p:sldId id="381" r:id="rId13"/>
+    <p:sldId id="386" r:id="rId14"/>
+    <p:sldId id="665" r:id="rId15"/>
+    <p:sldId id="666" r:id="rId16"/>
+    <p:sldId id="393" r:id="rId17"/>
+    <p:sldId id="394" r:id="rId18"/>
+    <p:sldId id="395" r:id="rId19"/>
+    <p:sldId id="392" r:id="rId20"/>
+    <p:sldId id="391" r:id="rId21"/>
+    <p:sldId id="396" r:id="rId22"/>
+    <p:sldId id="397" r:id="rId23"/>
+    <p:sldId id="400" r:id="rId24"/>
+    <p:sldId id="398" r:id="rId25"/>
+    <p:sldId id="399" r:id="rId26"/>
+    <p:sldId id="402" r:id="rId27"/>
+    <p:sldId id="403" r:id="rId28"/>
+    <p:sldId id="575" r:id="rId29"/>
+    <p:sldId id="405" r:id="rId30"/>
+    <p:sldId id="577" r:id="rId31"/>
+    <p:sldId id="576" r:id="rId32"/>
+    <p:sldId id="580" r:id="rId33"/>
+    <p:sldId id="578" r:id="rId34"/>
+    <p:sldId id="581" r:id="rId35"/>
+    <p:sldId id="406" r:id="rId36"/>
+    <p:sldId id="582" r:id="rId37"/>
+    <p:sldId id="596" r:id="rId38"/>
+    <p:sldId id="583" r:id="rId39"/>
+    <p:sldId id="585" r:id="rId40"/>
+    <p:sldId id="584" r:id="rId41"/>
+    <p:sldId id="586" r:id="rId42"/>
+    <p:sldId id="588" r:id="rId43"/>
+    <p:sldId id="404" r:id="rId44"/>
+    <p:sldId id="589" r:id="rId45"/>
+    <p:sldId id="574" r:id="rId46"/>
+    <p:sldId id="592" r:id="rId47"/>
+    <p:sldId id="593" r:id="rId48"/>
+    <p:sldId id="590" r:id="rId49"/>
+    <p:sldId id="598" r:id="rId50"/>
+    <p:sldId id="407" r:id="rId51"/>
+    <p:sldId id="670" r:id="rId52"/>
+    <p:sldId id="669" r:id="rId53"/>
+    <p:sldId id="668" r:id="rId54"/>
+    <p:sldId id="599" r:id="rId55"/>
   </p:sldIdLst>
   <p:sldSz cx="12192000" cy="6858000"/>
   <p:notesSz cx="6858000" cy="9144000"/>
@@ -186,6 +187,7 @@
             <p14:sldId id="380"/>
             <p14:sldId id="382"/>
             <p14:sldId id="384"/>
+            <p14:sldId id="672"/>
             <p14:sldId id="381"/>
             <p14:sldId id="386"/>
           </p14:sldIdLst>
@@ -272,2589 +274,37 @@
 </p:presentation>
 </file>
 
+<file path=ppt/revisionInfo.xml><?xml version="1.0" encoding="utf-8"?>
+<p1510:revInfo xmlns:a="http://schemas.openxmlformats.org/drawingml/2006/main" xmlns:r="http://schemas.openxmlformats.org/officeDocument/2006/relationships" xmlns:p1510="http://schemas.microsoft.com/office/powerpoint/2015/10/main">
+  <p1510:revLst>
+    <p1510:client id="{FF5E96C2-CAD4-4467-9AE0-F3D89E678849}" v="1" dt="2026-01-06T03:43:54.783"/>
+  </p1510:revLst>
+</p1510:revInfo>
+</file>
+
 <file path=ppt/changesInfos/changesInfo1.xml><?xml version="1.0" encoding="utf-8"?>
 <pc:chgInfo xmlns:a="http://schemas.openxmlformats.org/drawingml/2006/main" xmlns:r="http://schemas.openxmlformats.org/officeDocument/2006/relationships" xmlns:ac="http://schemas.microsoft.com/office/drawing/2013/main/command" xmlns:pc="http://schemas.microsoft.com/office/powerpoint/2013/main/command">
   <pc:docChgLst>
-    <pc:chgData name="Matthieu De Mari" userId="dfb708c9-d8dc-439f-9a3b-c772bf4a311c" providerId="ADAL" clId="{95DC2182-BA54-4583-9E8E-B21E5C8D4D55}"/>
-    <pc:docChg chg="undo custSel addSld delSld modSld sldOrd addSection delSection modSection">
-      <pc:chgData name="Matthieu De Mari" userId="dfb708c9-d8dc-439f-9a3b-c772bf4a311c" providerId="ADAL" clId="{95DC2182-BA54-4583-9E8E-B21E5C8D4D55}" dt="2023-02-26T09:05:17.993" v="27185" actId="20577"/>
+    <pc:chgData name="Matthieu De Mari" userId="dfb708c9-d8dc-439f-9a3b-c772bf4a311c" providerId="ADAL" clId="{81E9B007-0C2C-493E-9B93-55A62C9C1F12}"/>
+    <pc:docChg chg="custSel addSld modSld">
+      <pc:chgData name="Matthieu De Mari" userId="dfb708c9-d8dc-439f-9a3b-c772bf4a311c" providerId="ADAL" clId="{81E9B007-0C2C-493E-9B93-55A62C9C1F12}" dt="2026-01-06T03:45:07.009" v="303" actId="20577"/>
       <pc:docMkLst>
         <pc:docMk/>
       </pc:docMkLst>
-      <pc:sldChg chg="modSp mod">
-        <pc:chgData name="Matthieu De Mari" userId="dfb708c9-d8dc-439f-9a3b-c772bf4a311c" providerId="ADAL" clId="{95DC2182-BA54-4583-9E8E-B21E5C8D4D55}" dt="2023-02-26T08:54:41.980" v="25991" actId="113"/>
+      <pc:sldChg chg="modSp add mod">
+        <pc:chgData name="Matthieu De Mari" userId="dfb708c9-d8dc-439f-9a3b-c772bf4a311c" providerId="ADAL" clId="{81E9B007-0C2C-493E-9B93-55A62C9C1F12}" dt="2026-01-06T03:45:07.009" v="303" actId="20577"/>
         <pc:sldMkLst>
           <pc:docMk/>
-          <pc:sldMk cId="3442501962" sldId="257"/>
-        </pc:sldMkLst>
-      </pc:sldChg>
-      <pc:sldChg chg="addSp delSp modSp mod">
-        <pc:chgData name="Matthieu De Mari" userId="dfb708c9-d8dc-439f-9a3b-c772bf4a311c" providerId="ADAL" clId="{95DC2182-BA54-4583-9E8E-B21E5C8D4D55}" dt="2023-02-26T09:05:17.993" v="27185" actId="20577"/>
-        <pc:sldMkLst>
-          <pc:docMk/>
-          <pc:sldMk cId="1893873068" sldId="266"/>
-        </pc:sldMkLst>
-      </pc:sldChg>
-      <pc:sldChg chg="modSp mod">
-        <pc:chgData name="Matthieu De Mari" userId="dfb708c9-d8dc-439f-9a3b-c772bf4a311c" providerId="ADAL" clId="{95DC2182-BA54-4583-9E8E-B21E5C8D4D55}" dt="2023-02-23T11:31:31.567" v="17653" actId="207"/>
-        <pc:sldMkLst>
-          <pc:docMk/>
-          <pc:sldMk cId="3880949074" sldId="267"/>
-        </pc:sldMkLst>
-      </pc:sldChg>
-      <pc:sldChg chg="modSp mod">
-        <pc:chgData name="Matthieu De Mari" userId="dfb708c9-d8dc-439f-9a3b-c772bf4a311c" providerId="ADAL" clId="{95DC2182-BA54-4583-9E8E-B21E5C8D4D55}" dt="2023-02-26T09:02:44.409" v="26989" actId="20577"/>
-        <pc:sldMkLst>
-          <pc:docMk/>
-          <pc:sldMk cId="1036081419" sldId="346"/>
-        </pc:sldMkLst>
-      </pc:sldChg>
-      <pc:sldChg chg="modSp mod">
-        <pc:chgData name="Matthieu De Mari" userId="dfb708c9-d8dc-439f-9a3b-c772bf4a311c" providerId="ADAL" clId="{95DC2182-BA54-4583-9E8E-B21E5C8D4D55}" dt="2023-02-21T11:02:32.442" v="9700" actId="20577"/>
-        <pc:sldMkLst>
-          <pc:docMk/>
-          <pc:sldMk cId="1040156172" sldId="377"/>
-        </pc:sldMkLst>
-      </pc:sldChg>
-      <pc:sldChg chg="addSp delSp modSp new mod ord modClrScheme chgLayout">
-        <pc:chgData name="Matthieu De Mari" userId="dfb708c9-d8dc-439f-9a3b-c772bf4a311c" providerId="ADAL" clId="{95DC2182-BA54-4583-9E8E-B21E5C8D4D55}" dt="2023-02-17T09:41:10.957" v="4103"/>
-        <pc:sldMkLst>
-          <pc:docMk/>
-          <pc:sldMk cId="1119657896" sldId="378"/>
-        </pc:sldMkLst>
-      </pc:sldChg>
-      <pc:sldChg chg="modSp add mod ord">
-        <pc:chgData name="Matthieu De Mari" userId="dfb708c9-d8dc-439f-9a3b-c772bf4a311c" providerId="ADAL" clId="{95DC2182-BA54-4583-9E8E-B21E5C8D4D55}" dt="2023-02-26T07:17:50.059" v="19240" actId="5793"/>
-        <pc:sldMkLst>
-          <pc:docMk/>
-          <pc:sldMk cId="3946144614" sldId="379"/>
-        </pc:sldMkLst>
-      </pc:sldChg>
-      <pc:sldChg chg="addSp delSp modSp add mod ord chgLayout">
-        <pc:chgData name="Matthieu De Mari" userId="dfb708c9-d8dc-439f-9a3b-c772bf4a311c" providerId="ADAL" clId="{95DC2182-BA54-4583-9E8E-B21E5C8D4D55}" dt="2023-02-23T02:52:26.148" v="9713" actId="20577"/>
-        <pc:sldMkLst>
-          <pc:docMk/>
-          <pc:sldMk cId="2141271085" sldId="380"/>
-        </pc:sldMkLst>
-      </pc:sldChg>
-      <pc:sldChg chg="addSp modSp add mod ord">
-        <pc:chgData name="Matthieu De Mari" userId="dfb708c9-d8dc-439f-9a3b-c772bf4a311c" providerId="ADAL" clId="{95DC2182-BA54-4583-9E8E-B21E5C8D4D55}" dt="2023-02-17T09:41:10.957" v="4103"/>
-        <pc:sldMkLst>
-          <pc:docMk/>
-          <pc:sldMk cId="1990152231" sldId="381"/>
-        </pc:sldMkLst>
-      </pc:sldChg>
-      <pc:sldChg chg="addSp delSp modSp new mod ord modClrScheme chgLayout">
-        <pc:chgData name="Matthieu De Mari" userId="dfb708c9-d8dc-439f-9a3b-c772bf4a311c" providerId="ADAL" clId="{95DC2182-BA54-4583-9E8E-B21E5C8D4D55}" dt="2023-02-17T09:41:10.957" v="4103"/>
-        <pc:sldMkLst>
-          <pc:docMk/>
-          <pc:sldMk cId="356330123" sldId="382"/>
-        </pc:sldMkLst>
-      </pc:sldChg>
-      <pc:sldChg chg="addSp delSp modSp add del mod">
-        <pc:chgData name="Matthieu De Mari" userId="dfb708c9-d8dc-439f-9a3b-c772bf4a311c" providerId="ADAL" clId="{95DC2182-BA54-4583-9E8E-B21E5C8D4D55}" dt="2023-02-17T08:42:23.672" v="637" actId="47"/>
-        <pc:sldMkLst>
-          <pc:docMk/>
-          <pc:sldMk cId="1597381135" sldId="383"/>
-        </pc:sldMkLst>
-      </pc:sldChg>
-      <pc:sldChg chg="addSp delSp modSp add mod ord modClrScheme chgLayout">
-        <pc:chgData name="Matthieu De Mari" userId="dfb708c9-d8dc-439f-9a3b-c772bf4a311c" providerId="ADAL" clId="{95DC2182-BA54-4583-9E8E-B21E5C8D4D55}" dt="2023-02-23T02:52:10.916" v="9711" actId="113"/>
-        <pc:sldMkLst>
-          <pc:docMk/>
-          <pc:sldMk cId="3535228966" sldId="384"/>
-        </pc:sldMkLst>
-      </pc:sldChg>
-      <pc:sldChg chg="modSp add del mod ord">
-        <pc:chgData name="Matthieu De Mari" userId="dfb708c9-d8dc-439f-9a3b-c772bf4a311c" providerId="ADAL" clId="{95DC2182-BA54-4583-9E8E-B21E5C8D4D55}" dt="2023-02-23T02:52:38.516" v="9714" actId="47"/>
-        <pc:sldMkLst>
-          <pc:docMk/>
-          <pc:sldMk cId="1845912647" sldId="385"/>
-        </pc:sldMkLst>
-      </pc:sldChg>
-      <pc:sldChg chg="addSp modSp add mod ord">
-        <pc:chgData name="Matthieu De Mari" userId="dfb708c9-d8dc-439f-9a3b-c772bf4a311c" providerId="ADAL" clId="{95DC2182-BA54-4583-9E8E-B21E5C8D4D55}" dt="2023-02-21T08:53:50.845" v="4525" actId="20577"/>
-        <pc:sldMkLst>
-          <pc:docMk/>
-          <pc:sldMk cId="3334002964" sldId="386"/>
-        </pc:sldMkLst>
-      </pc:sldChg>
-      <pc:sldChg chg="addSp delSp modSp new mod">
-        <pc:chgData name="Matthieu De Mari" userId="dfb708c9-d8dc-439f-9a3b-c772bf4a311c" providerId="ADAL" clId="{95DC2182-BA54-4583-9E8E-B21E5C8D4D55}" dt="2023-02-26T07:18:05.355" v="19243" actId="113"/>
-        <pc:sldMkLst>
-          <pc:docMk/>
-          <pc:sldMk cId="3292999532" sldId="387"/>
-        </pc:sldMkLst>
-      </pc:sldChg>
-      <pc:sldChg chg="addSp delSp modSp add mod">
-        <pc:chgData name="Matthieu De Mari" userId="dfb708c9-d8dc-439f-9a3b-c772bf4a311c" providerId="ADAL" clId="{95DC2182-BA54-4583-9E8E-B21E5C8D4D55}" dt="2023-02-21T08:53:09.228" v="4502" actId="20577"/>
-        <pc:sldMkLst>
-          <pc:docMk/>
-          <pc:sldMk cId="2586666001" sldId="388"/>
-        </pc:sldMkLst>
-      </pc:sldChg>
-      <pc:sldChg chg="modSp add del mod">
-        <pc:chgData name="Matthieu De Mari" userId="dfb708c9-d8dc-439f-9a3b-c772bf4a311c" providerId="ADAL" clId="{95DC2182-BA54-4583-9E8E-B21E5C8D4D55}" dt="2023-02-17T09:21:02.572" v="2876" actId="47"/>
-        <pc:sldMkLst>
-          <pc:docMk/>
-          <pc:sldMk cId="1425256713" sldId="389"/>
-        </pc:sldMkLst>
-      </pc:sldChg>
-      <pc:sldChg chg="addSp delSp modSp add mod chgLayout">
-        <pc:chgData name="Matthieu De Mari" userId="dfb708c9-d8dc-439f-9a3b-c772bf4a311c" providerId="ADAL" clId="{95DC2182-BA54-4583-9E8E-B21E5C8D4D55}" dt="2023-02-23T02:53:51.114" v="9725" actId="20577"/>
-        <pc:sldMkLst>
-          <pc:docMk/>
-          <pc:sldMk cId="699795487" sldId="390"/>
-        </pc:sldMkLst>
-      </pc:sldChg>
-      <pc:sldChg chg="addSp delSp modSp add mod">
-        <pc:chgData name="Matthieu De Mari" userId="dfb708c9-d8dc-439f-9a3b-c772bf4a311c" providerId="ADAL" clId="{95DC2182-BA54-4583-9E8E-B21E5C8D4D55}" dt="2023-02-26T07:19:07.424" v="19248"/>
-        <pc:sldMkLst>
-          <pc:docMk/>
-          <pc:sldMk cId="3438165640" sldId="391"/>
-        </pc:sldMkLst>
-      </pc:sldChg>
-      <pc:sldChg chg="addSp delSp modSp add mod ord">
-        <pc:chgData name="Matthieu De Mari" userId="dfb708c9-d8dc-439f-9a3b-c772bf4a311c" providerId="ADAL" clId="{95DC2182-BA54-4583-9E8E-B21E5C8D4D55}" dt="2023-02-17T09:22:42.121" v="3052" actId="20577"/>
-        <pc:sldMkLst>
-          <pc:docMk/>
-          <pc:sldMk cId="2064353129" sldId="392"/>
-        </pc:sldMkLst>
-      </pc:sldChg>
-      <pc:sldChg chg="addSp delSp modSp add mod">
-        <pc:chgData name="Matthieu De Mari" userId="dfb708c9-d8dc-439f-9a3b-c772bf4a311c" providerId="ADAL" clId="{95DC2182-BA54-4583-9E8E-B21E5C8D4D55}" dt="2023-02-23T02:54:05.876" v="9727" actId="20577"/>
-        <pc:sldMkLst>
-          <pc:docMk/>
-          <pc:sldMk cId="3842187934" sldId="393"/>
-        </pc:sldMkLst>
-      </pc:sldChg>
-      <pc:sldChg chg="addSp delSp modSp add mod">
-        <pc:chgData name="Matthieu De Mari" userId="dfb708c9-d8dc-439f-9a3b-c772bf4a311c" providerId="ADAL" clId="{95DC2182-BA54-4583-9E8E-B21E5C8D4D55}" dt="2023-02-21T08:55:11.719" v="4562"/>
-        <pc:sldMkLst>
-          <pc:docMk/>
-          <pc:sldMk cId="781649533" sldId="394"/>
-        </pc:sldMkLst>
-      </pc:sldChg>
-      <pc:sldChg chg="addSp delSp modSp add mod modClrScheme chgLayout">
-        <pc:chgData name="Matthieu De Mari" userId="dfb708c9-d8dc-439f-9a3b-c772bf4a311c" providerId="ADAL" clId="{95DC2182-BA54-4583-9E8E-B21E5C8D4D55}" dt="2023-02-23T02:54:30.470" v="9741" actId="20577"/>
-        <pc:sldMkLst>
-          <pc:docMk/>
-          <pc:sldMk cId="2316878562" sldId="395"/>
-        </pc:sldMkLst>
-      </pc:sldChg>
-      <pc:sldChg chg="addSp delSp modSp new mod">
-        <pc:chgData name="Matthieu De Mari" userId="dfb708c9-d8dc-439f-9a3b-c772bf4a311c" providerId="ADAL" clId="{95DC2182-BA54-4583-9E8E-B21E5C8D4D55}" dt="2023-02-26T07:19:06.094" v="19247"/>
-        <pc:sldMkLst>
-          <pc:docMk/>
-          <pc:sldMk cId="1870305378" sldId="396"/>
-        </pc:sldMkLst>
-      </pc:sldChg>
-      <pc:sldChg chg="addSp delSp modSp add mod">
-        <pc:chgData name="Matthieu De Mari" userId="dfb708c9-d8dc-439f-9a3b-c772bf4a311c" providerId="ADAL" clId="{95DC2182-BA54-4583-9E8E-B21E5C8D4D55}" dt="2023-02-23T02:58:02.175" v="9793" actId="20577"/>
-        <pc:sldMkLst>
-          <pc:docMk/>
-          <pc:sldMk cId="1413966137" sldId="397"/>
-        </pc:sldMkLst>
-      </pc:sldChg>
-      <pc:sldChg chg="addSp delSp modSp new mod">
-        <pc:chgData name="Matthieu De Mari" userId="dfb708c9-d8dc-439f-9a3b-c772bf4a311c" providerId="ADAL" clId="{95DC2182-BA54-4583-9E8E-B21E5C8D4D55}" dt="2023-02-23T02:59:11.897" v="9835" actId="20577"/>
-        <pc:sldMkLst>
-          <pc:docMk/>
-          <pc:sldMk cId="2506346402" sldId="398"/>
-        </pc:sldMkLst>
-      </pc:sldChg>
-      <pc:sldChg chg="addSp delSp modSp add mod modClrScheme chgLayout">
-        <pc:chgData name="Matthieu De Mari" userId="dfb708c9-d8dc-439f-9a3b-c772bf4a311c" providerId="ADAL" clId="{95DC2182-BA54-4583-9E8E-B21E5C8D4D55}" dt="2023-02-17T09:40:50.204" v="4101" actId="20577"/>
-        <pc:sldMkLst>
-          <pc:docMk/>
-          <pc:sldMk cId="1835834167" sldId="399"/>
-        </pc:sldMkLst>
-      </pc:sldChg>
-      <pc:sldChg chg="addSp delSp modSp add mod ord modClrScheme chgLayout">
-        <pc:chgData name="Matthieu De Mari" userId="dfb708c9-d8dc-439f-9a3b-c772bf4a311c" providerId="ADAL" clId="{95DC2182-BA54-4583-9E8E-B21E5C8D4D55}" dt="2023-02-23T02:58:40.249" v="9816" actId="20577"/>
-        <pc:sldMkLst>
-          <pc:docMk/>
-          <pc:sldMk cId="4048808033" sldId="400"/>
-        </pc:sldMkLst>
-      </pc:sldChg>
-      <pc:sldChg chg="addSp delSp new del mod">
-        <pc:chgData name="Matthieu De Mari" userId="dfb708c9-d8dc-439f-9a3b-c772bf4a311c" providerId="ADAL" clId="{95DC2182-BA54-4583-9E8E-B21E5C8D4D55}" dt="2023-02-17T09:43:44.070" v="4143" actId="47"/>
-        <pc:sldMkLst>
-          <pc:docMk/>
-          <pc:sldMk cId="4083174369" sldId="401"/>
-        </pc:sldMkLst>
-      </pc:sldChg>
-      <pc:sldChg chg="addSp delSp modSp add mod ord">
-        <pc:chgData name="Matthieu De Mari" userId="dfb708c9-d8dc-439f-9a3b-c772bf4a311c" providerId="ADAL" clId="{95DC2182-BA54-4583-9E8E-B21E5C8D4D55}" dt="2023-02-26T07:19:59.779" v="19287" actId="20577"/>
-        <pc:sldMkLst>
-          <pc:docMk/>
-          <pc:sldMk cId="736987387" sldId="402"/>
-        </pc:sldMkLst>
-      </pc:sldChg>
-      <pc:sldChg chg="addSp delSp modSp add mod ord">
-        <pc:chgData name="Matthieu De Mari" userId="dfb708c9-d8dc-439f-9a3b-c772bf4a311c" providerId="ADAL" clId="{95DC2182-BA54-4583-9E8E-B21E5C8D4D55}" dt="2023-02-23T03:00:12.707" v="9872" actId="20577"/>
-        <pc:sldMkLst>
-          <pc:docMk/>
-          <pc:sldMk cId="105113267" sldId="403"/>
-        </pc:sldMkLst>
-      </pc:sldChg>
-      <pc:sldChg chg="modSp new del mod">
-        <pc:chgData name="Matthieu De Mari" userId="dfb708c9-d8dc-439f-9a3b-c772bf4a311c" providerId="ADAL" clId="{95DC2182-BA54-4583-9E8E-B21E5C8D4D55}" dt="2023-02-21T10:03:31.963" v="5683" actId="2696"/>
-        <pc:sldMkLst>
-          <pc:docMk/>
-          <pc:sldMk cId="955831919" sldId="404"/>
-        </pc:sldMkLst>
-      </pc:sldChg>
-      <pc:sldChg chg="modSp add mod ord">
-        <pc:chgData name="Matthieu De Mari" userId="dfb708c9-d8dc-439f-9a3b-c772bf4a311c" providerId="ADAL" clId="{95DC2182-BA54-4583-9E8E-B21E5C8D4D55}" dt="2023-02-26T07:35:56.470" v="19349" actId="20577"/>
-        <pc:sldMkLst>
-          <pc:docMk/>
-          <pc:sldMk cId="1663617131" sldId="404"/>
-        </pc:sldMkLst>
-      </pc:sldChg>
-      <pc:sldChg chg="modSp new mod ord">
-        <pc:chgData name="Matthieu De Mari" userId="dfb708c9-d8dc-439f-9a3b-c772bf4a311c" providerId="ADAL" clId="{95DC2182-BA54-4583-9E8E-B21E5C8D4D55}" dt="2023-02-23T03:01:30.211" v="9898" actId="20577"/>
-        <pc:sldMkLst>
-          <pc:docMk/>
-          <pc:sldMk cId="2755235485" sldId="405"/>
-        </pc:sldMkLst>
-      </pc:sldChg>
-      <pc:sldChg chg="modSp new mod">
-        <pc:chgData name="Matthieu De Mari" userId="dfb708c9-d8dc-439f-9a3b-c772bf4a311c" providerId="ADAL" clId="{95DC2182-BA54-4583-9E8E-B21E5C8D4D55}" dt="2023-02-23T03:03:41.570" v="9949" actId="20577"/>
-        <pc:sldMkLst>
-          <pc:docMk/>
-          <pc:sldMk cId="2781272903" sldId="406"/>
-        </pc:sldMkLst>
-      </pc:sldChg>
-      <pc:sldChg chg="addSp modSp new mod ord modClrScheme chgLayout">
-        <pc:chgData name="Matthieu De Mari" userId="dfb708c9-d8dc-439f-9a3b-c772bf4a311c" providerId="ADAL" clId="{95DC2182-BA54-4583-9E8E-B21E5C8D4D55}" dt="2023-02-26T08:51:59.487" v="25507"/>
-        <pc:sldMkLst>
-          <pc:docMk/>
-          <pc:sldMk cId="3425780644" sldId="407"/>
-        </pc:sldMkLst>
-      </pc:sldChg>
-      <pc:sldChg chg="modSp new del mod ord">
-        <pc:chgData name="Matthieu De Mari" userId="dfb708c9-d8dc-439f-9a3b-c772bf4a311c" providerId="ADAL" clId="{95DC2182-BA54-4583-9E8E-B21E5C8D4D55}" dt="2023-02-17T09:58:52.785" v="4408" actId="2696"/>
-        <pc:sldMkLst>
-          <pc:docMk/>
-          <pc:sldMk cId="720065278" sldId="408"/>
-        </pc:sldMkLst>
-      </pc:sldChg>
-      <pc:sldChg chg="modSp add mod">
-        <pc:chgData name="Matthieu De Mari" userId="dfb708c9-d8dc-439f-9a3b-c772bf4a311c" providerId="ADAL" clId="{95DC2182-BA54-4583-9E8E-B21E5C8D4D55}" dt="2023-02-23T06:53:08.162" v="14364"/>
-        <pc:sldMkLst>
-          <pc:docMk/>
-          <pc:sldMk cId="1300324164" sldId="408"/>
-        </pc:sldMkLst>
-      </pc:sldChg>
-      <pc:sldChg chg="modSp new del mod">
-        <pc:chgData name="Matthieu De Mari" userId="dfb708c9-d8dc-439f-9a3b-c772bf4a311c" providerId="ADAL" clId="{95DC2182-BA54-4583-9E8E-B21E5C8D4D55}" dt="2023-02-26T08:25:23.381" v="22856" actId="47"/>
-        <pc:sldMkLst>
-          <pc:docMk/>
-          <pc:sldMk cId="2990823243" sldId="409"/>
-        </pc:sldMkLst>
-      </pc:sldChg>
-      <pc:sldChg chg="modSp new mod ord">
-        <pc:chgData name="Matthieu De Mari" userId="dfb708c9-d8dc-439f-9a3b-c772bf4a311c" providerId="ADAL" clId="{95DC2182-BA54-4583-9E8E-B21E5C8D4D55}" dt="2023-02-26T07:38:17.095" v="19376" actId="113"/>
-        <pc:sldMkLst>
-          <pc:docMk/>
-          <pc:sldMk cId="3793163593" sldId="410"/>
-        </pc:sldMkLst>
-      </pc:sldChg>
-      <pc:sldChg chg="modSp new del mod">
-        <pc:chgData name="Matthieu De Mari" userId="dfb708c9-d8dc-439f-9a3b-c772bf4a311c" providerId="ADAL" clId="{95DC2182-BA54-4583-9E8E-B21E5C8D4D55}" dt="2023-02-21T10:36:46.337" v="7652" actId="47"/>
-        <pc:sldMkLst>
-          <pc:docMk/>
-          <pc:sldMk cId="1374902952" sldId="411"/>
-        </pc:sldMkLst>
-      </pc:sldChg>
-      <pc:sldChg chg="new del">
-        <pc:chgData name="Matthieu De Mari" userId="dfb708c9-d8dc-439f-9a3b-c772bf4a311c" providerId="ADAL" clId="{95DC2182-BA54-4583-9E8E-B21E5C8D4D55}" dt="2023-02-17T09:59:05.481" v="4413" actId="47"/>
-        <pc:sldMkLst>
-          <pc:docMk/>
-          <pc:sldMk cId="1249392804" sldId="412"/>
-        </pc:sldMkLst>
-      </pc:sldChg>
-      <pc:sldChg chg="new del">
-        <pc:chgData name="Matthieu De Mari" userId="dfb708c9-d8dc-439f-9a3b-c772bf4a311c" providerId="ADAL" clId="{95DC2182-BA54-4583-9E8E-B21E5C8D4D55}" dt="2023-02-21T10:36:26.763" v="7648" actId="47"/>
-        <pc:sldMkLst>
-          <pc:docMk/>
-          <pc:sldMk cId="3553139110" sldId="412"/>
-        </pc:sldMkLst>
-      </pc:sldChg>
-      <pc:sldChg chg="modSp add mod">
-        <pc:chgData name="Matthieu De Mari" userId="dfb708c9-d8dc-439f-9a3b-c772bf4a311c" providerId="ADAL" clId="{95DC2182-BA54-4583-9E8E-B21E5C8D4D55}" dt="2023-02-23T06:51:59.350" v="14354" actId="20577"/>
-        <pc:sldMkLst>
-          <pc:docMk/>
-          <pc:sldMk cId="1165688587" sldId="571"/>
-        </pc:sldMkLst>
-      </pc:sldChg>
-      <pc:sldChg chg="modSp add del mod">
-        <pc:chgData name="Matthieu De Mari" userId="dfb708c9-d8dc-439f-9a3b-c772bf4a311c" providerId="ADAL" clId="{95DC2182-BA54-4583-9E8E-B21E5C8D4D55}" dt="2023-02-21T09:56:31.484" v="4852" actId="47"/>
-        <pc:sldMkLst>
-          <pc:docMk/>
-          <pc:sldMk cId="2791256840" sldId="572"/>
-        </pc:sldMkLst>
-      </pc:sldChg>
-      <pc:sldChg chg="add del">
-        <pc:chgData name="Matthieu De Mari" userId="dfb708c9-d8dc-439f-9a3b-c772bf4a311c" providerId="ADAL" clId="{95DC2182-BA54-4583-9E8E-B21E5C8D4D55}" dt="2023-02-21T09:58:08.296" v="4895" actId="47"/>
-        <pc:sldMkLst>
-          <pc:docMk/>
-          <pc:sldMk cId="2218721771" sldId="573"/>
-        </pc:sldMkLst>
-      </pc:sldChg>
-      <pc:sldChg chg="modSp add del mod ord">
-        <pc:chgData name="Matthieu De Mari" userId="dfb708c9-d8dc-439f-9a3b-c772bf4a311c" providerId="ADAL" clId="{95DC2182-BA54-4583-9E8E-B21E5C8D4D55}" dt="2023-02-21T10:03:31.963" v="5683" actId="2696"/>
-        <pc:sldMkLst>
-          <pc:docMk/>
-          <pc:sldMk cId="1165490893" sldId="574"/>
-        </pc:sldMkLst>
-      </pc:sldChg>
-      <pc:sldChg chg="modSp add mod ord">
-        <pc:chgData name="Matthieu De Mari" userId="dfb708c9-d8dc-439f-9a3b-c772bf4a311c" providerId="ADAL" clId="{95DC2182-BA54-4583-9E8E-B21E5C8D4D55}" dt="2023-02-26T07:36:09.332" v="19354" actId="20577"/>
-        <pc:sldMkLst>
-          <pc:docMk/>
-          <pc:sldMk cId="3078664734" sldId="574"/>
-        </pc:sldMkLst>
-      </pc:sldChg>
-      <pc:sldChg chg="modSp new del mod">
-        <pc:chgData name="Matthieu De Mari" userId="dfb708c9-d8dc-439f-9a3b-c772bf4a311c" providerId="ADAL" clId="{95DC2182-BA54-4583-9E8E-B21E5C8D4D55}" dt="2023-02-21T09:56:32.308" v="4853" actId="47"/>
-        <pc:sldMkLst>
-          <pc:docMk/>
-          <pc:sldMk cId="937325559" sldId="575"/>
-        </pc:sldMkLst>
-      </pc:sldChg>
-      <pc:sldChg chg="modSp add mod">
-        <pc:chgData name="Matthieu De Mari" userId="dfb708c9-d8dc-439f-9a3b-c772bf4a311c" providerId="ADAL" clId="{95DC2182-BA54-4583-9E8E-B21E5C8D4D55}" dt="2023-02-23T03:01:12.697" v="9892" actId="20577"/>
-        <pc:sldMkLst>
-          <pc:docMk/>
-          <pc:sldMk cId="3542276236" sldId="575"/>
-        </pc:sldMkLst>
-      </pc:sldChg>
-      <pc:sldChg chg="modSp new mod ord">
-        <pc:chgData name="Matthieu De Mari" userId="dfb708c9-d8dc-439f-9a3b-c772bf4a311c" providerId="ADAL" clId="{95DC2182-BA54-4583-9E8E-B21E5C8D4D55}" dt="2023-02-23T03:02:15.773" v="9930"/>
-        <pc:sldMkLst>
-          <pc:docMk/>
-          <pc:sldMk cId="1343460073" sldId="576"/>
-        </pc:sldMkLst>
-      </pc:sldChg>
-      <pc:sldChg chg="addSp modSp add mod ord">
-        <pc:chgData name="Matthieu De Mari" userId="dfb708c9-d8dc-439f-9a3b-c772bf4a311c" providerId="ADAL" clId="{95DC2182-BA54-4583-9E8E-B21E5C8D4D55}" dt="2023-02-23T03:02:10.624" v="9929" actId="113"/>
-        <pc:sldMkLst>
-          <pc:docMk/>
-          <pc:sldMk cId="3821622736" sldId="577"/>
-        </pc:sldMkLst>
-      </pc:sldChg>
-      <pc:sldChg chg="modSp new mod">
-        <pc:chgData name="Matthieu De Mari" userId="dfb708c9-d8dc-439f-9a3b-c772bf4a311c" providerId="ADAL" clId="{95DC2182-BA54-4583-9E8E-B21E5C8D4D55}" dt="2023-02-23T03:02:42.860" v="9932" actId="20577"/>
-        <pc:sldMkLst>
-          <pc:docMk/>
-          <pc:sldMk cId="3867797258" sldId="578"/>
-        </pc:sldMkLst>
-      </pc:sldChg>
-      <pc:sldChg chg="add del ord">
-        <pc:chgData name="Matthieu De Mari" userId="dfb708c9-d8dc-439f-9a3b-c772bf4a311c" providerId="ADAL" clId="{95DC2182-BA54-4583-9E8E-B21E5C8D4D55}" dt="2023-02-21T10:36:15.246" v="7647" actId="47"/>
-        <pc:sldMkLst>
-          <pc:docMk/>
-          <pc:sldMk cId="796962667" sldId="579"/>
-        </pc:sldMkLst>
-      </pc:sldChg>
-      <pc:sldChg chg="modSp add mod">
-        <pc:chgData name="Matthieu De Mari" userId="dfb708c9-d8dc-439f-9a3b-c772bf4a311c" providerId="ADAL" clId="{95DC2182-BA54-4583-9E8E-B21E5C8D4D55}" dt="2023-02-23T03:02:23.621" v="9931"/>
-        <pc:sldMkLst>
-          <pc:docMk/>
-          <pc:sldMk cId="884373967" sldId="580"/>
-        </pc:sldMkLst>
-      </pc:sldChg>
-      <pc:sldChg chg="addSp delSp modSp new mod">
-        <pc:chgData name="Matthieu De Mari" userId="dfb708c9-d8dc-439f-9a3b-c772bf4a311c" providerId="ADAL" clId="{95DC2182-BA54-4583-9E8E-B21E5C8D4D55}" dt="2023-02-21T10:37:11.013" v="7685" actId="122"/>
-        <pc:sldMkLst>
-          <pc:docMk/>
-          <pc:sldMk cId="4262229869" sldId="581"/>
-        </pc:sldMkLst>
-      </pc:sldChg>
-      <pc:sldChg chg="add">
-        <pc:chgData name="Matthieu De Mari" userId="dfb708c9-d8dc-439f-9a3b-c772bf4a311c" providerId="ADAL" clId="{95DC2182-BA54-4583-9E8E-B21E5C8D4D55}" dt="2023-02-21T10:42:01.942" v="8296"/>
-        <pc:sldMkLst>
-          <pc:docMk/>
-          <pc:sldMk cId="445144023" sldId="582"/>
-        </pc:sldMkLst>
-      </pc:sldChg>
-      <pc:sldChg chg="addSp delSp modSp new mod">
-        <pc:chgData name="Matthieu De Mari" userId="dfb708c9-d8dc-439f-9a3b-c772bf4a311c" providerId="ADAL" clId="{95DC2182-BA54-4583-9E8E-B21E5C8D4D55}" dt="2023-02-23T03:04:42.732" v="9954" actId="207"/>
-        <pc:sldMkLst>
-          <pc:docMk/>
-          <pc:sldMk cId="1327648275" sldId="583"/>
-        </pc:sldMkLst>
-      </pc:sldChg>
-      <pc:sldChg chg="addSp delSp modSp new mod">
-        <pc:chgData name="Matthieu De Mari" userId="dfb708c9-d8dc-439f-9a3b-c772bf4a311c" providerId="ADAL" clId="{95DC2182-BA54-4583-9E8E-B21E5C8D4D55}" dt="2023-02-21T10:52:14.651" v="9032" actId="1076"/>
-        <pc:sldMkLst>
-          <pc:docMk/>
-          <pc:sldMk cId="1700821507" sldId="584"/>
-        </pc:sldMkLst>
-      </pc:sldChg>
-      <pc:sldChg chg="addSp delSp modSp add mod">
-        <pc:chgData name="Matthieu De Mari" userId="dfb708c9-d8dc-439f-9a3b-c772bf4a311c" providerId="ADAL" clId="{95DC2182-BA54-4583-9E8E-B21E5C8D4D55}" dt="2023-02-26T07:35:23.013" v="19289" actId="14100"/>
-        <pc:sldMkLst>
-          <pc:docMk/>
-          <pc:sldMk cId="2986323806" sldId="585"/>
-        </pc:sldMkLst>
-      </pc:sldChg>
-      <pc:sldChg chg="addSp delSp modSp add mod">
-        <pc:chgData name="Matthieu De Mari" userId="dfb708c9-d8dc-439f-9a3b-c772bf4a311c" providerId="ADAL" clId="{95DC2182-BA54-4583-9E8E-B21E5C8D4D55}" dt="2023-02-21T10:54:10.017" v="9091" actId="20577"/>
-        <pc:sldMkLst>
-          <pc:docMk/>
-          <pc:sldMk cId="2080496661" sldId="586"/>
-        </pc:sldMkLst>
-      </pc:sldChg>
-      <pc:sldChg chg="new del">
-        <pc:chgData name="Matthieu De Mari" userId="dfb708c9-d8dc-439f-9a3b-c772bf4a311c" providerId="ADAL" clId="{95DC2182-BA54-4583-9E8E-B21E5C8D4D55}" dt="2023-02-21T10:54:41.672" v="9094" actId="47"/>
-        <pc:sldMkLst>
-          <pc:docMk/>
-          <pc:sldMk cId="2237088828" sldId="587"/>
-        </pc:sldMkLst>
-      </pc:sldChg>
-      <pc:sldChg chg="modSp add mod">
-        <pc:chgData name="Matthieu De Mari" userId="dfb708c9-d8dc-439f-9a3b-c772bf4a311c" providerId="ADAL" clId="{95DC2182-BA54-4583-9E8E-B21E5C8D4D55}" dt="2023-02-21T10:57:48.169" v="9418" actId="207"/>
-        <pc:sldMkLst>
-          <pc:docMk/>
-          <pc:sldMk cId="2743590117" sldId="588"/>
-        </pc:sldMkLst>
-      </pc:sldChg>
-      <pc:sldChg chg="modSp add mod">
-        <pc:chgData name="Matthieu De Mari" userId="dfb708c9-d8dc-439f-9a3b-c772bf4a311c" providerId="ADAL" clId="{95DC2182-BA54-4583-9E8E-B21E5C8D4D55}" dt="2023-02-23T03:06:37.700" v="10094" actId="20577"/>
-        <pc:sldMkLst>
-          <pc:docMk/>
-          <pc:sldMk cId="1885554493" sldId="589"/>
-        </pc:sldMkLst>
-      </pc:sldChg>
-      <pc:sldChg chg="modSp new mod ord">
-        <pc:chgData name="Matthieu De Mari" userId="dfb708c9-d8dc-439f-9a3b-c772bf4a311c" providerId="ADAL" clId="{95DC2182-BA54-4583-9E8E-B21E5C8D4D55}" dt="2023-02-26T08:51:59.487" v="25507"/>
-        <pc:sldMkLst>
-          <pc:docMk/>
-          <pc:sldMk cId="1038252774" sldId="590"/>
-        </pc:sldMkLst>
-      </pc:sldChg>
-      <pc:sldChg chg="modSp add mod">
-        <pc:chgData name="Matthieu De Mari" userId="dfb708c9-d8dc-439f-9a3b-c772bf4a311c" providerId="ADAL" clId="{95DC2182-BA54-4583-9E8E-B21E5C8D4D55}" dt="2023-02-21T11:02:29.181" v="9698" actId="20577"/>
-        <pc:sldMkLst>
-          <pc:docMk/>
-          <pc:sldMk cId="37425589" sldId="591"/>
-        </pc:sldMkLst>
-      </pc:sldChg>
-      <pc:sldChg chg="add ord">
-        <pc:chgData name="Matthieu De Mari" userId="dfb708c9-d8dc-439f-9a3b-c772bf4a311c" providerId="ADAL" clId="{95DC2182-BA54-4583-9E8E-B21E5C8D4D55}" dt="2023-02-26T08:51:59.487" v="25507"/>
-        <pc:sldMkLst>
-          <pc:docMk/>
-          <pc:sldMk cId="3688488777" sldId="592"/>
-        </pc:sldMkLst>
-      </pc:sldChg>
-      <pc:sldChg chg="add ord">
-        <pc:chgData name="Matthieu De Mari" userId="dfb708c9-d8dc-439f-9a3b-c772bf4a311c" providerId="ADAL" clId="{95DC2182-BA54-4583-9E8E-B21E5C8D4D55}" dt="2023-02-26T08:51:59.487" v="25507"/>
-        <pc:sldMkLst>
-          <pc:docMk/>
-          <pc:sldMk cId="3362761059" sldId="593"/>
-        </pc:sldMkLst>
-      </pc:sldChg>
-      <pc:sldChg chg="add ord">
-        <pc:chgData name="Matthieu De Mari" userId="dfb708c9-d8dc-439f-9a3b-c772bf4a311c" providerId="ADAL" clId="{95DC2182-BA54-4583-9E8E-B21E5C8D4D55}" dt="2023-02-26T08:51:59.487" v="25507"/>
-        <pc:sldMkLst>
-          <pc:docMk/>
-          <pc:sldMk cId="239607028" sldId="594"/>
-        </pc:sldMkLst>
-      </pc:sldChg>
-      <pc:sldChg chg="modSp add mod ord">
-        <pc:chgData name="Matthieu De Mari" userId="dfb708c9-d8dc-439f-9a3b-c772bf4a311c" providerId="ADAL" clId="{95DC2182-BA54-4583-9E8E-B21E5C8D4D55}" dt="2023-02-26T08:51:59.487" v="25507"/>
-        <pc:sldMkLst>
-          <pc:docMk/>
-          <pc:sldMk cId="3681758499" sldId="595"/>
-        </pc:sldMkLst>
-      </pc:sldChg>
-      <pc:sldChg chg="addSp delSp modSp add mod">
-        <pc:chgData name="Matthieu De Mari" userId="dfb708c9-d8dc-439f-9a3b-c772bf4a311c" providerId="ADAL" clId="{95DC2182-BA54-4583-9E8E-B21E5C8D4D55}" dt="2023-02-23T05:59:57.960" v="10204" actId="22"/>
-        <pc:sldMkLst>
-          <pc:docMk/>
-          <pc:sldMk cId="3292545768" sldId="596"/>
-        </pc:sldMkLst>
-      </pc:sldChg>
-      <pc:sldChg chg="add ord">
-        <pc:chgData name="Matthieu De Mari" userId="dfb708c9-d8dc-439f-9a3b-c772bf4a311c" providerId="ADAL" clId="{95DC2182-BA54-4583-9E8E-B21E5C8D4D55}" dt="2023-02-26T08:51:59.487" v="25507"/>
-        <pc:sldMkLst>
-          <pc:docMk/>
-          <pc:sldMk cId="337788125" sldId="597"/>
-        </pc:sldMkLst>
-      </pc:sldChg>
-      <pc:sldChg chg="addSp delSp modSp new mod ord modClrScheme chgLayout">
-        <pc:chgData name="Matthieu De Mari" userId="dfb708c9-d8dc-439f-9a3b-c772bf4a311c" providerId="ADAL" clId="{95DC2182-BA54-4583-9E8E-B21E5C8D4D55}" dt="2023-02-26T08:51:59.487" v="25507"/>
-        <pc:sldMkLst>
-          <pc:docMk/>
-          <pc:sldMk cId="2646292586" sldId="598"/>
-        </pc:sldMkLst>
-      </pc:sldChg>
-      <pc:sldChg chg="modSp new mod ord">
-        <pc:chgData name="Matthieu De Mari" userId="dfb708c9-d8dc-439f-9a3b-c772bf4a311c" providerId="ADAL" clId="{95DC2182-BA54-4583-9E8E-B21E5C8D4D55}" dt="2023-02-26T08:51:59.487" v="25507"/>
-        <pc:sldMkLst>
-          <pc:docMk/>
-          <pc:sldMk cId="1390758074" sldId="599"/>
-        </pc:sldMkLst>
-      </pc:sldChg>
-      <pc:sldChg chg="addSp delSp modSp new mod modClrScheme chgLayout">
-        <pc:chgData name="Matthieu De Mari" userId="dfb708c9-d8dc-439f-9a3b-c772bf4a311c" providerId="ADAL" clId="{95DC2182-BA54-4583-9E8E-B21E5C8D4D55}" dt="2023-02-26T07:37:19.683" v="19358" actId="113"/>
-        <pc:sldMkLst>
-          <pc:docMk/>
-          <pc:sldMk cId="3499753351" sldId="600"/>
-        </pc:sldMkLst>
-      </pc:sldChg>
-      <pc:sldChg chg="addSp delSp modSp new mod">
-        <pc:chgData name="Matthieu De Mari" userId="dfb708c9-d8dc-439f-9a3b-c772bf4a311c" providerId="ADAL" clId="{95DC2182-BA54-4583-9E8E-B21E5C8D4D55}" dt="2023-02-23T06:38:30.396" v="13775"/>
-        <pc:sldMkLst>
-          <pc:docMk/>
-          <pc:sldMk cId="1913740079" sldId="601"/>
-        </pc:sldMkLst>
-      </pc:sldChg>
-      <pc:sldChg chg="addSp delSp modSp add mod">
-        <pc:chgData name="Matthieu De Mari" userId="dfb708c9-d8dc-439f-9a3b-c772bf4a311c" providerId="ADAL" clId="{95DC2182-BA54-4583-9E8E-B21E5C8D4D55}" dt="2023-02-26T07:37:49.435" v="19374" actId="20577"/>
-        <pc:sldMkLst>
-          <pc:docMk/>
-          <pc:sldMk cId="4011461575" sldId="602"/>
-        </pc:sldMkLst>
-      </pc:sldChg>
-      <pc:sldChg chg="addSp delSp modSp add mod">
-        <pc:chgData name="Matthieu De Mari" userId="dfb708c9-d8dc-439f-9a3b-c772bf4a311c" providerId="ADAL" clId="{95DC2182-BA54-4583-9E8E-B21E5C8D4D55}" dt="2023-02-23T06:38:32.702" v="13777"/>
-        <pc:sldMkLst>
-          <pc:docMk/>
-          <pc:sldMk cId="2445909842" sldId="603"/>
-        </pc:sldMkLst>
-      </pc:sldChg>
-      <pc:sldChg chg="addSp modSp add mod">
-        <pc:chgData name="Matthieu De Mari" userId="dfb708c9-d8dc-439f-9a3b-c772bf4a311c" providerId="ADAL" clId="{95DC2182-BA54-4583-9E8E-B21E5C8D4D55}" dt="2023-02-23T06:38:27.236" v="13773" actId="1076"/>
-        <pc:sldMkLst>
-          <pc:docMk/>
-          <pc:sldMk cId="1888637577" sldId="604"/>
-        </pc:sldMkLst>
-      </pc:sldChg>
-      <pc:sldChg chg="addSp delSp modSp add mod modClrScheme chgLayout">
-        <pc:chgData name="Matthieu De Mari" userId="dfb708c9-d8dc-439f-9a3b-c772bf4a311c" providerId="ADAL" clId="{95DC2182-BA54-4583-9E8E-B21E5C8D4D55}" dt="2023-02-23T11:36:18.598" v="17804" actId="5793"/>
-        <pc:sldMkLst>
-          <pc:docMk/>
-          <pc:sldMk cId="3313007867" sldId="605"/>
-        </pc:sldMkLst>
-      </pc:sldChg>
-      <pc:sldChg chg="addSp delSp modSp new add del mod ord">
-        <pc:chgData name="Matthieu De Mari" userId="dfb708c9-d8dc-439f-9a3b-c772bf4a311c" providerId="ADAL" clId="{95DC2182-BA54-4583-9E8E-B21E5C8D4D55}" dt="2023-02-23T11:01:07.522" v="17147" actId="1076"/>
-        <pc:sldMkLst>
-          <pc:docMk/>
-          <pc:sldMk cId="544744450" sldId="606"/>
-        </pc:sldMkLst>
-      </pc:sldChg>
-      <pc:sldChg chg="addSp delSp modSp add mod modClrScheme chgLayout">
-        <pc:chgData name="Matthieu De Mari" userId="dfb708c9-d8dc-439f-9a3b-c772bf4a311c" providerId="ADAL" clId="{95DC2182-BA54-4583-9E8E-B21E5C8D4D55}" dt="2023-02-23T09:34:43.593" v="16656" actId="1076"/>
-        <pc:sldMkLst>
-          <pc:docMk/>
-          <pc:sldMk cId="2835508014" sldId="607"/>
-        </pc:sldMkLst>
-      </pc:sldChg>
-      <pc:sldChg chg="addSp delSp modSp add mod modClrScheme chgLayout">
-        <pc:chgData name="Matthieu De Mari" userId="dfb708c9-d8dc-439f-9a3b-c772bf4a311c" providerId="ADAL" clId="{95DC2182-BA54-4583-9E8E-B21E5C8D4D55}" dt="2023-02-23T09:43:19.433" v="16892" actId="20577"/>
-        <pc:sldMkLst>
-          <pc:docMk/>
-          <pc:sldMk cId="3494463352" sldId="608"/>
-        </pc:sldMkLst>
-      </pc:sldChg>
-      <pc:sldChg chg="modSp add mod">
-        <pc:chgData name="Matthieu De Mari" userId="dfb708c9-d8dc-439f-9a3b-c772bf4a311c" providerId="ADAL" clId="{95DC2182-BA54-4583-9E8E-B21E5C8D4D55}" dt="2023-02-23T11:36:16.260" v="17803" actId="5793"/>
-        <pc:sldMkLst>
-          <pc:docMk/>
-          <pc:sldMk cId="1274089717" sldId="609"/>
-        </pc:sldMkLst>
-      </pc:sldChg>
-      <pc:sldChg chg="modSp add mod">
-        <pc:chgData name="Matthieu De Mari" userId="dfb708c9-d8dc-439f-9a3b-c772bf4a311c" providerId="ADAL" clId="{95DC2182-BA54-4583-9E8E-B21E5C8D4D55}" dt="2023-02-23T09:42:56.991" v="16878" actId="27636"/>
-        <pc:sldMkLst>
-          <pc:docMk/>
-          <pc:sldMk cId="1149178855" sldId="610"/>
-        </pc:sldMkLst>
-      </pc:sldChg>
-      <pc:sldChg chg="modSp add mod">
-        <pc:chgData name="Matthieu De Mari" userId="dfb708c9-d8dc-439f-9a3b-c772bf4a311c" providerId="ADAL" clId="{95DC2182-BA54-4583-9E8E-B21E5C8D4D55}" dt="2023-02-23T09:32:16.226" v="16259" actId="5793"/>
-        <pc:sldMkLst>
-          <pc:docMk/>
-          <pc:sldMk cId="1655947162" sldId="611"/>
-        </pc:sldMkLst>
-      </pc:sldChg>
-      <pc:sldChg chg="add ord">
-        <pc:chgData name="Matthieu De Mari" userId="dfb708c9-d8dc-439f-9a3b-c772bf4a311c" providerId="ADAL" clId="{95DC2182-BA54-4583-9E8E-B21E5C8D4D55}" dt="2023-02-23T11:04:15.978" v="17200"/>
-        <pc:sldMkLst>
-          <pc:docMk/>
-          <pc:sldMk cId="1079237185" sldId="612"/>
-        </pc:sldMkLst>
-      </pc:sldChg>
-      <pc:sldChg chg="addSp delSp modSp new mod">
-        <pc:chgData name="Matthieu De Mari" userId="dfb708c9-d8dc-439f-9a3b-c772bf4a311c" providerId="ADAL" clId="{95DC2182-BA54-4583-9E8E-B21E5C8D4D55}" dt="2023-02-23T09:38:29.534" v="16823" actId="20577"/>
-        <pc:sldMkLst>
-          <pc:docMk/>
-          <pc:sldMk cId="3584089474" sldId="613"/>
-        </pc:sldMkLst>
-      </pc:sldChg>
-      <pc:sldChg chg="addSp delSp modSp add mod modClrScheme chgLayout">
-        <pc:chgData name="Matthieu De Mari" userId="dfb708c9-d8dc-439f-9a3b-c772bf4a311c" providerId="ADAL" clId="{95DC2182-BA54-4583-9E8E-B21E5C8D4D55}" dt="2023-02-23T11:05:02.668" v="17237" actId="20577"/>
-        <pc:sldMkLst>
-          <pc:docMk/>
-          <pc:sldMk cId="1726322392" sldId="614"/>
-        </pc:sldMkLst>
-      </pc:sldChg>
-      <pc:sldChg chg="addSp delSp modSp new del mod">
-        <pc:chgData name="Matthieu De Mari" userId="dfb708c9-d8dc-439f-9a3b-c772bf4a311c" providerId="ADAL" clId="{95DC2182-BA54-4583-9E8E-B21E5C8D4D55}" dt="2023-02-23T11:00:47.480" v="17143" actId="47"/>
-        <pc:sldMkLst>
-          <pc:docMk/>
-          <pc:sldMk cId="469800146" sldId="615"/>
-        </pc:sldMkLst>
-      </pc:sldChg>
-      <pc:sldChg chg="addSp delSp modSp add mod">
-        <pc:chgData name="Matthieu De Mari" userId="dfb708c9-d8dc-439f-9a3b-c772bf4a311c" providerId="ADAL" clId="{95DC2182-BA54-4583-9E8E-B21E5C8D4D55}" dt="2023-02-23T11:01:35.124" v="17195" actId="1076"/>
-        <pc:sldMkLst>
-          <pc:docMk/>
-          <pc:sldMk cId="1478687394" sldId="615"/>
-        </pc:sldMkLst>
-      </pc:sldChg>
-      <pc:sldChg chg="add del ord">
-        <pc:chgData name="Matthieu De Mari" userId="dfb708c9-d8dc-439f-9a3b-c772bf4a311c" providerId="ADAL" clId="{95DC2182-BA54-4583-9E8E-B21E5C8D4D55}" dt="2023-02-23T11:22:28.169" v="17391" actId="2696"/>
-        <pc:sldMkLst>
-          <pc:docMk/>
-          <pc:sldMk cId="2287299756" sldId="616"/>
-        </pc:sldMkLst>
-      </pc:sldChg>
-      <pc:sldChg chg="addSp modSp add mod ord modClrScheme chgLayout">
-        <pc:chgData name="Matthieu De Mari" userId="dfb708c9-d8dc-439f-9a3b-c772bf4a311c" providerId="ADAL" clId="{95DC2182-BA54-4583-9E8E-B21E5C8D4D55}" dt="2023-02-23T11:24:51.984" v="17467" actId="20577"/>
-        <pc:sldMkLst>
-          <pc:docMk/>
-          <pc:sldMk cId="2697134679" sldId="616"/>
-        </pc:sldMkLst>
-      </pc:sldChg>
-      <pc:sldChg chg="addSp delSp modSp add del mod">
-        <pc:chgData name="Matthieu De Mari" userId="dfb708c9-d8dc-439f-9a3b-c772bf4a311c" providerId="ADAL" clId="{95DC2182-BA54-4583-9E8E-B21E5C8D4D55}" dt="2023-02-23T11:00:48.453" v="17144" actId="47"/>
-        <pc:sldMkLst>
-          <pc:docMk/>
-          <pc:sldMk cId="2860911120" sldId="616"/>
-        </pc:sldMkLst>
-      </pc:sldChg>
-      <pc:sldChg chg="modSp add mod">
-        <pc:chgData name="Matthieu De Mari" userId="dfb708c9-d8dc-439f-9a3b-c772bf4a311c" providerId="ADAL" clId="{95DC2182-BA54-4583-9E8E-B21E5C8D4D55}" dt="2023-02-26T07:38:59.531" v="19401" actId="113"/>
-        <pc:sldMkLst>
-          <pc:docMk/>
-          <pc:sldMk cId="1087818113" sldId="617"/>
-        </pc:sldMkLst>
-      </pc:sldChg>
-      <pc:sldChg chg="addSp delSp modSp add del mod">
-        <pc:chgData name="Matthieu De Mari" userId="dfb708c9-d8dc-439f-9a3b-c772bf4a311c" providerId="ADAL" clId="{95DC2182-BA54-4583-9E8E-B21E5C8D4D55}" dt="2023-02-23T11:00:50.614" v="17145" actId="47"/>
-        <pc:sldMkLst>
-          <pc:docMk/>
-          <pc:sldMk cId="2582365728" sldId="617"/>
-        </pc:sldMkLst>
-      </pc:sldChg>
-      <pc:sldChg chg="modSp new del mod">
-        <pc:chgData name="Matthieu De Mari" userId="dfb708c9-d8dc-439f-9a3b-c772bf4a311c" providerId="ADAL" clId="{95DC2182-BA54-4583-9E8E-B21E5C8D4D55}" dt="2023-02-23T11:25:02.305" v="17470" actId="47"/>
-        <pc:sldMkLst>
-          <pc:docMk/>
-          <pc:sldMk cId="1744965747" sldId="618"/>
-        </pc:sldMkLst>
-      </pc:sldChg>
-      <pc:sldChg chg="modSp add mod">
-        <pc:chgData name="Matthieu De Mari" userId="dfb708c9-d8dc-439f-9a3b-c772bf4a311c" providerId="ADAL" clId="{95DC2182-BA54-4583-9E8E-B21E5C8D4D55}" dt="2023-02-23T11:26:25.692" v="17518" actId="20577"/>
-        <pc:sldMkLst>
-          <pc:docMk/>
-          <pc:sldMk cId="2052607657" sldId="619"/>
-        </pc:sldMkLst>
-      </pc:sldChg>
-      <pc:sldChg chg="modSp add mod">
-        <pc:chgData name="Matthieu De Mari" userId="dfb708c9-d8dc-439f-9a3b-c772bf4a311c" providerId="ADAL" clId="{95DC2182-BA54-4583-9E8E-B21E5C8D4D55}" dt="2023-02-23T11:30:14.608" v="17593" actId="20577"/>
-        <pc:sldMkLst>
-          <pc:docMk/>
-          <pc:sldMk cId="1028237814" sldId="620"/>
-        </pc:sldMkLst>
-      </pc:sldChg>
-      <pc:sldChg chg="modSp new del mod">
-        <pc:chgData name="Matthieu De Mari" userId="dfb708c9-d8dc-439f-9a3b-c772bf4a311c" providerId="ADAL" clId="{95DC2182-BA54-4583-9E8E-B21E5C8D4D55}" dt="2023-02-23T11:32:21.609" v="17677" actId="47"/>
-        <pc:sldMkLst>
-          <pc:docMk/>
-          <pc:sldMk cId="674043654" sldId="621"/>
-        </pc:sldMkLst>
-      </pc:sldChg>
-      <pc:sldChg chg="modSp add mod">
-        <pc:chgData name="Matthieu De Mari" userId="dfb708c9-d8dc-439f-9a3b-c772bf4a311c" providerId="ADAL" clId="{95DC2182-BA54-4583-9E8E-B21E5C8D4D55}" dt="2023-02-23T11:40:07.473" v="17897" actId="113"/>
-        <pc:sldMkLst>
-          <pc:docMk/>
-          <pc:sldMk cId="204647563" sldId="622"/>
-        </pc:sldMkLst>
-      </pc:sldChg>
-      <pc:sldChg chg="add del">
-        <pc:chgData name="Matthieu De Mari" userId="dfb708c9-d8dc-439f-9a3b-c772bf4a311c" providerId="ADAL" clId="{95DC2182-BA54-4583-9E8E-B21E5C8D4D55}" dt="2023-02-23T11:32:32.069" v="17686" actId="47"/>
-        <pc:sldMkLst>
-          <pc:docMk/>
-          <pc:sldMk cId="1519993866" sldId="623"/>
-        </pc:sldMkLst>
-      </pc:sldChg>
-      <pc:sldChg chg="modSp add mod">
-        <pc:chgData name="Matthieu De Mari" userId="dfb708c9-d8dc-439f-9a3b-c772bf4a311c" providerId="ADAL" clId="{95DC2182-BA54-4583-9E8E-B21E5C8D4D55}" dt="2023-02-23T11:46:58.301" v="18586" actId="20577"/>
-        <pc:sldMkLst>
-          <pc:docMk/>
-          <pc:sldMk cId="3109980527" sldId="624"/>
-        </pc:sldMkLst>
-      </pc:sldChg>
-      <pc:sldChg chg="add del">
-        <pc:chgData name="Matthieu De Mari" userId="dfb708c9-d8dc-439f-9a3b-c772bf4a311c" providerId="ADAL" clId="{95DC2182-BA54-4583-9E8E-B21E5C8D4D55}" dt="2023-02-23T11:32:33.987" v="17687" actId="47"/>
-        <pc:sldMkLst>
-          <pc:docMk/>
-          <pc:sldMk cId="1400857828" sldId="625"/>
-        </pc:sldMkLst>
-      </pc:sldChg>
-      <pc:sldChg chg="add del">
-        <pc:chgData name="Matthieu De Mari" userId="dfb708c9-d8dc-439f-9a3b-c772bf4a311c" providerId="ADAL" clId="{95DC2182-BA54-4583-9E8E-B21E5C8D4D55}" dt="2023-02-23T11:32:35.205" v="17688" actId="47"/>
-        <pc:sldMkLst>
-          <pc:docMk/>
-          <pc:sldMk cId="2617072352" sldId="626"/>
-        </pc:sldMkLst>
-      </pc:sldChg>
-      <pc:sldChg chg="addSp delSp modSp add mod">
-        <pc:chgData name="Matthieu De Mari" userId="dfb708c9-d8dc-439f-9a3b-c772bf4a311c" providerId="ADAL" clId="{95DC2182-BA54-4583-9E8E-B21E5C8D4D55}" dt="2023-02-26T07:39:25.714" v="19403"/>
-        <pc:sldMkLst>
-          <pc:docMk/>
-          <pc:sldMk cId="491578291" sldId="627"/>
-        </pc:sldMkLst>
-      </pc:sldChg>
-      <pc:sldChg chg="addSp delSp modSp add mod">
-        <pc:chgData name="Matthieu De Mari" userId="dfb708c9-d8dc-439f-9a3b-c772bf4a311c" providerId="ADAL" clId="{95DC2182-BA54-4583-9E8E-B21E5C8D4D55}" dt="2023-02-23T11:57:51.740" v="19189" actId="20577"/>
-        <pc:sldMkLst>
-          <pc:docMk/>
-          <pc:sldMk cId="4059265678" sldId="628"/>
-        </pc:sldMkLst>
-      </pc:sldChg>
-      <pc:sldChg chg="addSp delSp modSp add mod">
-        <pc:chgData name="Matthieu De Mari" userId="dfb708c9-d8dc-439f-9a3b-c772bf4a311c" providerId="ADAL" clId="{95DC2182-BA54-4583-9E8E-B21E5C8D4D55}" dt="2023-02-23T11:58:11.946" v="19193" actId="1076"/>
-        <pc:sldMkLst>
-          <pc:docMk/>
-          <pc:sldMk cId="2696285505" sldId="629"/>
-        </pc:sldMkLst>
-      </pc:sldChg>
-      <pc:sldChg chg="addSp delSp modSp add mod">
-        <pc:chgData name="Matthieu De Mari" userId="dfb708c9-d8dc-439f-9a3b-c772bf4a311c" providerId="ADAL" clId="{95DC2182-BA54-4583-9E8E-B21E5C8D4D55}" dt="2023-02-23T11:58:24.032" v="19195" actId="1076"/>
-        <pc:sldMkLst>
-          <pc:docMk/>
-          <pc:sldMk cId="3403244392" sldId="630"/>
-        </pc:sldMkLst>
-      </pc:sldChg>
-      <pc:sldChg chg="addSp delSp modSp add mod">
-        <pc:chgData name="Matthieu De Mari" userId="dfb708c9-d8dc-439f-9a3b-c772bf4a311c" providerId="ADAL" clId="{95DC2182-BA54-4583-9E8E-B21E5C8D4D55}" dt="2023-02-23T11:58:36.759" v="19197" actId="1076"/>
-        <pc:sldMkLst>
-          <pc:docMk/>
-          <pc:sldMk cId="3378674748" sldId="631"/>
-        </pc:sldMkLst>
-      </pc:sldChg>
-      <pc:sldChg chg="addSp delSp modSp add mod">
-        <pc:chgData name="Matthieu De Mari" userId="dfb708c9-d8dc-439f-9a3b-c772bf4a311c" providerId="ADAL" clId="{95DC2182-BA54-4583-9E8E-B21E5C8D4D55}" dt="2023-02-23T11:58:58.685" v="19200" actId="1076"/>
-        <pc:sldMkLst>
-          <pc:docMk/>
-          <pc:sldMk cId="3237577112" sldId="632"/>
-        </pc:sldMkLst>
-      </pc:sldChg>
-      <pc:sldChg chg="modSp add mod">
-        <pc:chgData name="Matthieu De Mari" userId="dfb708c9-d8dc-439f-9a3b-c772bf4a311c" providerId="ADAL" clId="{95DC2182-BA54-4583-9E8E-B21E5C8D4D55}" dt="2023-02-23T11:44:43.452" v="18255" actId="113"/>
-        <pc:sldMkLst>
-          <pc:docMk/>
-          <pc:sldMk cId="3821484596" sldId="633"/>
-        </pc:sldMkLst>
-      </pc:sldChg>
-      <pc:sldChg chg="modSp add mod">
-        <pc:chgData name="Matthieu De Mari" userId="dfb708c9-d8dc-439f-9a3b-c772bf4a311c" providerId="ADAL" clId="{95DC2182-BA54-4583-9E8E-B21E5C8D4D55}" dt="2023-02-26T07:39:41.850" v="19415" actId="20577"/>
-        <pc:sldMkLst>
-          <pc:docMk/>
-          <pc:sldMk cId="875945898" sldId="634"/>
-        </pc:sldMkLst>
-      </pc:sldChg>
-      <pc:sldChg chg="addSp modSp add mod modClrScheme chgLayout">
-        <pc:chgData name="Matthieu De Mari" userId="dfb708c9-d8dc-439f-9a3b-c772bf4a311c" providerId="ADAL" clId="{95DC2182-BA54-4583-9E8E-B21E5C8D4D55}" dt="2023-02-26T07:40:44.893" v="19434" actId="20577"/>
-        <pc:sldMkLst>
-          <pc:docMk/>
-          <pc:sldMk cId="956888542" sldId="635"/>
-        </pc:sldMkLst>
-      </pc:sldChg>
-      <pc:sldChg chg="modSp add mod">
-        <pc:chgData name="Matthieu De Mari" userId="dfb708c9-d8dc-439f-9a3b-c772bf4a311c" providerId="ADAL" clId="{95DC2182-BA54-4583-9E8E-B21E5C8D4D55}" dt="2023-02-26T07:41:01.441" v="19435"/>
-        <pc:sldMkLst>
-          <pc:docMk/>
-          <pc:sldMk cId="9821103" sldId="636"/>
-        </pc:sldMkLst>
-      </pc:sldChg>
-      <pc:sldChg chg="addSp delSp modSp new mod">
-        <pc:chgData name="Matthieu De Mari" userId="dfb708c9-d8dc-439f-9a3b-c772bf4a311c" providerId="ADAL" clId="{95DC2182-BA54-4583-9E8E-B21E5C8D4D55}" dt="2023-02-26T08:33:50.414" v="23836" actId="20577"/>
-        <pc:sldMkLst>
-          <pc:docMk/>
-          <pc:sldMk cId="1731878414" sldId="637"/>
-        </pc:sldMkLst>
-      </pc:sldChg>
-      <pc:sldChg chg="addSp delSp modSp new mod modClrScheme chgLayout">
-        <pc:chgData name="Matthieu De Mari" userId="dfb708c9-d8dc-439f-9a3b-c772bf4a311c" providerId="ADAL" clId="{95DC2182-BA54-4583-9E8E-B21E5C8D4D55}" dt="2023-02-26T07:51:17.949" v="20100" actId="207"/>
-        <pc:sldMkLst>
-          <pc:docMk/>
-          <pc:sldMk cId="1290242122" sldId="638"/>
-        </pc:sldMkLst>
-      </pc:sldChg>
-      <pc:sldChg chg="addSp delSp modSp new mod">
-        <pc:chgData name="Matthieu De Mari" userId="dfb708c9-d8dc-439f-9a3b-c772bf4a311c" providerId="ADAL" clId="{95DC2182-BA54-4583-9E8E-B21E5C8D4D55}" dt="2023-02-26T07:49:29.626" v="19989" actId="208"/>
-        <pc:sldMkLst>
-          <pc:docMk/>
-          <pc:sldMk cId="4283342382" sldId="639"/>
-        </pc:sldMkLst>
-      </pc:sldChg>
-      <pc:sldChg chg="addSp delSp modSp new mod">
-        <pc:chgData name="Matthieu De Mari" userId="dfb708c9-d8dc-439f-9a3b-c772bf4a311c" providerId="ADAL" clId="{95DC2182-BA54-4583-9E8E-B21E5C8D4D55}" dt="2023-02-26T07:54:53.760" v="20579" actId="14100"/>
-        <pc:sldMkLst>
-          <pc:docMk/>
-          <pc:sldMk cId="3527748531" sldId="640"/>
-        </pc:sldMkLst>
-      </pc:sldChg>
-      <pc:sldChg chg="modSp add mod">
-        <pc:chgData name="Matthieu De Mari" userId="dfb708c9-d8dc-439f-9a3b-c772bf4a311c" providerId="ADAL" clId="{95DC2182-BA54-4583-9E8E-B21E5C8D4D55}" dt="2023-02-26T08:01:55.944" v="21493" actId="20577"/>
-        <pc:sldMkLst>
-          <pc:docMk/>
-          <pc:sldMk cId="3298110552" sldId="641"/>
-        </pc:sldMkLst>
-      </pc:sldChg>
-      <pc:sldChg chg="addSp modSp add mod">
-        <pc:chgData name="Matthieu De Mari" userId="dfb708c9-d8dc-439f-9a3b-c772bf4a311c" providerId="ADAL" clId="{95DC2182-BA54-4583-9E8E-B21E5C8D4D55}" dt="2023-02-26T07:55:50.474" v="20800" actId="1076"/>
-        <pc:sldMkLst>
-          <pc:docMk/>
-          <pc:sldMk cId="4241197121" sldId="642"/>
-        </pc:sldMkLst>
-      </pc:sldChg>
-      <pc:sldChg chg="add del">
-        <pc:chgData name="Matthieu De Mari" userId="dfb708c9-d8dc-439f-9a3b-c772bf4a311c" providerId="ADAL" clId="{95DC2182-BA54-4583-9E8E-B21E5C8D4D55}" dt="2023-02-26T07:55:43.929" v="20797"/>
-        <pc:sldMkLst>
-          <pc:docMk/>
-          <pc:sldMk cId="610146181" sldId="643"/>
-        </pc:sldMkLst>
-      </pc:sldChg>
-      <pc:sldChg chg="addSp delSp modSp add mod">
-        <pc:chgData name="Matthieu De Mari" userId="dfb708c9-d8dc-439f-9a3b-c772bf4a311c" providerId="ADAL" clId="{95DC2182-BA54-4583-9E8E-B21E5C8D4D55}" dt="2023-02-26T08:02:06.838" v="21504" actId="20577"/>
-        <pc:sldMkLst>
-          <pc:docMk/>
-          <pc:sldMk cId="1487822837" sldId="643"/>
-        </pc:sldMkLst>
-      </pc:sldChg>
-      <pc:sldChg chg="addSp delSp modSp add mod">
-        <pc:chgData name="Matthieu De Mari" userId="dfb708c9-d8dc-439f-9a3b-c772bf4a311c" providerId="ADAL" clId="{95DC2182-BA54-4583-9E8E-B21E5C8D4D55}" dt="2023-02-26T08:02:12.887" v="21513" actId="20577"/>
-        <pc:sldMkLst>
-          <pc:docMk/>
-          <pc:sldMk cId="715032396" sldId="644"/>
-        </pc:sldMkLst>
-      </pc:sldChg>
-      <pc:sldChg chg="addSp delSp modSp add mod chgLayout">
-        <pc:chgData name="Matthieu De Mari" userId="dfb708c9-d8dc-439f-9a3b-c772bf4a311c" providerId="ADAL" clId="{95DC2182-BA54-4583-9E8E-B21E5C8D4D55}" dt="2023-02-26T08:08:00.561" v="21944" actId="20577"/>
-        <pc:sldMkLst>
-          <pc:docMk/>
-          <pc:sldMk cId="1850403076" sldId="645"/>
-        </pc:sldMkLst>
-      </pc:sldChg>
-      <pc:sldChg chg="addSp delSp modSp add mod">
-        <pc:chgData name="Matthieu De Mari" userId="dfb708c9-d8dc-439f-9a3b-c772bf4a311c" providerId="ADAL" clId="{95DC2182-BA54-4583-9E8E-B21E5C8D4D55}" dt="2023-02-26T08:03:15.451" v="21600" actId="1076"/>
-        <pc:sldMkLst>
-          <pc:docMk/>
-          <pc:sldMk cId="3708794977" sldId="646"/>
-        </pc:sldMkLst>
-      </pc:sldChg>
-      <pc:sldChg chg="new del">
-        <pc:chgData name="Matthieu De Mari" userId="dfb708c9-d8dc-439f-9a3b-c772bf4a311c" providerId="ADAL" clId="{95DC2182-BA54-4583-9E8E-B21E5C8D4D55}" dt="2023-02-26T08:25:21.334" v="22855" actId="47"/>
-        <pc:sldMkLst>
-          <pc:docMk/>
-          <pc:sldMk cId="643363626" sldId="647"/>
-        </pc:sldMkLst>
-      </pc:sldChg>
-      <pc:sldChg chg="addSp delSp modSp add mod ord">
-        <pc:chgData name="Matthieu De Mari" userId="dfb708c9-d8dc-439f-9a3b-c772bf4a311c" providerId="ADAL" clId="{95DC2182-BA54-4583-9E8E-B21E5C8D4D55}" dt="2023-02-26T08:25:45.717" v="22863" actId="20577"/>
-        <pc:sldMkLst>
-          <pc:docMk/>
-          <pc:sldMk cId="2404237809" sldId="648"/>
-        </pc:sldMkLst>
-      </pc:sldChg>
-      <pc:sldChg chg="addSp modSp add mod ord">
-        <pc:chgData name="Matthieu De Mari" userId="dfb708c9-d8dc-439f-9a3b-c772bf4a311c" providerId="ADAL" clId="{95DC2182-BA54-4583-9E8E-B21E5C8D4D55}" dt="2023-02-26T08:26:02.661" v="22885"/>
-        <pc:sldMkLst>
-          <pc:docMk/>
-          <pc:sldMk cId="1952442680" sldId="649"/>
-        </pc:sldMkLst>
-      </pc:sldChg>
-      <pc:sldChg chg="modSp add mod">
-        <pc:chgData name="Matthieu De Mari" userId="dfb708c9-d8dc-439f-9a3b-c772bf4a311c" providerId="ADAL" clId="{95DC2182-BA54-4583-9E8E-B21E5C8D4D55}" dt="2023-02-26T08:25:58.425" v="22884" actId="20577"/>
-        <pc:sldMkLst>
-          <pc:docMk/>
-          <pc:sldMk cId="3215884619" sldId="650"/>
-        </pc:sldMkLst>
-      </pc:sldChg>
-      <pc:sldChg chg="addSp modSp add mod">
-        <pc:chgData name="Matthieu De Mari" userId="dfb708c9-d8dc-439f-9a3b-c772bf4a311c" providerId="ADAL" clId="{95DC2182-BA54-4583-9E8E-B21E5C8D4D55}" dt="2023-02-26T08:21:09.108" v="22566" actId="1076"/>
-        <pc:sldMkLst>
-          <pc:docMk/>
-          <pc:sldMk cId="2595195584" sldId="651"/>
-        </pc:sldMkLst>
-      </pc:sldChg>
-      <pc:sldChg chg="addSp modSp add mod">
-        <pc:chgData name="Matthieu De Mari" userId="dfb708c9-d8dc-439f-9a3b-c772bf4a311c" providerId="ADAL" clId="{95DC2182-BA54-4583-9E8E-B21E5C8D4D55}" dt="2023-02-26T08:22:28.656" v="22594" actId="1037"/>
-        <pc:sldMkLst>
-          <pc:docMk/>
-          <pc:sldMk cId="773672680" sldId="652"/>
-        </pc:sldMkLst>
-      </pc:sldChg>
-      <pc:sldChg chg="addSp delSp modSp add mod chgLayout">
-        <pc:chgData name="Matthieu De Mari" userId="dfb708c9-d8dc-439f-9a3b-c772bf4a311c" providerId="ADAL" clId="{95DC2182-BA54-4583-9E8E-B21E5C8D4D55}" dt="2023-02-26T08:29:10.127" v="23267" actId="20577"/>
-        <pc:sldMkLst>
-          <pc:docMk/>
-          <pc:sldMk cId="855321949" sldId="653"/>
-        </pc:sldMkLst>
-      </pc:sldChg>
-      <pc:sldChg chg="addSp delSp modSp new mod ord modClrScheme chgLayout">
-        <pc:chgData name="Matthieu De Mari" userId="dfb708c9-d8dc-439f-9a3b-c772bf4a311c" providerId="ADAL" clId="{95DC2182-BA54-4583-9E8E-B21E5C8D4D55}" dt="2023-02-26T08:30:34.396" v="23518" actId="1076"/>
-        <pc:sldMkLst>
-          <pc:docMk/>
-          <pc:sldMk cId="2099660639" sldId="654"/>
-        </pc:sldMkLst>
-      </pc:sldChg>
-      <pc:sldChg chg="addSp delSp modSp add mod modClrScheme chgLayout">
-        <pc:chgData name="Matthieu De Mari" userId="dfb708c9-d8dc-439f-9a3b-c772bf4a311c" providerId="ADAL" clId="{95DC2182-BA54-4583-9E8E-B21E5C8D4D55}" dt="2023-02-26T08:45:11.474" v="24818" actId="20577"/>
-        <pc:sldMkLst>
-          <pc:docMk/>
-          <pc:sldMk cId="2451971174" sldId="655"/>
-        </pc:sldMkLst>
-      </pc:sldChg>
-      <pc:sldChg chg="addSp modSp add mod">
-        <pc:chgData name="Matthieu De Mari" userId="dfb708c9-d8dc-439f-9a3b-c772bf4a311c" providerId="ADAL" clId="{95DC2182-BA54-4583-9E8E-B21E5C8D4D55}" dt="2023-02-26T08:35:48.718" v="23984" actId="20577"/>
-        <pc:sldMkLst>
-          <pc:docMk/>
-          <pc:sldMk cId="148017835" sldId="656"/>
-        </pc:sldMkLst>
-      </pc:sldChg>
-      <pc:sldChg chg="addSp delSp modSp add mod">
-        <pc:chgData name="Matthieu De Mari" userId="dfb708c9-d8dc-439f-9a3b-c772bf4a311c" providerId="ADAL" clId="{95DC2182-BA54-4583-9E8E-B21E5C8D4D55}" dt="2023-02-26T08:37:03.529" v="24034" actId="20577"/>
-        <pc:sldMkLst>
-          <pc:docMk/>
-          <pc:sldMk cId="1922511899" sldId="657"/>
-        </pc:sldMkLst>
-      </pc:sldChg>
-      <pc:sldChg chg="addSp delSp modSp add mod">
-        <pc:chgData name="Matthieu De Mari" userId="dfb708c9-d8dc-439f-9a3b-c772bf4a311c" providerId="ADAL" clId="{95DC2182-BA54-4583-9E8E-B21E5C8D4D55}" dt="2023-02-26T08:45:36.452" v="24846" actId="20577"/>
-        <pc:sldMkLst>
-          <pc:docMk/>
-          <pc:sldMk cId="4035742227" sldId="658"/>
-        </pc:sldMkLst>
-      </pc:sldChg>
-      <pc:sldChg chg="addSp modSp add mod">
-        <pc:chgData name="Matthieu De Mari" userId="dfb708c9-d8dc-439f-9a3b-c772bf4a311c" providerId="ADAL" clId="{95DC2182-BA54-4583-9E8E-B21E5C8D4D55}" dt="2023-02-26T08:48:44.816" v="25240" actId="208"/>
-        <pc:sldMkLst>
-          <pc:docMk/>
-          <pc:sldMk cId="2096824087" sldId="659"/>
-        </pc:sldMkLst>
-      </pc:sldChg>
-      <pc:sldChg chg="addSp modSp add mod">
-        <pc:chgData name="Matthieu De Mari" userId="dfb708c9-d8dc-439f-9a3b-c772bf4a311c" providerId="ADAL" clId="{95DC2182-BA54-4583-9E8E-B21E5C8D4D55}" dt="2023-02-26T08:50:31.401" v="25403" actId="27636"/>
-        <pc:sldMkLst>
-          <pc:docMk/>
-          <pc:sldMk cId="3023865042" sldId="660"/>
-        </pc:sldMkLst>
-      </pc:sldChg>
-      <pc:sldChg chg="addSp delSp modSp add mod modClrScheme chgLayout">
-        <pc:chgData name="Matthieu De Mari" userId="dfb708c9-d8dc-439f-9a3b-c772bf4a311c" providerId="ADAL" clId="{95DC2182-BA54-4583-9E8E-B21E5C8D4D55}" dt="2023-02-26T08:59:57.695" v="26564" actId="27614"/>
-        <pc:sldMkLst>
-          <pc:docMk/>
-          <pc:sldMk cId="2303339168" sldId="661"/>
-        </pc:sldMkLst>
-      </pc:sldChg>
-      <pc:sldChg chg="modSp add mod">
-        <pc:chgData name="Matthieu De Mari" userId="dfb708c9-d8dc-439f-9a3b-c772bf4a311c" providerId="ADAL" clId="{95DC2182-BA54-4583-9E8E-B21E5C8D4D55}" dt="2023-02-26T08:57:11.565" v="26343" actId="113"/>
-        <pc:sldMkLst>
-          <pc:docMk/>
-          <pc:sldMk cId="444206811" sldId="662"/>
-        </pc:sldMkLst>
-      </pc:sldChg>
-      <pc:sldChg chg="modSp add mod">
-        <pc:chgData name="Matthieu De Mari" userId="dfb708c9-d8dc-439f-9a3b-c772bf4a311c" providerId="ADAL" clId="{95DC2182-BA54-4583-9E8E-B21E5C8D4D55}" dt="2023-02-26T08:59:51.154" v="26561" actId="20577"/>
-        <pc:sldMkLst>
-          <pc:docMk/>
-          <pc:sldMk cId="365986058" sldId="663"/>
-        </pc:sldMkLst>
-      </pc:sldChg>
-      <pc:sldChg chg="add del">
-        <pc:chgData name="Matthieu De Mari" userId="dfb708c9-d8dc-439f-9a3b-c772bf4a311c" providerId="ADAL" clId="{95DC2182-BA54-4583-9E8E-B21E5C8D4D55}" dt="2023-02-26T09:02:25.500" v="26957" actId="47"/>
-        <pc:sldMkLst>
-          <pc:docMk/>
-          <pc:sldMk cId="2221986219" sldId="664"/>
-        </pc:sldMkLst>
-      </pc:sldChg>
-      <pc:sldChg chg="add del">
-        <pc:chgData name="Matthieu De Mari" userId="dfb708c9-d8dc-439f-9a3b-c772bf4a311c" providerId="ADAL" clId="{95DC2182-BA54-4583-9E8E-B21E5C8D4D55}" dt="2023-02-26T09:02:26.166" v="26958" actId="47"/>
-        <pc:sldMkLst>
-          <pc:docMk/>
-          <pc:sldMk cId="2597465754" sldId="665"/>
-        </pc:sldMkLst>
-      </pc:sldChg>
-    </pc:docChg>
-  </pc:docChgLst>
-  <pc:docChgLst>
-    <pc:chgData name="Matthieu De Mari" userId="dfb708c9-d8dc-439f-9a3b-c772bf4a311c" providerId="ADAL" clId="{9A051B0A-64AA-4C35-ABFA-DF6E1E78BDE5}"/>
-    <pc:docChg chg="custSel addSld modSld modSection">
-      <pc:chgData name="Matthieu De Mari" userId="dfb708c9-d8dc-439f-9a3b-c772bf4a311c" providerId="ADAL" clId="{9A051B0A-64AA-4C35-ABFA-DF6E1E78BDE5}" dt="2025-02-24T01:19:14.936" v="265" actId="20577"/>
-      <pc:docMkLst>
-        <pc:docMk/>
-      </pc:docMkLst>
-      <pc:sldChg chg="modSp mod">
-        <pc:chgData name="Matthieu De Mari" userId="dfb708c9-d8dc-439f-9a3b-c772bf4a311c" providerId="ADAL" clId="{9A051B0A-64AA-4C35-ABFA-DF6E1E78BDE5}" dt="2025-02-24T01:16:53.875" v="3" actId="20577"/>
-        <pc:sldMkLst>
-          <pc:docMk/>
-          <pc:sldMk cId="3442501962" sldId="257"/>
+          <pc:sldMk cId="559955036" sldId="672"/>
         </pc:sldMkLst>
         <pc:spChg chg="mod">
-          <ac:chgData name="Matthieu De Mari" userId="dfb708c9-d8dc-439f-9a3b-c772bf4a311c" providerId="ADAL" clId="{9A051B0A-64AA-4C35-ABFA-DF6E1E78BDE5}" dt="2025-02-24T01:16:53.875" v="3" actId="20577"/>
+          <ac:chgData name="Matthieu De Mari" userId="dfb708c9-d8dc-439f-9a3b-c772bf4a311c" providerId="ADAL" clId="{81E9B007-0C2C-493E-9B93-55A62C9C1F12}" dt="2026-01-06T03:45:07.009" v="303" actId="20577"/>
           <ac:spMkLst>
             <pc:docMk/>
-            <pc:sldMk cId="3442501962" sldId="257"/>
-            <ac:spMk id="2" creationId="{49D40417-A4D3-4CE8-96E7-708E2439AE7B}"/>
+            <pc:sldMk cId="559955036" sldId="672"/>
+            <ac:spMk id="6" creationId="{A3CE3216-BB60-B2EA-0A77-7CD1D1669BBE}"/>
           </ac:spMkLst>
         </pc:spChg>
-      </pc:sldChg>
-      <pc:sldChg chg="modSp mod">
-        <pc:chgData name="Matthieu De Mari" userId="dfb708c9-d8dc-439f-9a3b-c772bf4a311c" providerId="ADAL" clId="{9A051B0A-64AA-4C35-ABFA-DF6E1E78BDE5}" dt="2025-02-24T01:16:48.729" v="1" actId="20577"/>
-        <pc:sldMkLst>
-          <pc:docMk/>
-          <pc:sldMk cId="1040156172" sldId="377"/>
-        </pc:sldMkLst>
-        <pc:spChg chg="mod">
-          <ac:chgData name="Matthieu De Mari" userId="dfb708c9-d8dc-439f-9a3b-c772bf4a311c" providerId="ADAL" clId="{9A051B0A-64AA-4C35-ABFA-DF6E1E78BDE5}" dt="2025-02-24T01:16:48.729" v="1" actId="20577"/>
-          <ac:spMkLst>
-            <pc:docMk/>
-            <pc:sldMk cId="1040156172" sldId="377"/>
-            <ac:spMk id="2" creationId="{080CEB46-CC16-4D19-8C2C-AEE9471D8168}"/>
-          </ac:spMkLst>
-        </pc:spChg>
-      </pc:sldChg>
-      <pc:sldChg chg="modSp mod">
-        <pc:chgData name="Matthieu De Mari" userId="dfb708c9-d8dc-439f-9a3b-c772bf4a311c" providerId="ADAL" clId="{9A051B0A-64AA-4C35-ABFA-DF6E1E78BDE5}" dt="2025-02-24T01:17:43.648" v="42" actId="27636"/>
-        <pc:sldMkLst>
-          <pc:docMk/>
-          <pc:sldMk cId="3946144614" sldId="379"/>
-        </pc:sldMkLst>
-        <pc:spChg chg="mod">
-          <ac:chgData name="Matthieu De Mari" userId="dfb708c9-d8dc-439f-9a3b-c772bf4a311c" providerId="ADAL" clId="{9A051B0A-64AA-4C35-ABFA-DF6E1E78BDE5}" dt="2025-02-24T01:17:43.648" v="42" actId="27636"/>
-          <ac:spMkLst>
-            <pc:docMk/>
-            <pc:sldMk cId="3946144614" sldId="379"/>
-            <ac:spMk id="5" creationId="{B00D7D74-AD4E-73AE-79C0-432D2B4B2341}"/>
-          </ac:spMkLst>
-        </pc:spChg>
-      </pc:sldChg>
-      <pc:sldChg chg="modSp mod">
-        <pc:chgData name="Matthieu De Mari" userId="dfb708c9-d8dc-439f-9a3b-c772bf4a311c" providerId="ADAL" clId="{9A051B0A-64AA-4C35-ABFA-DF6E1E78BDE5}" dt="2025-02-24T01:16:57.254" v="5" actId="20577"/>
-        <pc:sldMkLst>
-          <pc:docMk/>
-          <pc:sldMk cId="444206811" sldId="662"/>
-        </pc:sldMkLst>
-        <pc:spChg chg="mod">
-          <ac:chgData name="Matthieu De Mari" userId="dfb708c9-d8dc-439f-9a3b-c772bf4a311c" providerId="ADAL" clId="{9A051B0A-64AA-4C35-ABFA-DF6E1E78BDE5}" dt="2025-02-24T01:16:57.254" v="5" actId="20577"/>
-          <ac:spMkLst>
-            <pc:docMk/>
-            <pc:sldMk cId="444206811" sldId="662"/>
-            <ac:spMk id="2" creationId="{49D40417-A4D3-4CE8-96E7-708E2439AE7B}"/>
-          </ac:spMkLst>
-        </pc:spChg>
-      </pc:sldChg>
-      <pc:sldChg chg="addSp delSp modSp add mod chgLayout">
-        <pc:chgData name="Matthieu De Mari" userId="dfb708c9-d8dc-439f-9a3b-c772bf4a311c" providerId="ADAL" clId="{9A051B0A-64AA-4C35-ABFA-DF6E1E78BDE5}" dt="2025-02-24T01:19:14.936" v="265" actId="20577"/>
-        <pc:sldMkLst>
-          <pc:docMk/>
-          <pc:sldMk cId="4215251602" sldId="671"/>
-        </pc:sldMkLst>
-        <pc:spChg chg="add mod ord">
-          <ac:chgData name="Matthieu De Mari" userId="dfb708c9-d8dc-439f-9a3b-c772bf4a311c" providerId="ADAL" clId="{9A051B0A-64AA-4C35-ABFA-DF6E1E78BDE5}" dt="2025-02-24T01:19:14.936" v="265" actId="20577"/>
-          <ac:spMkLst>
-            <pc:docMk/>
-            <pc:sldMk cId="4215251602" sldId="671"/>
-            <ac:spMk id="2" creationId="{A3054061-007D-BC38-9BFD-0C34692CF911}"/>
-          </ac:spMkLst>
-        </pc:spChg>
-        <pc:spChg chg="mod ord">
-          <ac:chgData name="Matthieu De Mari" userId="dfb708c9-d8dc-439f-9a3b-c772bf4a311c" providerId="ADAL" clId="{9A051B0A-64AA-4C35-ABFA-DF6E1E78BDE5}" dt="2025-02-24T01:17:54.967" v="45" actId="700"/>
-          <ac:spMkLst>
-            <pc:docMk/>
-            <pc:sldMk cId="4215251602" sldId="671"/>
-            <ac:spMk id="4" creationId="{E8CBCB84-D7CC-48A5-2ABC-17123FC15AF8}"/>
-          </ac:spMkLst>
-        </pc:spChg>
-        <pc:spChg chg="mod ord">
-          <ac:chgData name="Matthieu De Mari" userId="dfb708c9-d8dc-439f-9a3b-c772bf4a311c" providerId="ADAL" clId="{9A051B0A-64AA-4C35-ABFA-DF6E1E78BDE5}" dt="2025-02-24T01:18:01.444" v="51" actId="27636"/>
-          <ac:spMkLst>
-            <pc:docMk/>
-            <pc:sldMk cId="4215251602" sldId="671"/>
-            <ac:spMk id="5" creationId="{78C80EE6-0F18-6A47-E21F-867D08ABAA5E}"/>
-          </ac:spMkLst>
-        </pc:spChg>
-        <pc:picChg chg="del">
-          <ac:chgData name="Matthieu De Mari" userId="dfb708c9-d8dc-439f-9a3b-c772bf4a311c" providerId="ADAL" clId="{9A051B0A-64AA-4C35-ABFA-DF6E1E78BDE5}" dt="2025-02-24T01:17:49.139" v="44" actId="478"/>
-          <ac:picMkLst>
-            <pc:docMk/>
-            <pc:sldMk cId="4215251602" sldId="671"/>
-            <ac:picMk id="7" creationId="{612E5DFB-B689-0DF8-49B0-F8AC1F5DEEF5}"/>
-          </ac:picMkLst>
-        </pc:picChg>
-      </pc:sldChg>
-    </pc:docChg>
-  </pc:docChgLst>
-  <pc:docChgLst>
-    <pc:chgData name="Matthieu De Mari" userId="dfb708c9-d8dc-439f-9a3b-c772bf4a311c" providerId="ADAL" clId="{413746AE-83C4-4944-A8AA-71CCD5B216E9}"/>
-    <pc:docChg chg="undo custSel addSld delSld modSld modSection">
-      <pc:chgData name="Matthieu De Mari" userId="dfb708c9-d8dc-439f-9a3b-c772bf4a311c" providerId="ADAL" clId="{413746AE-83C4-4944-A8AA-71CCD5B216E9}" dt="2024-02-26T05:10:44.147" v="330" actId="47"/>
-      <pc:docMkLst>
-        <pc:docMk/>
-      </pc:docMkLst>
-      <pc:sldChg chg="addSp delSp mod">
-        <pc:chgData name="Matthieu De Mari" userId="dfb708c9-d8dc-439f-9a3b-c772bf4a311c" providerId="ADAL" clId="{413746AE-83C4-4944-A8AA-71CCD5B216E9}" dt="2024-02-26T03:57:35.865" v="264" actId="9405"/>
-        <pc:sldMkLst>
-          <pc:docMk/>
-          <pc:sldMk cId="1040156172" sldId="377"/>
-        </pc:sldMkLst>
-      </pc:sldChg>
-      <pc:sldChg chg="del">
-        <pc:chgData name="Matthieu De Mari" userId="dfb708c9-d8dc-439f-9a3b-c772bf4a311c" providerId="ADAL" clId="{413746AE-83C4-4944-A8AA-71CCD5B216E9}" dt="2024-02-09T00:36:16.163" v="0" actId="47"/>
-        <pc:sldMkLst>
-          <pc:docMk/>
-          <pc:sldMk cId="2586666001" sldId="388"/>
-        </pc:sldMkLst>
-      </pc:sldChg>
-      <pc:sldChg chg="modSp mod">
-        <pc:chgData name="Matthieu De Mari" userId="dfb708c9-d8dc-439f-9a3b-c772bf4a311c" providerId="ADAL" clId="{413746AE-83C4-4944-A8AA-71CCD5B216E9}" dt="2024-02-09T00:45:47.238" v="46" actId="20577"/>
-        <pc:sldMkLst>
-          <pc:docMk/>
-          <pc:sldMk cId="3425780644" sldId="407"/>
-        </pc:sldMkLst>
-      </pc:sldChg>
-      <pc:sldChg chg="modSp mod">
-        <pc:chgData name="Matthieu De Mari" userId="dfb708c9-d8dc-439f-9a3b-c772bf4a311c" providerId="ADAL" clId="{413746AE-83C4-4944-A8AA-71CCD5B216E9}" dt="2024-02-09T00:48:19.214" v="246" actId="20577"/>
-        <pc:sldMkLst>
-          <pc:docMk/>
-          <pc:sldMk cId="1390758074" sldId="599"/>
-        </pc:sldMkLst>
-      </pc:sldChg>
-      <pc:sldChg chg="del">
-        <pc:chgData name="Matthieu De Mari" userId="dfb708c9-d8dc-439f-9a3b-c772bf4a311c" providerId="ADAL" clId="{413746AE-83C4-4944-A8AA-71CCD5B216E9}" dt="2024-02-09T00:44:31.492" v="17" actId="47"/>
-        <pc:sldMkLst>
-          <pc:docMk/>
-          <pc:sldMk cId="1783786614" sldId="664"/>
-        </pc:sldMkLst>
-      </pc:sldChg>
-      <pc:sldChg chg="modSp mod">
-        <pc:chgData name="Matthieu De Mari" userId="dfb708c9-d8dc-439f-9a3b-c772bf4a311c" providerId="ADAL" clId="{413746AE-83C4-4944-A8AA-71CCD5B216E9}" dt="2024-02-09T00:36:40.820" v="15" actId="20577"/>
-        <pc:sldMkLst>
-          <pc:docMk/>
-          <pc:sldMk cId="191481927" sldId="665"/>
-        </pc:sldMkLst>
-      </pc:sldChg>
-      <pc:sldChg chg="modSp mod">
-        <pc:chgData name="Matthieu De Mari" userId="dfb708c9-d8dc-439f-9a3b-c772bf4a311c" providerId="ADAL" clId="{413746AE-83C4-4944-A8AA-71CCD5B216E9}" dt="2024-02-09T00:36:47.016" v="16"/>
-        <pc:sldMkLst>
-          <pc:docMk/>
-          <pc:sldMk cId="2244926614" sldId="666"/>
-        </pc:sldMkLst>
-      </pc:sldChg>
-      <pc:sldChg chg="modSp mod">
-        <pc:chgData name="Matthieu De Mari" userId="dfb708c9-d8dc-439f-9a3b-c772bf4a311c" providerId="ADAL" clId="{413746AE-83C4-4944-A8AA-71CCD5B216E9}" dt="2024-02-09T00:46:50.360" v="169" actId="20577"/>
-        <pc:sldMkLst>
-          <pc:docMk/>
-          <pc:sldMk cId="3980169169" sldId="669"/>
-        </pc:sldMkLst>
-      </pc:sldChg>
-      <pc:sldChg chg="addSp delSp modSp new del mod">
-        <pc:chgData name="Matthieu De Mari" userId="dfb708c9-d8dc-439f-9a3b-c772bf4a311c" providerId="ADAL" clId="{413746AE-83C4-4944-A8AA-71CCD5B216E9}" dt="2024-02-26T05:10:44.147" v="330" actId="47"/>
-        <pc:sldMkLst>
-          <pc:docMk/>
-          <pc:sldMk cId="2185147656" sldId="671"/>
-        </pc:sldMkLst>
-      </pc:sldChg>
-    </pc:docChg>
-  </pc:docChgLst>
-  <pc:docChgLst>
-    <pc:chgData name="Matthieu De Mari" userId="dfb708c9-d8dc-439f-9a3b-c772bf4a311c" providerId="ADAL" clId="{8EE40018-26BD-4A7B-8D17-70AC8417C2D0}"/>
-    <pc:docChg chg="undo custSel addSld delSld modSld addSection delSection modSection">
-      <pc:chgData name="Matthieu De Mari" userId="dfb708c9-d8dc-439f-9a3b-c772bf4a311c" providerId="ADAL" clId="{8EE40018-26BD-4A7B-8D17-70AC8417C2D0}" dt="2022-11-16T06:55:05.435" v="67" actId="47"/>
-      <pc:docMkLst>
-        <pc:docMk/>
-      </pc:docMkLst>
-      <pc:sldChg chg="modSp mod">
-        <pc:chgData name="Matthieu De Mari" userId="dfb708c9-d8dc-439f-9a3b-c772bf4a311c" providerId="ADAL" clId="{8EE40018-26BD-4A7B-8D17-70AC8417C2D0}" dt="2022-11-16T06:55:04.205" v="66" actId="20577"/>
-        <pc:sldMkLst>
-          <pc:docMk/>
-          <pc:sldMk cId="3442501962" sldId="257"/>
-        </pc:sldMkLst>
-      </pc:sldChg>
-      <pc:sldChg chg="del">
-        <pc:chgData name="Matthieu De Mari" userId="dfb708c9-d8dc-439f-9a3b-c772bf4a311c" providerId="ADAL" clId="{8EE40018-26BD-4A7B-8D17-70AC8417C2D0}" dt="2022-11-16T06:54:01.441" v="17" actId="47"/>
-        <pc:sldMkLst>
-          <pc:docMk/>
-          <pc:sldMk cId="3556835968" sldId="261"/>
-        </pc:sldMkLst>
-      </pc:sldChg>
-      <pc:sldChg chg="modSp mod">
-        <pc:chgData name="Matthieu De Mari" userId="dfb708c9-d8dc-439f-9a3b-c772bf4a311c" providerId="ADAL" clId="{8EE40018-26BD-4A7B-8D17-70AC8417C2D0}" dt="2022-11-16T06:54:47.612" v="47" actId="20577"/>
-        <pc:sldMkLst>
-          <pc:docMk/>
-          <pc:sldMk cId="1893873068" sldId="266"/>
-        </pc:sldMkLst>
-      </pc:sldChg>
-      <pc:sldChg chg="modSp mod">
-        <pc:chgData name="Matthieu De Mari" userId="dfb708c9-d8dc-439f-9a3b-c772bf4a311c" providerId="ADAL" clId="{8EE40018-26BD-4A7B-8D17-70AC8417C2D0}" dt="2022-11-16T06:54:56.797" v="60" actId="20577"/>
-        <pc:sldMkLst>
-          <pc:docMk/>
-          <pc:sldMk cId="3880949074" sldId="267"/>
-        </pc:sldMkLst>
-      </pc:sldChg>
-      <pc:sldChg chg="del">
-        <pc:chgData name="Matthieu De Mari" userId="dfb708c9-d8dc-439f-9a3b-c772bf4a311c" providerId="ADAL" clId="{8EE40018-26BD-4A7B-8D17-70AC8417C2D0}" dt="2022-11-16T06:54:02.421" v="18" actId="47"/>
-        <pc:sldMkLst>
-          <pc:docMk/>
-          <pc:sldMk cId="969289828" sldId="271"/>
-        </pc:sldMkLst>
-      </pc:sldChg>
-      <pc:sldChg chg="del">
-        <pc:chgData name="Matthieu De Mari" userId="dfb708c9-d8dc-439f-9a3b-c772bf4a311c" providerId="ADAL" clId="{8EE40018-26BD-4A7B-8D17-70AC8417C2D0}" dt="2022-11-16T06:54:02.421" v="18" actId="47"/>
-        <pc:sldMkLst>
-          <pc:docMk/>
-          <pc:sldMk cId="543657650" sldId="273"/>
-        </pc:sldMkLst>
-      </pc:sldChg>
-      <pc:sldChg chg="del">
-        <pc:chgData name="Matthieu De Mari" userId="dfb708c9-d8dc-439f-9a3b-c772bf4a311c" providerId="ADAL" clId="{8EE40018-26BD-4A7B-8D17-70AC8417C2D0}" dt="2022-11-16T06:54:01.441" v="17" actId="47"/>
-        <pc:sldMkLst>
-          <pc:docMk/>
-          <pc:sldMk cId="3687792543" sldId="275"/>
-        </pc:sldMkLst>
-      </pc:sldChg>
-      <pc:sldChg chg="del">
-        <pc:chgData name="Matthieu De Mari" userId="dfb708c9-d8dc-439f-9a3b-c772bf4a311c" providerId="ADAL" clId="{8EE40018-26BD-4A7B-8D17-70AC8417C2D0}" dt="2022-11-16T06:54:03.510" v="19" actId="47"/>
-        <pc:sldMkLst>
-          <pc:docMk/>
-          <pc:sldMk cId="1852878019" sldId="276"/>
-        </pc:sldMkLst>
-      </pc:sldChg>
-      <pc:sldChg chg="del">
-        <pc:chgData name="Matthieu De Mari" userId="dfb708c9-d8dc-439f-9a3b-c772bf4a311c" providerId="ADAL" clId="{8EE40018-26BD-4A7B-8D17-70AC8417C2D0}" dt="2022-11-16T06:54:02.421" v="18" actId="47"/>
-        <pc:sldMkLst>
-          <pc:docMk/>
-          <pc:sldMk cId="355509003" sldId="278"/>
-        </pc:sldMkLst>
-      </pc:sldChg>
-      <pc:sldChg chg="del">
-        <pc:chgData name="Matthieu De Mari" userId="dfb708c9-d8dc-439f-9a3b-c772bf4a311c" providerId="ADAL" clId="{8EE40018-26BD-4A7B-8D17-70AC8417C2D0}" dt="2022-11-16T06:54:02.421" v="18" actId="47"/>
-        <pc:sldMkLst>
-          <pc:docMk/>
-          <pc:sldMk cId="3873470932" sldId="280"/>
-        </pc:sldMkLst>
-      </pc:sldChg>
-      <pc:sldChg chg="del">
-        <pc:chgData name="Matthieu De Mari" userId="dfb708c9-d8dc-439f-9a3b-c772bf4a311c" providerId="ADAL" clId="{8EE40018-26BD-4A7B-8D17-70AC8417C2D0}" dt="2022-11-16T06:54:02.421" v="18" actId="47"/>
-        <pc:sldMkLst>
-          <pc:docMk/>
-          <pc:sldMk cId="3477464442" sldId="281"/>
-        </pc:sldMkLst>
-      </pc:sldChg>
-      <pc:sldChg chg="del">
-        <pc:chgData name="Matthieu De Mari" userId="dfb708c9-d8dc-439f-9a3b-c772bf4a311c" providerId="ADAL" clId="{8EE40018-26BD-4A7B-8D17-70AC8417C2D0}" dt="2022-11-16T06:54:02.421" v="18" actId="47"/>
-        <pc:sldMkLst>
-          <pc:docMk/>
-          <pc:sldMk cId="4219540979" sldId="282"/>
-        </pc:sldMkLst>
-      </pc:sldChg>
-      <pc:sldChg chg="modSp del mod">
-        <pc:chgData name="Matthieu De Mari" userId="dfb708c9-d8dc-439f-9a3b-c772bf4a311c" providerId="ADAL" clId="{8EE40018-26BD-4A7B-8D17-70AC8417C2D0}" dt="2022-11-16T06:55:05.435" v="67" actId="47"/>
-        <pc:sldMkLst>
-          <pc:docMk/>
-          <pc:sldMk cId="2071167148" sldId="284"/>
-        </pc:sldMkLst>
-      </pc:sldChg>
-      <pc:sldChg chg="del">
-        <pc:chgData name="Matthieu De Mari" userId="dfb708c9-d8dc-439f-9a3b-c772bf4a311c" providerId="ADAL" clId="{8EE40018-26BD-4A7B-8D17-70AC8417C2D0}" dt="2022-11-16T06:54:14.637" v="28" actId="47"/>
-        <pc:sldMkLst>
-          <pc:docMk/>
-          <pc:sldMk cId="3743280645" sldId="285"/>
-        </pc:sldMkLst>
-      </pc:sldChg>
-      <pc:sldChg chg="del">
-        <pc:chgData name="Matthieu De Mari" userId="dfb708c9-d8dc-439f-9a3b-c772bf4a311c" providerId="ADAL" clId="{8EE40018-26BD-4A7B-8D17-70AC8417C2D0}" dt="2022-11-16T06:54:02.421" v="18" actId="47"/>
-        <pc:sldMkLst>
-          <pc:docMk/>
-          <pc:sldMk cId="2640130553" sldId="286"/>
-        </pc:sldMkLst>
-      </pc:sldChg>
-      <pc:sldChg chg="del">
-        <pc:chgData name="Matthieu De Mari" userId="dfb708c9-d8dc-439f-9a3b-c772bf4a311c" providerId="ADAL" clId="{8EE40018-26BD-4A7B-8D17-70AC8417C2D0}" dt="2022-11-16T06:54:03.510" v="19" actId="47"/>
-        <pc:sldMkLst>
-          <pc:docMk/>
-          <pc:sldMk cId="3356285317" sldId="289"/>
-        </pc:sldMkLst>
-      </pc:sldChg>
-      <pc:sldChg chg="del">
-        <pc:chgData name="Matthieu De Mari" userId="dfb708c9-d8dc-439f-9a3b-c772bf4a311c" providerId="ADAL" clId="{8EE40018-26BD-4A7B-8D17-70AC8417C2D0}" dt="2022-11-16T06:54:03.510" v="19" actId="47"/>
-        <pc:sldMkLst>
-          <pc:docMk/>
-          <pc:sldMk cId="473860244" sldId="290"/>
-        </pc:sldMkLst>
-      </pc:sldChg>
-      <pc:sldChg chg="del">
-        <pc:chgData name="Matthieu De Mari" userId="dfb708c9-d8dc-439f-9a3b-c772bf4a311c" providerId="ADAL" clId="{8EE40018-26BD-4A7B-8D17-70AC8417C2D0}" dt="2022-11-16T06:54:03.510" v="19" actId="47"/>
-        <pc:sldMkLst>
-          <pc:docMk/>
-          <pc:sldMk cId="290213158" sldId="291"/>
-        </pc:sldMkLst>
-      </pc:sldChg>
-      <pc:sldChg chg="del">
-        <pc:chgData name="Matthieu De Mari" userId="dfb708c9-d8dc-439f-9a3b-c772bf4a311c" providerId="ADAL" clId="{8EE40018-26BD-4A7B-8D17-70AC8417C2D0}" dt="2022-11-16T06:54:03.510" v="19" actId="47"/>
-        <pc:sldMkLst>
-          <pc:docMk/>
-          <pc:sldMk cId="3717810270" sldId="292"/>
-        </pc:sldMkLst>
-      </pc:sldChg>
-      <pc:sldChg chg="del">
-        <pc:chgData name="Matthieu De Mari" userId="dfb708c9-d8dc-439f-9a3b-c772bf4a311c" providerId="ADAL" clId="{8EE40018-26BD-4A7B-8D17-70AC8417C2D0}" dt="2022-11-16T06:54:03.510" v="19" actId="47"/>
-        <pc:sldMkLst>
-          <pc:docMk/>
-          <pc:sldMk cId="2783948156" sldId="293"/>
-        </pc:sldMkLst>
-      </pc:sldChg>
-      <pc:sldChg chg="del">
-        <pc:chgData name="Matthieu De Mari" userId="dfb708c9-d8dc-439f-9a3b-c772bf4a311c" providerId="ADAL" clId="{8EE40018-26BD-4A7B-8D17-70AC8417C2D0}" dt="2022-11-16T06:54:04.458" v="20" actId="47"/>
-        <pc:sldMkLst>
-          <pc:docMk/>
-          <pc:sldMk cId="4179829315" sldId="294"/>
-        </pc:sldMkLst>
-      </pc:sldChg>
-      <pc:sldChg chg="del">
-        <pc:chgData name="Matthieu De Mari" userId="dfb708c9-d8dc-439f-9a3b-c772bf4a311c" providerId="ADAL" clId="{8EE40018-26BD-4A7B-8D17-70AC8417C2D0}" dt="2022-11-16T06:54:12.971" v="26" actId="47"/>
-        <pc:sldMkLst>
-          <pc:docMk/>
-          <pc:sldMk cId="709624762" sldId="295"/>
-        </pc:sldMkLst>
-      </pc:sldChg>
-      <pc:sldChg chg="del">
-        <pc:chgData name="Matthieu De Mari" userId="dfb708c9-d8dc-439f-9a3b-c772bf4a311c" providerId="ADAL" clId="{8EE40018-26BD-4A7B-8D17-70AC8417C2D0}" dt="2022-11-16T06:54:11.293" v="25" actId="47"/>
-        <pc:sldMkLst>
-          <pc:docMk/>
-          <pc:sldMk cId="2576857052" sldId="297"/>
-        </pc:sldMkLst>
-      </pc:sldChg>
-      <pc:sldChg chg="del">
-        <pc:chgData name="Matthieu De Mari" userId="dfb708c9-d8dc-439f-9a3b-c772bf4a311c" providerId="ADAL" clId="{8EE40018-26BD-4A7B-8D17-70AC8417C2D0}" dt="2022-11-16T06:54:04.458" v="20" actId="47"/>
-        <pc:sldMkLst>
-          <pc:docMk/>
-          <pc:sldMk cId="1885656403" sldId="298"/>
-        </pc:sldMkLst>
-      </pc:sldChg>
-      <pc:sldChg chg="del">
-        <pc:chgData name="Matthieu De Mari" userId="dfb708c9-d8dc-439f-9a3b-c772bf4a311c" providerId="ADAL" clId="{8EE40018-26BD-4A7B-8D17-70AC8417C2D0}" dt="2022-11-16T06:54:04.458" v="20" actId="47"/>
-        <pc:sldMkLst>
-          <pc:docMk/>
-          <pc:sldMk cId="3768793426" sldId="299"/>
-        </pc:sldMkLst>
-      </pc:sldChg>
-      <pc:sldChg chg="del">
-        <pc:chgData name="Matthieu De Mari" userId="dfb708c9-d8dc-439f-9a3b-c772bf4a311c" providerId="ADAL" clId="{8EE40018-26BD-4A7B-8D17-70AC8417C2D0}" dt="2022-11-16T06:54:07.519" v="22" actId="47"/>
-        <pc:sldMkLst>
-          <pc:docMk/>
-          <pc:sldMk cId="902380433" sldId="300"/>
-        </pc:sldMkLst>
-      </pc:sldChg>
-      <pc:sldChg chg="del">
-        <pc:chgData name="Matthieu De Mari" userId="dfb708c9-d8dc-439f-9a3b-c772bf4a311c" providerId="ADAL" clId="{8EE40018-26BD-4A7B-8D17-70AC8417C2D0}" dt="2022-11-16T06:54:08.404" v="23" actId="47"/>
-        <pc:sldMkLst>
-          <pc:docMk/>
-          <pc:sldMk cId="2202284175" sldId="301"/>
-        </pc:sldMkLst>
-      </pc:sldChg>
-      <pc:sldChg chg="del">
-        <pc:chgData name="Matthieu De Mari" userId="dfb708c9-d8dc-439f-9a3b-c772bf4a311c" providerId="ADAL" clId="{8EE40018-26BD-4A7B-8D17-70AC8417C2D0}" dt="2022-11-16T06:54:09.190" v="24" actId="47"/>
-        <pc:sldMkLst>
-          <pc:docMk/>
-          <pc:sldMk cId="1547433389" sldId="302"/>
-        </pc:sldMkLst>
-      </pc:sldChg>
-      <pc:sldChg chg="del">
-        <pc:chgData name="Matthieu De Mari" userId="dfb708c9-d8dc-439f-9a3b-c772bf4a311c" providerId="ADAL" clId="{8EE40018-26BD-4A7B-8D17-70AC8417C2D0}" dt="2022-11-16T06:54:04.458" v="20" actId="47"/>
-        <pc:sldMkLst>
-          <pc:docMk/>
-          <pc:sldMk cId="3335250243" sldId="303"/>
-        </pc:sldMkLst>
-      </pc:sldChg>
-      <pc:sldChg chg="del">
-        <pc:chgData name="Matthieu De Mari" userId="dfb708c9-d8dc-439f-9a3b-c772bf4a311c" providerId="ADAL" clId="{8EE40018-26BD-4A7B-8D17-70AC8417C2D0}" dt="2022-11-16T06:54:03.510" v="19" actId="47"/>
-        <pc:sldMkLst>
-          <pc:docMk/>
-          <pc:sldMk cId="349456406" sldId="305"/>
-        </pc:sldMkLst>
-      </pc:sldChg>
-      <pc:sldChg chg="del">
-        <pc:chgData name="Matthieu De Mari" userId="dfb708c9-d8dc-439f-9a3b-c772bf4a311c" providerId="ADAL" clId="{8EE40018-26BD-4A7B-8D17-70AC8417C2D0}" dt="2022-11-16T06:54:06.554" v="21" actId="47"/>
-        <pc:sldMkLst>
-          <pc:docMk/>
-          <pc:sldMk cId="1917974936" sldId="307"/>
-        </pc:sldMkLst>
-      </pc:sldChg>
-      <pc:sldChg chg="del">
-        <pc:chgData name="Matthieu De Mari" userId="dfb708c9-d8dc-439f-9a3b-c772bf4a311c" providerId="ADAL" clId="{8EE40018-26BD-4A7B-8D17-70AC8417C2D0}" dt="2022-11-16T06:54:06.554" v="21" actId="47"/>
-        <pc:sldMkLst>
-          <pc:docMk/>
-          <pc:sldMk cId="2278752964" sldId="309"/>
-        </pc:sldMkLst>
-      </pc:sldChg>
-      <pc:sldChg chg="del">
-        <pc:chgData name="Matthieu De Mari" userId="dfb708c9-d8dc-439f-9a3b-c772bf4a311c" providerId="ADAL" clId="{8EE40018-26BD-4A7B-8D17-70AC8417C2D0}" dt="2022-11-16T06:54:06.554" v="21" actId="47"/>
-        <pc:sldMkLst>
-          <pc:docMk/>
-          <pc:sldMk cId="3317882412" sldId="310"/>
-        </pc:sldMkLst>
-      </pc:sldChg>
-      <pc:sldChg chg="del">
-        <pc:chgData name="Matthieu De Mari" userId="dfb708c9-d8dc-439f-9a3b-c772bf4a311c" providerId="ADAL" clId="{8EE40018-26BD-4A7B-8D17-70AC8417C2D0}" dt="2022-11-16T06:54:06.554" v="21" actId="47"/>
-        <pc:sldMkLst>
-          <pc:docMk/>
-          <pc:sldMk cId="3051144984" sldId="311"/>
-        </pc:sldMkLst>
-      </pc:sldChg>
-      <pc:sldChg chg="del">
-        <pc:chgData name="Matthieu De Mari" userId="dfb708c9-d8dc-439f-9a3b-c772bf4a311c" providerId="ADAL" clId="{8EE40018-26BD-4A7B-8D17-70AC8417C2D0}" dt="2022-11-16T06:54:06.554" v="21" actId="47"/>
-        <pc:sldMkLst>
-          <pc:docMk/>
-          <pc:sldMk cId="666448182" sldId="313"/>
-        </pc:sldMkLst>
-      </pc:sldChg>
-      <pc:sldChg chg="del">
-        <pc:chgData name="Matthieu De Mari" userId="dfb708c9-d8dc-439f-9a3b-c772bf4a311c" providerId="ADAL" clId="{8EE40018-26BD-4A7B-8D17-70AC8417C2D0}" dt="2022-11-16T06:54:06.554" v="21" actId="47"/>
-        <pc:sldMkLst>
-          <pc:docMk/>
-          <pc:sldMk cId="1701431758" sldId="314"/>
-        </pc:sldMkLst>
-      </pc:sldChg>
-      <pc:sldChg chg="del">
-        <pc:chgData name="Matthieu De Mari" userId="dfb708c9-d8dc-439f-9a3b-c772bf4a311c" providerId="ADAL" clId="{8EE40018-26BD-4A7B-8D17-70AC8417C2D0}" dt="2022-11-16T06:54:06.554" v="21" actId="47"/>
-        <pc:sldMkLst>
-          <pc:docMk/>
-          <pc:sldMk cId="1813469429" sldId="315"/>
-        </pc:sldMkLst>
-      </pc:sldChg>
-      <pc:sldChg chg="del">
-        <pc:chgData name="Matthieu De Mari" userId="dfb708c9-d8dc-439f-9a3b-c772bf4a311c" providerId="ADAL" clId="{8EE40018-26BD-4A7B-8D17-70AC8417C2D0}" dt="2022-11-16T06:54:07.519" v="22" actId="47"/>
-        <pc:sldMkLst>
-          <pc:docMk/>
-          <pc:sldMk cId="3619476332" sldId="316"/>
-        </pc:sldMkLst>
-      </pc:sldChg>
-      <pc:sldChg chg="del">
-        <pc:chgData name="Matthieu De Mari" userId="dfb708c9-d8dc-439f-9a3b-c772bf4a311c" providerId="ADAL" clId="{8EE40018-26BD-4A7B-8D17-70AC8417C2D0}" dt="2022-11-16T06:54:07.519" v="22" actId="47"/>
-        <pc:sldMkLst>
-          <pc:docMk/>
-          <pc:sldMk cId="3133188960" sldId="317"/>
-        </pc:sldMkLst>
-      </pc:sldChg>
-      <pc:sldChg chg="del">
-        <pc:chgData name="Matthieu De Mari" userId="dfb708c9-d8dc-439f-9a3b-c772bf4a311c" providerId="ADAL" clId="{8EE40018-26BD-4A7B-8D17-70AC8417C2D0}" dt="2022-11-16T06:54:07.519" v="22" actId="47"/>
-        <pc:sldMkLst>
-          <pc:docMk/>
-          <pc:sldMk cId="913491245" sldId="318"/>
-        </pc:sldMkLst>
-      </pc:sldChg>
-      <pc:sldChg chg="del">
-        <pc:chgData name="Matthieu De Mari" userId="dfb708c9-d8dc-439f-9a3b-c772bf4a311c" providerId="ADAL" clId="{8EE40018-26BD-4A7B-8D17-70AC8417C2D0}" dt="2022-11-16T06:54:07.519" v="22" actId="47"/>
-        <pc:sldMkLst>
-          <pc:docMk/>
-          <pc:sldMk cId="369927457" sldId="319"/>
-        </pc:sldMkLst>
-      </pc:sldChg>
-      <pc:sldChg chg="del">
-        <pc:chgData name="Matthieu De Mari" userId="dfb708c9-d8dc-439f-9a3b-c772bf4a311c" providerId="ADAL" clId="{8EE40018-26BD-4A7B-8D17-70AC8417C2D0}" dt="2022-11-16T06:54:07.519" v="22" actId="47"/>
-        <pc:sldMkLst>
-          <pc:docMk/>
-          <pc:sldMk cId="868347224" sldId="320"/>
-        </pc:sldMkLst>
-      </pc:sldChg>
-      <pc:sldChg chg="del">
-        <pc:chgData name="Matthieu De Mari" userId="dfb708c9-d8dc-439f-9a3b-c772bf4a311c" providerId="ADAL" clId="{8EE40018-26BD-4A7B-8D17-70AC8417C2D0}" dt="2022-11-16T06:54:07.519" v="22" actId="47"/>
-        <pc:sldMkLst>
-          <pc:docMk/>
-          <pc:sldMk cId="2901421326" sldId="321"/>
-        </pc:sldMkLst>
-      </pc:sldChg>
-      <pc:sldChg chg="del">
-        <pc:chgData name="Matthieu De Mari" userId="dfb708c9-d8dc-439f-9a3b-c772bf4a311c" providerId="ADAL" clId="{8EE40018-26BD-4A7B-8D17-70AC8417C2D0}" dt="2022-11-16T06:54:07.519" v="22" actId="47"/>
-        <pc:sldMkLst>
-          <pc:docMk/>
-          <pc:sldMk cId="386318379" sldId="322"/>
-        </pc:sldMkLst>
-      </pc:sldChg>
-      <pc:sldChg chg="del">
-        <pc:chgData name="Matthieu De Mari" userId="dfb708c9-d8dc-439f-9a3b-c772bf4a311c" providerId="ADAL" clId="{8EE40018-26BD-4A7B-8D17-70AC8417C2D0}" dt="2022-11-16T06:54:07.519" v="22" actId="47"/>
-        <pc:sldMkLst>
-          <pc:docMk/>
-          <pc:sldMk cId="535785749" sldId="323"/>
-        </pc:sldMkLst>
-      </pc:sldChg>
-      <pc:sldChg chg="del">
-        <pc:chgData name="Matthieu De Mari" userId="dfb708c9-d8dc-439f-9a3b-c772bf4a311c" providerId="ADAL" clId="{8EE40018-26BD-4A7B-8D17-70AC8417C2D0}" dt="2022-11-16T06:54:07.519" v="22" actId="47"/>
-        <pc:sldMkLst>
-          <pc:docMk/>
-          <pc:sldMk cId="573807039" sldId="324"/>
-        </pc:sldMkLst>
-      </pc:sldChg>
-      <pc:sldChg chg="del">
-        <pc:chgData name="Matthieu De Mari" userId="dfb708c9-d8dc-439f-9a3b-c772bf4a311c" providerId="ADAL" clId="{8EE40018-26BD-4A7B-8D17-70AC8417C2D0}" dt="2022-11-16T06:54:07.519" v="22" actId="47"/>
-        <pc:sldMkLst>
-          <pc:docMk/>
-          <pc:sldMk cId="3026304390" sldId="325"/>
-        </pc:sldMkLst>
-      </pc:sldChg>
-      <pc:sldChg chg="del">
-        <pc:chgData name="Matthieu De Mari" userId="dfb708c9-d8dc-439f-9a3b-c772bf4a311c" providerId="ADAL" clId="{8EE40018-26BD-4A7B-8D17-70AC8417C2D0}" dt="2022-11-16T06:54:07.519" v="22" actId="47"/>
-        <pc:sldMkLst>
-          <pc:docMk/>
-          <pc:sldMk cId="4144845603" sldId="326"/>
-        </pc:sldMkLst>
-      </pc:sldChg>
-      <pc:sldChg chg="del">
-        <pc:chgData name="Matthieu De Mari" userId="dfb708c9-d8dc-439f-9a3b-c772bf4a311c" providerId="ADAL" clId="{8EE40018-26BD-4A7B-8D17-70AC8417C2D0}" dt="2022-11-16T06:54:07.519" v="22" actId="47"/>
-        <pc:sldMkLst>
-          <pc:docMk/>
-          <pc:sldMk cId="2128704617" sldId="328"/>
-        </pc:sldMkLst>
-      </pc:sldChg>
-      <pc:sldChg chg="del">
-        <pc:chgData name="Matthieu De Mari" userId="dfb708c9-d8dc-439f-9a3b-c772bf4a311c" providerId="ADAL" clId="{8EE40018-26BD-4A7B-8D17-70AC8417C2D0}" dt="2022-11-16T06:54:07.519" v="22" actId="47"/>
-        <pc:sldMkLst>
-          <pc:docMk/>
-          <pc:sldMk cId="1228181526" sldId="329"/>
-        </pc:sldMkLst>
-      </pc:sldChg>
-      <pc:sldChg chg="del">
-        <pc:chgData name="Matthieu De Mari" userId="dfb708c9-d8dc-439f-9a3b-c772bf4a311c" providerId="ADAL" clId="{8EE40018-26BD-4A7B-8D17-70AC8417C2D0}" dt="2022-11-16T06:54:07.519" v="22" actId="47"/>
-        <pc:sldMkLst>
-          <pc:docMk/>
-          <pc:sldMk cId="1086607777" sldId="331"/>
-        </pc:sldMkLst>
-      </pc:sldChg>
-      <pc:sldChg chg="del">
-        <pc:chgData name="Matthieu De Mari" userId="dfb708c9-d8dc-439f-9a3b-c772bf4a311c" providerId="ADAL" clId="{8EE40018-26BD-4A7B-8D17-70AC8417C2D0}" dt="2022-11-16T06:54:08.404" v="23" actId="47"/>
-        <pc:sldMkLst>
-          <pc:docMk/>
-          <pc:sldMk cId="3744088925" sldId="332"/>
-        </pc:sldMkLst>
-      </pc:sldChg>
-      <pc:sldChg chg="del">
-        <pc:chgData name="Matthieu De Mari" userId="dfb708c9-d8dc-439f-9a3b-c772bf4a311c" providerId="ADAL" clId="{8EE40018-26BD-4A7B-8D17-70AC8417C2D0}" dt="2022-11-16T06:54:08.404" v="23" actId="47"/>
-        <pc:sldMkLst>
-          <pc:docMk/>
-          <pc:sldMk cId="1824898086" sldId="334"/>
-        </pc:sldMkLst>
-      </pc:sldChg>
-      <pc:sldChg chg="del">
-        <pc:chgData name="Matthieu De Mari" userId="dfb708c9-d8dc-439f-9a3b-c772bf4a311c" providerId="ADAL" clId="{8EE40018-26BD-4A7B-8D17-70AC8417C2D0}" dt="2022-11-16T06:54:13.895" v="27" actId="47"/>
-        <pc:sldMkLst>
-          <pc:docMk/>
-          <pc:sldMk cId="3704706604" sldId="335"/>
-        </pc:sldMkLst>
-      </pc:sldChg>
-      <pc:sldChg chg="del">
-        <pc:chgData name="Matthieu De Mari" userId="dfb708c9-d8dc-439f-9a3b-c772bf4a311c" providerId="ADAL" clId="{8EE40018-26BD-4A7B-8D17-70AC8417C2D0}" dt="2022-11-16T06:54:11.293" v="25" actId="47"/>
-        <pc:sldMkLst>
-          <pc:docMk/>
-          <pc:sldMk cId="503014896" sldId="336"/>
-        </pc:sldMkLst>
-      </pc:sldChg>
-      <pc:sldChg chg="del">
-        <pc:chgData name="Matthieu De Mari" userId="dfb708c9-d8dc-439f-9a3b-c772bf4a311c" providerId="ADAL" clId="{8EE40018-26BD-4A7B-8D17-70AC8417C2D0}" dt="2022-11-16T06:54:11.293" v="25" actId="47"/>
-        <pc:sldMkLst>
-          <pc:docMk/>
-          <pc:sldMk cId="1757180629" sldId="338"/>
-        </pc:sldMkLst>
-      </pc:sldChg>
-      <pc:sldChg chg="del">
-        <pc:chgData name="Matthieu De Mari" userId="dfb708c9-d8dc-439f-9a3b-c772bf4a311c" providerId="ADAL" clId="{8EE40018-26BD-4A7B-8D17-70AC8417C2D0}" dt="2022-11-16T06:54:11.293" v="25" actId="47"/>
-        <pc:sldMkLst>
-          <pc:docMk/>
-          <pc:sldMk cId="3251712844" sldId="339"/>
-        </pc:sldMkLst>
-      </pc:sldChg>
-      <pc:sldChg chg="del">
-        <pc:chgData name="Matthieu De Mari" userId="dfb708c9-d8dc-439f-9a3b-c772bf4a311c" providerId="ADAL" clId="{8EE40018-26BD-4A7B-8D17-70AC8417C2D0}" dt="2022-11-16T06:54:11.293" v="25" actId="47"/>
-        <pc:sldMkLst>
-          <pc:docMk/>
-          <pc:sldMk cId="3000047863" sldId="341"/>
-        </pc:sldMkLst>
-      </pc:sldChg>
-      <pc:sldChg chg="del">
-        <pc:chgData name="Matthieu De Mari" userId="dfb708c9-d8dc-439f-9a3b-c772bf4a311c" providerId="ADAL" clId="{8EE40018-26BD-4A7B-8D17-70AC8417C2D0}" dt="2022-11-16T06:54:11.293" v="25" actId="47"/>
-        <pc:sldMkLst>
-          <pc:docMk/>
-          <pc:sldMk cId="3607475250" sldId="342"/>
-        </pc:sldMkLst>
-      </pc:sldChg>
-      <pc:sldChg chg="del">
-        <pc:chgData name="Matthieu De Mari" userId="dfb708c9-d8dc-439f-9a3b-c772bf4a311c" providerId="ADAL" clId="{8EE40018-26BD-4A7B-8D17-70AC8417C2D0}" dt="2022-11-16T06:54:11.293" v="25" actId="47"/>
-        <pc:sldMkLst>
-          <pc:docMk/>
-          <pc:sldMk cId="2202386436" sldId="343"/>
-        </pc:sldMkLst>
-      </pc:sldChg>
-      <pc:sldChg chg="del">
-        <pc:chgData name="Matthieu De Mari" userId="dfb708c9-d8dc-439f-9a3b-c772bf4a311c" providerId="ADAL" clId="{8EE40018-26BD-4A7B-8D17-70AC8417C2D0}" dt="2022-11-16T06:54:14.637" v="28" actId="47"/>
-        <pc:sldMkLst>
-          <pc:docMk/>
-          <pc:sldMk cId="4222503966" sldId="345"/>
-        </pc:sldMkLst>
-      </pc:sldChg>
-      <pc:sldChg chg="modSp add del mod">
-        <pc:chgData name="Matthieu De Mari" userId="dfb708c9-d8dc-439f-9a3b-c772bf4a311c" providerId="ADAL" clId="{8EE40018-26BD-4A7B-8D17-70AC8417C2D0}" dt="2022-11-16T06:54:26.067" v="39" actId="20577"/>
-        <pc:sldMkLst>
-          <pc:docMk/>
-          <pc:sldMk cId="1036081419" sldId="346"/>
-        </pc:sldMkLst>
-      </pc:sldChg>
-      <pc:sldChg chg="del">
-        <pc:chgData name="Matthieu De Mari" userId="dfb708c9-d8dc-439f-9a3b-c772bf4a311c" providerId="ADAL" clId="{8EE40018-26BD-4A7B-8D17-70AC8417C2D0}" dt="2022-11-16T06:54:11.293" v="25" actId="47"/>
-        <pc:sldMkLst>
-          <pc:docMk/>
-          <pc:sldMk cId="2902606749" sldId="350"/>
-        </pc:sldMkLst>
-      </pc:sldChg>
-      <pc:sldChg chg="del">
-        <pc:chgData name="Matthieu De Mari" userId="dfb708c9-d8dc-439f-9a3b-c772bf4a311c" providerId="ADAL" clId="{8EE40018-26BD-4A7B-8D17-70AC8417C2D0}" dt="2022-11-16T06:54:11.293" v="25" actId="47"/>
-        <pc:sldMkLst>
-          <pc:docMk/>
-          <pc:sldMk cId="1008855396" sldId="352"/>
-        </pc:sldMkLst>
-      </pc:sldChg>
-      <pc:sldChg chg="del">
-        <pc:chgData name="Matthieu De Mari" userId="dfb708c9-d8dc-439f-9a3b-c772bf4a311c" providerId="ADAL" clId="{8EE40018-26BD-4A7B-8D17-70AC8417C2D0}" dt="2022-11-16T06:54:11.293" v="25" actId="47"/>
-        <pc:sldMkLst>
-          <pc:docMk/>
-          <pc:sldMk cId="1005123530" sldId="353"/>
-        </pc:sldMkLst>
-      </pc:sldChg>
-      <pc:sldChg chg="del">
-        <pc:chgData name="Matthieu De Mari" userId="dfb708c9-d8dc-439f-9a3b-c772bf4a311c" providerId="ADAL" clId="{8EE40018-26BD-4A7B-8D17-70AC8417C2D0}" dt="2022-11-16T06:54:11.293" v="25" actId="47"/>
-        <pc:sldMkLst>
-          <pc:docMk/>
-          <pc:sldMk cId="304430080" sldId="354"/>
-        </pc:sldMkLst>
-      </pc:sldChg>
-      <pc:sldChg chg="del">
-        <pc:chgData name="Matthieu De Mari" userId="dfb708c9-d8dc-439f-9a3b-c772bf4a311c" providerId="ADAL" clId="{8EE40018-26BD-4A7B-8D17-70AC8417C2D0}" dt="2022-11-16T06:54:11.293" v="25" actId="47"/>
-        <pc:sldMkLst>
-          <pc:docMk/>
-          <pc:sldMk cId="2530765258" sldId="355"/>
-        </pc:sldMkLst>
-      </pc:sldChg>
-      <pc:sldChg chg="del">
-        <pc:chgData name="Matthieu De Mari" userId="dfb708c9-d8dc-439f-9a3b-c772bf4a311c" providerId="ADAL" clId="{8EE40018-26BD-4A7B-8D17-70AC8417C2D0}" dt="2022-11-16T06:54:11.293" v="25" actId="47"/>
-        <pc:sldMkLst>
-          <pc:docMk/>
-          <pc:sldMk cId="2900566505" sldId="356"/>
-        </pc:sldMkLst>
-      </pc:sldChg>
-      <pc:sldChg chg="del">
-        <pc:chgData name="Matthieu De Mari" userId="dfb708c9-d8dc-439f-9a3b-c772bf4a311c" providerId="ADAL" clId="{8EE40018-26BD-4A7B-8D17-70AC8417C2D0}" dt="2022-11-16T06:54:11.293" v="25" actId="47"/>
-        <pc:sldMkLst>
-          <pc:docMk/>
-          <pc:sldMk cId="151041797" sldId="357"/>
-        </pc:sldMkLst>
-      </pc:sldChg>
-      <pc:sldChg chg="del">
-        <pc:chgData name="Matthieu De Mari" userId="dfb708c9-d8dc-439f-9a3b-c772bf4a311c" providerId="ADAL" clId="{8EE40018-26BD-4A7B-8D17-70AC8417C2D0}" dt="2022-11-16T06:54:11.293" v="25" actId="47"/>
-        <pc:sldMkLst>
-          <pc:docMk/>
-          <pc:sldMk cId="2341017383" sldId="358"/>
-        </pc:sldMkLst>
-      </pc:sldChg>
-      <pc:sldChg chg="del">
-        <pc:chgData name="Matthieu De Mari" userId="dfb708c9-d8dc-439f-9a3b-c772bf4a311c" providerId="ADAL" clId="{8EE40018-26BD-4A7B-8D17-70AC8417C2D0}" dt="2022-11-16T06:54:12.971" v="26" actId="47"/>
-        <pc:sldMkLst>
-          <pc:docMk/>
-          <pc:sldMk cId="843036564" sldId="360"/>
-        </pc:sldMkLst>
-      </pc:sldChg>
-      <pc:sldChg chg="del">
-        <pc:chgData name="Matthieu De Mari" userId="dfb708c9-d8dc-439f-9a3b-c772bf4a311c" providerId="ADAL" clId="{8EE40018-26BD-4A7B-8D17-70AC8417C2D0}" dt="2022-11-16T06:54:12.971" v="26" actId="47"/>
-        <pc:sldMkLst>
-          <pc:docMk/>
-          <pc:sldMk cId="1543635220" sldId="363"/>
-        </pc:sldMkLst>
-      </pc:sldChg>
-      <pc:sldChg chg="del">
-        <pc:chgData name="Matthieu De Mari" userId="dfb708c9-d8dc-439f-9a3b-c772bf4a311c" providerId="ADAL" clId="{8EE40018-26BD-4A7B-8D17-70AC8417C2D0}" dt="2022-11-16T06:54:12.971" v="26" actId="47"/>
-        <pc:sldMkLst>
-          <pc:docMk/>
-          <pc:sldMk cId="467323081" sldId="364"/>
-        </pc:sldMkLst>
-      </pc:sldChg>
-      <pc:sldChg chg="del">
-        <pc:chgData name="Matthieu De Mari" userId="dfb708c9-d8dc-439f-9a3b-c772bf4a311c" providerId="ADAL" clId="{8EE40018-26BD-4A7B-8D17-70AC8417C2D0}" dt="2022-11-16T06:54:12.971" v="26" actId="47"/>
-        <pc:sldMkLst>
-          <pc:docMk/>
-          <pc:sldMk cId="2557491043" sldId="365"/>
-        </pc:sldMkLst>
-      </pc:sldChg>
-      <pc:sldChg chg="del">
-        <pc:chgData name="Matthieu De Mari" userId="dfb708c9-d8dc-439f-9a3b-c772bf4a311c" providerId="ADAL" clId="{8EE40018-26BD-4A7B-8D17-70AC8417C2D0}" dt="2022-11-16T06:54:12.971" v="26" actId="47"/>
-        <pc:sldMkLst>
-          <pc:docMk/>
-          <pc:sldMk cId="30137941" sldId="366"/>
-        </pc:sldMkLst>
-      </pc:sldChg>
-      <pc:sldChg chg="del">
-        <pc:chgData name="Matthieu De Mari" userId="dfb708c9-d8dc-439f-9a3b-c772bf4a311c" providerId="ADAL" clId="{8EE40018-26BD-4A7B-8D17-70AC8417C2D0}" dt="2022-11-16T06:54:12.971" v="26" actId="47"/>
-        <pc:sldMkLst>
-          <pc:docMk/>
-          <pc:sldMk cId="2759705435" sldId="367"/>
-        </pc:sldMkLst>
-      </pc:sldChg>
-      <pc:sldChg chg="del">
-        <pc:chgData name="Matthieu De Mari" userId="dfb708c9-d8dc-439f-9a3b-c772bf4a311c" providerId="ADAL" clId="{8EE40018-26BD-4A7B-8D17-70AC8417C2D0}" dt="2022-11-16T06:54:12.971" v="26" actId="47"/>
-        <pc:sldMkLst>
-          <pc:docMk/>
-          <pc:sldMk cId="3578341878" sldId="368"/>
-        </pc:sldMkLst>
-      </pc:sldChg>
-      <pc:sldChg chg="del">
-        <pc:chgData name="Matthieu De Mari" userId="dfb708c9-d8dc-439f-9a3b-c772bf4a311c" providerId="ADAL" clId="{8EE40018-26BD-4A7B-8D17-70AC8417C2D0}" dt="2022-11-16T06:54:12.971" v="26" actId="47"/>
-        <pc:sldMkLst>
-          <pc:docMk/>
-          <pc:sldMk cId="2979488587" sldId="369"/>
-        </pc:sldMkLst>
-      </pc:sldChg>
-      <pc:sldChg chg="del">
-        <pc:chgData name="Matthieu De Mari" userId="dfb708c9-d8dc-439f-9a3b-c772bf4a311c" providerId="ADAL" clId="{8EE40018-26BD-4A7B-8D17-70AC8417C2D0}" dt="2022-11-16T06:54:12.971" v="26" actId="47"/>
-        <pc:sldMkLst>
-          <pc:docMk/>
-          <pc:sldMk cId="954723006" sldId="371"/>
-        </pc:sldMkLst>
-      </pc:sldChg>
-      <pc:sldChg chg="del">
-        <pc:chgData name="Matthieu De Mari" userId="dfb708c9-d8dc-439f-9a3b-c772bf4a311c" providerId="ADAL" clId="{8EE40018-26BD-4A7B-8D17-70AC8417C2D0}" dt="2022-11-16T06:54:12.971" v="26" actId="47"/>
-        <pc:sldMkLst>
-          <pc:docMk/>
-          <pc:sldMk cId="1007393074" sldId="372"/>
-        </pc:sldMkLst>
-      </pc:sldChg>
-      <pc:sldChg chg="del">
-        <pc:chgData name="Matthieu De Mari" userId="dfb708c9-d8dc-439f-9a3b-c772bf4a311c" providerId="ADAL" clId="{8EE40018-26BD-4A7B-8D17-70AC8417C2D0}" dt="2022-11-16T06:54:12.971" v="26" actId="47"/>
-        <pc:sldMkLst>
-          <pc:docMk/>
-          <pc:sldMk cId="4039951211" sldId="373"/>
-        </pc:sldMkLst>
-      </pc:sldChg>
-      <pc:sldChg chg="del">
-        <pc:chgData name="Matthieu De Mari" userId="dfb708c9-d8dc-439f-9a3b-c772bf4a311c" providerId="ADAL" clId="{8EE40018-26BD-4A7B-8D17-70AC8417C2D0}" dt="2022-11-16T06:54:12.971" v="26" actId="47"/>
-        <pc:sldMkLst>
-          <pc:docMk/>
-          <pc:sldMk cId="3074715825" sldId="374"/>
-        </pc:sldMkLst>
-      </pc:sldChg>
-      <pc:sldChg chg="del">
-        <pc:chgData name="Matthieu De Mari" userId="dfb708c9-d8dc-439f-9a3b-c772bf4a311c" providerId="ADAL" clId="{8EE40018-26BD-4A7B-8D17-70AC8417C2D0}" dt="2022-11-16T06:54:13.895" v="27" actId="47"/>
-        <pc:sldMkLst>
-          <pc:docMk/>
-          <pc:sldMk cId="1113800729" sldId="376"/>
-        </pc:sldMkLst>
-      </pc:sldChg>
-      <pc:sldChg chg="modSp mod">
-        <pc:chgData name="Matthieu De Mari" userId="dfb708c9-d8dc-439f-9a3b-c772bf4a311c" providerId="ADAL" clId="{8EE40018-26BD-4A7B-8D17-70AC8417C2D0}" dt="2022-11-16T06:53:49.572" v="12" actId="20577"/>
-        <pc:sldMkLst>
-          <pc:docMk/>
-          <pc:sldMk cId="1040156172" sldId="377"/>
-        </pc:sldMkLst>
-      </pc:sldChg>
-      <pc:sldChg chg="del">
-        <pc:chgData name="Matthieu De Mari" userId="dfb708c9-d8dc-439f-9a3b-c772bf4a311c" providerId="ADAL" clId="{8EE40018-26BD-4A7B-8D17-70AC8417C2D0}" dt="2022-11-16T06:54:08.404" v="23" actId="47"/>
-        <pc:sldMkLst>
-          <pc:docMk/>
-          <pc:sldMk cId="2236780210" sldId="378"/>
-        </pc:sldMkLst>
-      </pc:sldChg>
-      <pc:sldChg chg="del">
-        <pc:chgData name="Matthieu De Mari" userId="dfb708c9-d8dc-439f-9a3b-c772bf4a311c" providerId="ADAL" clId="{8EE40018-26BD-4A7B-8D17-70AC8417C2D0}" dt="2022-11-16T06:54:09.190" v="24" actId="47"/>
-        <pc:sldMkLst>
-          <pc:docMk/>
-          <pc:sldMk cId="3686470996" sldId="379"/>
-        </pc:sldMkLst>
-      </pc:sldChg>
-      <pc:sldChg chg="del">
-        <pc:chgData name="Matthieu De Mari" userId="dfb708c9-d8dc-439f-9a3b-c772bf4a311c" providerId="ADAL" clId="{8EE40018-26BD-4A7B-8D17-70AC8417C2D0}" dt="2022-11-16T06:54:13.895" v="27" actId="47"/>
-        <pc:sldMkLst>
-          <pc:docMk/>
-          <pc:sldMk cId="2665897880" sldId="380"/>
-        </pc:sldMkLst>
-      </pc:sldChg>
-      <pc:sldChg chg="del">
-        <pc:chgData name="Matthieu De Mari" userId="dfb708c9-d8dc-439f-9a3b-c772bf4a311c" providerId="ADAL" clId="{8EE40018-26BD-4A7B-8D17-70AC8417C2D0}" dt="2022-11-16T06:54:42.327" v="41" actId="47"/>
-        <pc:sldMkLst>
-          <pc:docMk/>
-          <pc:sldMk cId="1174542860" sldId="381"/>
-        </pc:sldMkLst>
-      </pc:sldChg>
-      <pc:sldChg chg="del">
-        <pc:chgData name="Matthieu De Mari" userId="dfb708c9-d8dc-439f-9a3b-c772bf4a311c" providerId="ADAL" clId="{8EE40018-26BD-4A7B-8D17-70AC8417C2D0}" dt="2022-11-16T06:54:07.519" v="22" actId="47"/>
-        <pc:sldMkLst>
-          <pc:docMk/>
-          <pc:sldMk cId="370210852" sldId="382"/>
-        </pc:sldMkLst>
-      </pc:sldChg>
-      <pc:sldChg chg="del">
-        <pc:chgData name="Matthieu De Mari" userId="dfb708c9-d8dc-439f-9a3b-c772bf4a311c" providerId="ADAL" clId="{8EE40018-26BD-4A7B-8D17-70AC8417C2D0}" dt="2022-11-16T06:54:06.554" v="21" actId="47"/>
-        <pc:sldMkLst>
-          <pc:docMk/>
-          <pc:sldMk cId="3654187078" sldId="383"/>
-        </pc:sldMkLst>
-      </pc:sldChg>
-      <pc:sldChg chg="del">
-        <pc:chgData name="Matthieu De Mari" userId="dfb708c9-d8dc-439f-9a3b-c772bf4a311c" providerId="ADAL" clId="{8EE40018-26BD-4A7B-8D17-70AC8417C2D0}" dt="2022-11-16T06:54:11.293" v="25" actId="47"/>
-        <pc:sldMkLst>
-          <pc:docMk/>
-          <pc:sldMk cId="1145882535" sldId="384"/>
-        </pc:sldMkLst>
-      </pc:sldChg>
-      <pc:sldChg chg="del">
-        <pc:chgData name="Matthieu De Mari" userId="dfb708c9-d8dc-439f-9a3b-c772bf4a311c" providerId="ADAL" clId="{8EE40018-26BD-4A7B-8D17-70AC8417C2D0}" dt="2022-11-16T06:54:12.971" v="26" actId="47"/>
-        <pc:sldMkLst>
-          <pc:docMk/>
-          <pc:sldMk cId="2609241577" sldId="385"/>
-        </pc:sldMkLst>
-      </pc:sldChg>
-      <pc:sldChg chg="del">
-        <pc:chgData name="Matthieu De Mari" userId="dfb708c9-d8dc-439f-9a3b-c772bf4a311c" providerId="ADAL" clId="{8EE40018-26BD-4A7B-8D17-70AC8417C2D0}" dt="2022-11-16T06:54:13.895" v="27" actId="47"/>
-        <pc:sldMkLst>
-          <pc:docMk/>
-          <pc:sldMk cId="2448415676" sldId="387"/>
-        </pc:sldMkLst>
-      </pc:sldChg>
-      <pc:sldChg chg="del">
-        <pc:chgData name="Matthieu De Mari" userId="dfb708c9-d8dc-439f-9a3b-c772bf4a311c" providerId="ADAL" clId="{8EE40018-26BD-4A7B-8D17-70AC8417C2D0}" dt="2022-11-16T06:54:13.895" v="27" actId="47"/>
-        <pc:sldMkLst>
-          <pc:docMk/>
-          <pc:sldMk cId="993695443" sldId="388"/>
-        </pc:sldMkLst>
-      </pc:sldChg>
-      <pc:sldChg chg="del">
-        <pc:chgData name="Matthieu De Mari" userId="dfb708c9-d8dc-439f-9a3b-c772bf4a311c" providerId="ADAL" clId="{8EE40018-26BD-4A7B-8D17-70AC8417C2D0}" dt="2022-11-16T06:54:13.895" v="27" actId="47"/>
-        <pc:sldMkLst>
-          <pc:docMk/>
-          <pc:sldMk cId="3051477034" sldId="389"/>
-        </pc:sldMkLst>
-      </pc:sldChg>
-      <pc:sldChg chg="del">
-        <pc:chgData name="Matthieu De Mari" userId="dfb708c9-d8dc-439f-9a3b-c772bf4a311c" providerId="ADAL" clId="{8EE40018-26BD-4A7B-8D17-70AC8417C2D0}" dt="2022-11-16T06:54:13.895" v="27" actId="47"/>
-        <pc:sldMkLst>
-          <pc:docMk/>
-          <pc:sldMk cId="2663658166" sldId="390"/>
-        </pc:sldMkLst>
-      </pc:sldChg>
-      <pc:sldChg chg="del">
-        <pc:chgData name="Matthieu De Mari" userId="dfb708c9-d8dc-439f-9a3b-c772bf4a311c" providerId="ADAL" clId="{8EE40018-26BD-4A7B-8D17-70AC8417C2D0}" dt="2022-11-16T06:54:39.791" v="40" actId="47"/>
-        <pc:sldMkLst>
-          <pc:docMk/>
-          <pc:sldMk cId="1682911312" sldId="391"/>
-        </pc:sldMkLst>
-      </pc:sldChg>
-    </pc:docChg>
-  </pc:docChgLst>
-  <pc:docChgLst>
-    <pc:chgData name="Matthieu De Mari" userId="dfb708c9-d8dc-439f-9a3b-c772bf4a311c" providerId="ADAL" clId="{4C614438-19C8-44A6-815D-3A155B62A757}"/>
-    <pc:docChg chg="undo custSel addSld delSld modSld modSection">
-      <pc:chgData name="Matthieu De Mari" userId="dfb708c9-d8dc-439f-9a3b-c772bf4a311c" providerId="ADAL" clId="{4C614438-19C8-44A6-815D-3A155B62A757}" dt="2023-07-06T07:37:14.470" v="410" actId="1440"/>
-      <pc:docMkLst>
-        <pc:docMk/>
-      </pc:docMkLst>
-      <pc:sldChg chg="modSp del mod">
-        <pc:chgData name="Matthieu De Mari" userId="dfb708c9-d8dc-439f-9a3b-c772bf4a311c" providerId="ADAL" clId="{4C614438-19C8-44A6-815D-3A155B62A757}" dt="2023-07-06T07:25:15.381" v="13" actId="47"/>
-        <pc:sldMkLst>
-          <pc:docMk/>
-          <pc:sldMk cId="699795487" sldId="390"/>
-        </pc:sldMkLst>
-      </pc:sldChg>
-      <pc:sldChg chg="modSp mod">
-        <pc:chgData name="Matthieu De Mari" userId="dfb708c9-d8dc-439f-9a3b-c772bf4a311c" providerId="ADAL" clId="{4C614438-19C8-44A6-815D-3A155B62A757}" dt="2023-07-06T07:25:42.048" v="28" actId="20577"/>
-        <pc:sldMkLst>
-          <pc:docMk/>
-          <pc:sldMk cId="3842187934" sldId="393"/>
-        </pc:sldMkLst>
-      </pc:sldChg>
-      <pc:sldChg chg="modSp mod">
-        <pc:chgData name="Matthieu De Mari" userId="dfb708c9-d8dc-439f-9a3b-c772bf4a311c" providerId="ADAL" clId="{4C614438-19C8-44A6-815D-3A155B62A757}" dt="2023-07-06T07:25:49.545" v="37" actId="20577"/>
-        <pc:sldMkLst>
-          <pc:docMk/>
-          <pc:sldMk cId="781649533" sldId="394"/>
-        </pc:sldMkLst>
-      </pc:sldChg>
-      <pc:sldChg chg="modSp mod">
-        <pc:chgData name="Matthieu De Mari" userId="dfb708c9-d8dc-439f-9a3b-c772bf4a311c" providerId="ADAL" clId="{4C614438-19C8-44A6-815D-3A155B62A757}" dt="2023-07-06T07:26:16.900" v="38" actId="20577"/>
-        <pc:sldMkLst>
-          <pc:docMk/>
-          <pc:sldMk cId="1870305378" sldId="396"/>
-        </pc:sldMkLst>
-      </pc:sldChg>
-      <pc:sldChg chg="modSp mod">
-        <pc:chgData name="Matthieu De Mari" userId="dfb708c9-d8dc-439f-9a3b-c772bf4a311c" providerId="ADAL" clId="{4C614438-19C8-44A6-815D-3A155B62A757}" dt="2023-07-06T07:26:47.899" v="42" actId="20577"/>
-        <pc:sldMkLst>
-          <pc:docMk/>
-          <pc:sldMk cId="105113267" sldId="403"/>
-        </pc:sldMkLst>
-      </pc:sldChg>
-      <pc:sldChg chg="delSp modSp mod modClrScheme chgLayout">
-        <pc:chgData name="Matthieu De Mari" userId="dfb708c9-d8dc-439f-9a3b-c772bf4a311c" providerId="ADAL" clId="{4C614438-19C8-44A6-815D-3A155B62A757}" dt="2023-07-06T07:36:41.373" v="399" actId="20577"/>
-        <pc:sldMkLst>
-          <pc:docMk/>
-          <pc:sldMk cId="3425780644" sldId="407"/>
-        </pc:sldMkLst>
-      </pc:sldChg>
-      <pc:sldChg chg="modSp mod">
-        <pc:chgData name="Matthieu De Mari" userId="dfb708c9-d8dc-439f-9a3b-c772bf4a311c" providerId="ADAL" clId="{4C614438-19C8-44A6-815D-3A155B62A757}" dt="2023-07-06T07:27:49.477" v="80" actId="20577"/>
-        <pc:sldMkLst>
-          <pc:docMk/>
-          <pc:sldMk cId="3867797258" sldId="578"/>
-        </pc:sldMkLst>
-      </pc:sldChg>
-      <pc:sldChg chg="add">
-        <pc:chgData name="Matthieu De Mari" userId="dfb708c9-d8dc-439f-9a3b-c772bf4a311c" providerId="ADAL" clId="{4C614438-19C8-44A6-815D-3A155B62A757}" dt="2023-07-06T07:24:36.057" v="0"/>
-        <pc:sldMkLst>
-          <pc:docMk/>
-          <pc:sldMk cId="191481927" sldId="665"/>
-        </pc:sldMkLst>
-      </pc:sldChg>
-      <pc:sldChg chg="addSp delSp modSp add mod">
-        <pc:chgData name="Matthieu De Mari" userId="dfb708c9-d8dc-439f-9a3b-c772bf4a311c" providerId="ADAL" clId="{4C614438-19C8-44A6-815D-3A155B62A757}" dt="2023-07-06T07:25:35.029" v="19" actId="14100"/>
-        <pc:sldMkLst>
-          <pc:docMk/>
-          <pc:sldMk cId="2244926614" sldId="666"/>
-        </pc:sldMkLst>
-      </pc:sldChg>
-      <pc:sldChg chg="add del">
-        <pc:chgData name="Matthieu De Mari" userId="dfb708c9-d8dc-439f-9a3b-c772bf4a311c" providerId="ADAL" clId="{4C614438-19C8-44A6-815D-3A155B62A757}" dt="2023-07-06T07:25:01.777" v="7"/>
-        <pc:sldMkLst>
-          <pc:docMk/>
-          <pc:sldMk cId="2260648763" sldId="666"/>
-        </pc:sldMkLst>
-      </pc:sldChg>
-      <pc:sldChg chg="add del">
-        <pc:chgData name="Matthieu De Mari" userId="dfb708c9-d8dc-439f-9a3b-c772bf4a311c" providerId="ADAL" clId="{4C614438-19C8-44A6-815D-3A155B62A757}" dt="2023-07-06T07:35:00.027" v="89" actId="47"/>
-        <pc:sldMkLst>
-          <pc:docMk/>
-          <pc:sldMk cId="1464609210" sldId="667"/>
-        </pc:sldMkLst>
-      </pc:sldChg>
-      <pc:sldChg chg="modSp add mod">
-        <pc:chgData name="Matthieu De Mari" userId="dfb708c9-d8dc-439f-9a3b-c772bf4a311c" providerId="ADAL" clId="{4C614438-19C8-44A6-815D-3A155B62A757}" dt="2023-07-06T07:35:13.601" v="92" actId="5793"/>
-        <pc:sldMkLst>
-          <pc:docMk/>
-          <pc:sldMk cId="2828164903" sldId="668"/>
-        </pc:sldMkLst>
-      </pc:sldChg>
-      <pc:sldChg chg="add">
-        <pc:chgData name="Matthieu De Mari" userId="dfb708c9-d8dc-439f-9a3b-c772bf4a311c" providerId="ADAL" clId="{4C614438-19C8-44A6-815D-3A155B62A757}" dt="2023-07-06T07:35:07.476" v="90" actId="2890"/>
-        <pc:sldMkLst>
-          <pc:docMk/>
-          <pc:sldMk cId="3980169169" sldId="669"/>
-        </pc:sldMkLst>
-      </pc:sldChg>
-      <pc:sldChg chg="addSp modSp add mod">
-        <pc:chgData name="Matthieu De Mari" userId="dfb708c9-d8dc-439f-9a3b-c772bf4a311c" providerId="ADAL" clId="{4C614438-19C8-44A6-815D-3A155B62A757}" dt="2023-07-06T07:37:14.470" v="410" actId="1440"/>
-        <pc:sldMkLst>
-          <pc:docMk/>
-          <pc:sldMk cId="4122990920" sldId="670"/>
-        </pc:sldMkLst>
-      </pc:sldChg>
-    </pc:docChg>
-  </pc:docChgLst>
-  <pc:docChgLst>
-    <pc:chgData name="Matthieu De Mari" userId="dfb708c9-d8dc-439f-9a3b-c772bf4a311c" providerId="ADAL" clId="{1002CE28-12E1-453F-8E06-90F32FAF9697}"/>
-    <pc:docChg chg="mod delSld modSld sldOrd modMainMaster delSection modSection">
-      <pc:chgData name="Matthieu De Mari" userId="dfb708c9-d8dc-439f-9a3b-c772bf4a311c" providerId="ADAL" clId="{1002CE28-12E1-453F-8E06-90F32FAF9697}" dt="2022-10-19T06:32:13.307" v="17" actId="20577"/>
-      <pc:docMkLst>
-        <pc:docMk/>
-      </pc:docMkLst>
-      <pc:sldChg chg="modSp del mod">
-        <pc:chgData name="Matthieu De Mari" userId="dfb708c9-d8dc-439f-9a3b-c772bf4a311c" providerId="ADAL" clId="{1002CE28-12E1-453F-8E06-90F32FAF9697}" dt="2022-10-19T06:32:10.067" v="8" actId="47"/>
-        <pc:sldMkLst>
-          <pc:docMk/>
-          <pc:sldMk cId="4221035150" sldId="256"/>
-        </pc:sldMkLst>
-      </pc:sldChg>
-      <pc:sldChg chg="del">
-        <pc:chgData name="Matthieu De Mari" userId="dfb708c9-d8dc-439f-9a3b-c772bf4a311c" providerId="ADAL" clId="{1002CE28-12E1-453F-8E06-90F32FAF9697}" dt="2022-10-19T06:32:06.571" v="5" actId="47"/>
-        <pc:sldMkLst>
-          <pc:docMk/>
-          <pc:sldMk cId="2169851104" sldId="258"/>
-        </pc:sldMkLst>
-      </pc:sldChg>
-      <pc:sldChg chg="del">
-        <pc:chgData name="Matthieu De Mari" userId="dfb708c9-d8dc-439f-9a3b-c772bf4a311c" providerId="ADAL" clId="{1002CE28-12E1-453F-8E06-90F32FAF9697}" dt="2022-10-19T06:32:06.571" v="5" actId="47"/>
-        <pc:sldMkLst>
-          <pc:docMk/>
-          <pc:sldMk cId="1814682152" sldId="259"/>
-        </pc:sldMkLst>
-      </pc:sldChg>
-      <pc:sldChg chg="del">
-        <pc:chgData name="Matthieu De Mari" userId="dfb708c9-d8dc-439f-9a3b-c772bf4a311c" providerId="ADAL" clId="{1002CE28-12E1-453F-8E06-90F32FAF9697}" dt="2022-10-19T06:32:06.571" v="5" actId="47"/>
-        <pc:sldMkLst>
-          <pc:docMk/>
-          <pc:sldMk cId="753975277" sldId="260"/>
-        </pc:sldMkLst>
-      </pc:sldChg>
-      <pc:sldChg chg="del">
-        <pc:chgData name="Matthieu De Mari" userId="dfb708c9-d8dc-439f-9a3b-c772bf4a311c" providerId="ADAL" clId="{1002CE28-12E1-453F-8E06-90F32FAF9697}" dt="2022-10-19T06:32:06.571" v="5" actId="47"/>
-        <pc:sldMkLst>
-          <pc:docMk/>
-          <pc:sldMk cId="968033501" sldId="268"/>
-        </pc:sldMkLst>
-      </pc:sldChg>
-      <pc:sldChg chg="modSp mod ord">
-        <pc:chgData name="Matthieu De Mari" userId="dfb708c9-d8dc-439f-9a3b-c772bf4a311c" providerId="ADAL" clId="{1002CE28-12E1-453F-8E06-90F32FAF9697}" dt="2022-10-19T06:32:13.307" v="17" actId="20577"/>
-        <pc:sldMkLst>
-          <pc:docMk/>
-          <pc:sldMk cId="1040156172" sldId="377"/>
-        </pc:sldMkLst>
-      </pc:sldChg>
-      <pc:sldMasterChg chg="addSp mod">
-        <pc:chgData name="Matthieu De Mari" userId="dfb708c9-d8dc-439f-9a3b-c772bf4a311c" providerId="ADAL" clId="{1002CE28-12E1-453F-8E06-90F32FAF9697}" dt="2022-10-19T06:30:58.618" v="0" actId="33475"/>
-        <pc:sldMasterMkLst>
-          <pc:docMk/>
-          <pc:sldMasterMk cId="2168708284" sldId="2147483648"/>
-        </pc:sldMasterMkLst>
-      </pc:sldMasterChg>
-    </pc:docChg>
-  </pc:docChgLst>
-  <pc:docChgLst>
-    <pc:chgData name="Matthieu De Mari" userId="dfb708c9-d8dc-439f-9a3b-c772bf4a311c" providerId="ADAL" clId="{0A8E5E50-AABB-4D3D-A438-A1F78BC47CD3}"/>
-    <pc:docChg chg="undo custSel addSld delSld modSld sldOrd addSection delSection modSection">
-      <pc:chgData name="Matthieu De Mari" userId="dfb708c9-d8dc-439f-9a3b-c772bf4a311c" providerId="ADAL" clId="{0A8E5E50-AABB-4D3D-A438-A1F78BC47CD3}" dt="2023-02-26T09:42:06.748" v="79" actId="47"/>
-      <pc:docMkLst>
-        <pc:docMk/>
-      </pc:docMkLst>
-      <pc:sldChg chg="del">
-        <pc:chgData name="Matthieu De Mari" userId="dfb708c9-d8dc-439f-9a3b-c772bf4a311c" providerId="ADAL" clId="{0A8E5E50-AABB-4D3D-A438-A1F78BC47CD3}" dt="2023-02-26T09:42:06.748" v="79" actId="47"/>
-        <pc:sldMkLst>
-          <pc:docMk/>
-          <pc:sldMk cId="1893873068" sldId="266"/>
-        </pc:sldMkLst>
-      </pc:sldChg>
-      <pc:sldChg chg="del">
-        <pc:chgData name="Matthieu De Mari" userId="dfb708c9-d8dc-439f-9a3b-c772bf4a311c" providerId="ADAL" clId="{0A8E5E50-AABB-4D3D-A438-A1F78BC47CD3}" dt="2023-02-26T09:42:06.748" v="79" actId="47"/>
-        <pc:sldMkLst>
-          <pc:docMk/>
-          <pc:sldMk cId="3880949074" sldId="267"/>
-        </pc:sldMkLst>
-      </pc:sldChg>
-      <pc:sldChg chg="del">
-        <pc:chgData name="Matthieu De Mari" userId="dfb708c9-d8dc-439f-9a3b-c772bf4a311c" providerId="ADAL" clId="{0A8E5E50-AABB-4D3D-A438-A1F78BC47CD3}" dt="2023-02-26T09:42:00.523" v="78" actId="47"/>
-        <pc:sldMkLst>
-          <pc:docMk/>
-          <pc:sldMk cId="1036081419" sldId="346"/>
-        </pc:sldMkLst>
-      </pc:sldChg>
-      <pc:sldChg chg="add del ord">
-        <pc:chgData name="Matthieu De Mari" userId="dfb708c9-d8dc-439f-9a3b-c772bf4a311c" providerId="ADAL" clId="{0A8E5E50-AABB-4D3D-A438-A1F78BC47CD3}" dt="2023-02-26T09:40:48.441" v="3"/>
-        <pc:sldMkLst>
-          <pc:docMk/>
-          <pc:sldMk cId="3425780644" sldId="407"/>
-        </pc:sldMkLst>
-      </pc:sldChg>
-      <pc:sldChg chg="del">
-        <pc:chgData name="Matthieu De Mari" userId="dfb708c9-d8dc-439f-9a3b-c772bf4a311c" providerId="ADAL" clId="{0A8E5E50-AABB-4D3D-A438-A1F78BC47CD3}" dt="2023-02-26T09:41:53.106" v="73" actId="47"/>
-        <pc:sldMkLst>
-          <pc:docMk/>
-          <pc:sldMk cId="1300324164" sldId="408"/>
-        </pc:sldMkLst>
-      </pc:sldChg>
-      <pc:sldChg chg="del">
-        <pc:chgData name="Matthieu De Mari" userId="dfb708c9-d8dc-439f-9a3b-c772bf4a311c" providerId="ADAL" clId="{0A8E5E50-AABB-4D3D-A438-A1F78BC47CD3}" dt="2023-02-26T09:41:50.965" v="72" actId="47"/>
-        <pc:sldMkLst>
-          <pc:docMk/>
-          <pc:sldMk cId="3793163593" sldId="410"/>
-        </pc:sldMkLst>
-      </pc:sldChg>
-      <pc:sldChg chg="del">
-        <pc:chgData name="Matthieu De Mari" userId="dfb708c9-d8dc-439f-9a3b-c772bf4a311c" providerId="ADAL" clId="{0A8E5E50-AABB-4D3D-A438-A1F78BC47CD3}" dt="2023-02-26T09:42:06.748" v="79" actId="47"/>
-        <pc:sldMkLst>
-          <pc:docMk/>
-          <pc:sldMk cId="1165688587" sldId="571"/>
-        </pc:sldMkLst>
-      </pc:sldChg>
-      <pc:sldChg chg="add del ord">
-        <pc:chgData name="Matthieu De Mari" userId="dfb708c9-d8dc-439f-9a3b-c772bf4a311c" providerId="ADAL" clId="{0A8E5E50-AABB-4D3D-A438-A1F78BC47CD3}" dt="2023-02-26T09:40:48.441" v="3"/>
-        <pc:sldMkLst>
-          <pc:docMk/>
-          <pc:sldMk cId="1038252774" sldId="590"/>
-        </pc:sldMkLst>
-      </pc:sldChg>
-      <pc:sldChg chg="del">
-        <pc:chgData name="Matthieu De Mari" userId="dfb708c9-d8dc-439f-9a3b-c772bf4a311c" providerId="ADAL" clId="{0A8E5E50-AABB-4D3D-A438-A1F78BC47CD3}" dt="2023-02-26T09:41:45.024" v="70" actId="47"/>
-        <pc:sldMkLst>
-          <pc:docMk/>
-          <pc:sldMk cId="37425589" sldId="591"/>
-        </pc:sldMkLst>
-      </pc:sldChg>
-      <pc:sldChg chg="add del ord">
-        <pc:chgData name="Matthieu De Mari" userId="dfb708c9-d8dc-439f-9a3b-c772bf4a311c" providerId="ADAL" clId="{0A8E5E50-AABB-4D3D-A438-A1F78BC47CD3}" dt="2023-02-26T09:40:48.441" v="3"/>
-        <pc:sldMkLst>
-          <pc:docMk/>
-          <pc:sldMk cId="3688488777" sldId="592"/>
-        </pc:sldMkLst>
-      </pc:sldChg>
-      <pc:sldChg chg="add del ord">
-        <pc:chgData name="Matthieu De Mari" userId="dfb708c9-d8dc-439f-9a3b-c772bf4a311c" providerId="ADAL" clId="{0A8E5E50-AABB-4D3D-A438-A1F78BC47CD3}" dt="2023-02-26T09:40:48.441" v="3"/>
-        <pc:sldMkLst>
-          <pc:docMk/>
-          <pc:sldMk cId="3362761059" sldId="593"/>
-        </pc:sldMkLst>
-      </pc:sldChg>
-      <pc:sldChg chg="add del ord">
-        <pc:chgData name="Matthieu De Mari" userId="dfb708c9-d8dc-439f-9a3b-c772bf4a311c" providerId="ADAL" clId="{0A8E5E50-AABB-4D3D-A438-A1F78BC47CD3}" dt="2023-02-26T09:41:16.520" v="68" actId="47"/>
-        <pc:sldMkLst>
-          <pc:docMk/>
-          <pc:sldMk cId="239607028" sldId="594"/>
-        </pc:sldMkLst>
-      </pc:sldChg>
-      <pc:sldChg chg="add del ord">
-        <pc:chgData name="Matthieu De Mari" userId="dfb708c9-d8dc-439f-9a3b-c772bf4a311c" providerId="ADAL" clId="{0A8E5E50-AABB-4D3D-A438-A1F78BC47CD3}" dt="2023-02-26T09:41:17.647" v="69" actId="47"/>
-        <pc:sldMkLst>
-          <pc:docMk/>
-          <pc:sldMk cId="3681758499" sldId="595"/>
-        </pc:sldMkLst>
-      </pc:sldChg>
-      <pc:sldChg chg="add del ord">
-        <pc:chgData name="Matthieu De Mari" userId="dfb708c9-d8dc-439f-9a3b-c772bf4a311c" providerId="ADAL" clId="{0A8E5E50-AABB-4D3D-A438-A1F78BC47CD3}" dt="2023-02-26T09:41:14.727" v="67" actId="47"/>
-        <pc:sldMkLst>
-          <pc:docMk/>
-          <pc:sldMk cId="337788125" sldId="597"/>
-        </pc:sldMkLst>
-      </pc:sldChg>
-      <pc:sldChg chg="add del ord">
-        <pc:chgData name="Matthieu De Mari" userId="dfb708c9-d8dc-439f-9a3b-c772bf4a311c" providerId="ADAL" clId="{0A8E5E50-AABB-4D3D-A438-A1F78BC47CD3}" dt="2023-02-26T09:40:48.441" v="3"/>
-        <pc:sldMkLst>
-          <pc:docMk/>
-          <pc:sldMk cId="2646292586" sldId="598"/>
-        </pc:sldMkLst>
-      </pc:sldChg>
-      <pc:sldChg chg="add del ord">
-        <pc:chgData name="Matthieu De Mari" userId="dfb708c9-d8dc-439f-9a3b-c772bf4a311c" providerId="ADAL" clId="{0A8E5E50-AABB-4D3D-A438-A1F78BC47CD3}" dt="2023-02-26T09:40:48.441" v="3"/>
-        <pc:sldMkLst>
-          <pc:docMk/>
-          <pc:sldMk cId="1390758074" sldId="599"/>
-        </pc:sldMkLst>
-      </pc:sldChg>
-      <pc:sldChg chg="del">
-        <pc:chgData name="Matthieu De Mari" userId="dfb708c9-d8dc-439f-9a3b-c772bf4a311c" providerId="ADAL" clId="{0A8E5E50-AABB-4D3D-A438-A1F78BC47CD3}" dt="2023-02-26T09:41:46.041" v="71" actId="47"/>
-        <pc:sldMkLst>
-          <pc:docMk/>
-          <pc:sldMk cId="3499753351" sldId="600"/>
-        </pc:sldMkLst>
-      </pc:sldChg>
-      <pc:sldChg chg="del">
-        <pc:chgData name="Matthieu De Mari" userId="dfb708c9-d8dc-439f-9a3b-c772bf4a311c" providerId="ADAL" clId="{0A8E5E50-AABB-4D3D-A438-A1F78BC47CD3}" dt="2023-02-26T09:41:46.041" v="71" actId="47"/>
-        <pc:sldMkLst>
-          <pc:docMk/>
-          <pc:sldMk cId="1913740079" sldId="601"/>
-        </pc:sldMkLst>
-      </pc:sldChg>
-      <pc:sldChg chg="del">
-        <pc:chgData name="Matthieu De Mari" userId="dfb708c9-d8dc-439f-9a3b-c772bf4a311c" providerId="ADAL" clId="{0A8E5E50-AABB-4D3D-A438-A1F78BC47CD3}" dt="2023-02-26T09:41:46.041" v="71" actId="47"/>
-        <pc:sldMkLst>
-          <pc:docMk/>
-          <pc:sldMk cId="4011461575" sldId="602"/>
-        </pc:sldMkLst>
-      </pc:sldChg>
-      <pc:sldChg chg="del">
-        <pc:chgData name="Matthieu De Mari" userId="dfb708c9-d8dc-439f-9a3b-c772bf4a311c" providerId="ADAL" clId="{0A8E5E50-AABB-4D3D-A438-A1F78BC47CD3}" dt="2023-02-26T09:41:46.041" v="71" actId="47"/>
-        <pc:sldMkLst>
-          <pc:docMk/>
-          <pc:sldMk cId="2445909842" sldId="603"/>
-        </pc:sldMkLst>
-      </pc:sldChg>
-      <pc:sldChg chg="del">
-        <pc:chgData name="Matthieu De Mari" userId="dfb708c9-d8dc-439f-9a3b-c772bf4a311c" providerId="ADAL" clId="{0A8E5E50-AABB-4D3D-A438-A1F78BC47CD3}" dt="2023-02-26T09:41:46.041" v="71" actId="47"/>
-        <pc:sldMkLst>
-          <pc:docMk/>
-          <pc:sldMk cId="1888637577" sldId="604"/>
-        </pc:sldMkLst>
-      </pc:sldChg>
-      <pc:sldChg chg="del">
-        <pc:chgData name="Matthieu De Mari" userId="dfb708c9-d8dc-439f-9a3b-c772bf4a311c" providerId="ADAL" clId="{0A8E5E50-AABB-4D3D-A438-A1F78BC47CD3}" dt="2023-02-26T09:41:53.106" v="73" actId="47"/>
-        <pc:sldMkLst>
-          <pc:docMk/>
-          <pc:sldMk cId="3313007867" sldId="605"/>
-        </pc:sldMkLst>
-      </pc:sldChg>
-      <pc:sldChg chg="del">
-        <pc:chgData name="Matthieu De Mari" userId="dfb708c9-d8dc-439f-9a3b-c772bf4a311c" providerId="ADAL" clId="{0A8E5E50-AABB-4D3D-A438-A1F78BC47CD3}" dt="2023-02-26T09:41:53.106" v="73" actId="47"/>
-        <pc:sldMkLst>
-          <pc:docMk/>
-          <pc:sldMk cId="544744450" sldId="606"/>
-        </pc:sldMkLst>
-      </pc:sldChg>
-      <pc:sldChg chg="del">
-        <pc:chgData name="Matthieu De Mari" userId="dfb708c9-d8dc-439f-9a3b-c772bf4a311c" providerId="ADAL" clId="{0A8E5E50-AABB-4D3D-A438-A1F78BC47CD3}" dt="2023-02-26T09:41:53.106" v="73" actId="47"/>
-        <pc:sldMkLst>
-          <pc:docMk/>
-          <pc:sldMk cId="2835508014" sldId="607"/>
-        </pc:sldMkLst>
-      </pc:sldChg>
-      <pc:sldChg chg="del">
-        <pc:chgData name="Matthieu De Mari" userId="dfb708c9-d8dc-439f-9a3b-c772bf4a311c" providerId="ADAL" clId="{0A8E5E50-AABB-4D3D-A438-A1F78BC47CD3}" dt="2023-02-26T09:41:53.106" v="73" actId="47"/>
-        <pc:sldMkLst>
-          <pc:docMk/>
-          <pc:sldMk cId="3494463352" sldId="608"/>
-        </pc:sldMkLst>
-      </pc:sldChg>
-      <pc:sldChg chg="del">
-        <pc:chgData name="Matthieu De Mari" userId="dfb708c9-d8dc-439f-9a3b-c772bf4a311c" providerId="ADAL" clId="{0A8E5E50-AABB-4D3D-A438-A1F78BC47CD3}" dt="2023-02-26T09:41:53.106" v="73" actId="47"/>
-        <pc:sldMkLst>
-          <pc:docMk/>
-          <pc:sldMk cId="1274089717" sldId="609"/>
-        </pc:sldMkLst>
-      </pc:sldChg>
-      <pc:sldChg chg="del">
-        <pc:chgData name="Matthieu De Mari" userId="dfb708c9-d8dc-439f-9a3b-c772bf4a311c" providerId="ADAL" clId="{0A8E5E50-AABB-4D3D-A438-A1F78BC47CD3}" dt="2023-02-26T09:41:53.106" v="73" actId="47"/>
-        <pc:sldMkLst>
-          <pc:docMk/>
-          <pc:sldMk cId="1149178855" sldId="610"/>
-        </pc:sldMkLst>
-      </pc:sldChg>
-      <pc:sldChg chg="del">
-        <pc:chgData name="Matthieu De Mari" userId="dfb708c9-d8dc-439f-9a3b-c772bf4a311c" providerId="ADAL" clId="{0A8E5E50-AABB-4D3D-A438-A1F78BC47CD3}" dt="2023-02-26T09:41:53.106" v="73" actId="47"/>
-        <pc:sldMkLst>
-          <pc:docMk/>
-          <pc:sldMk cId="1655947162" sldId="611"/>
-        </pc:sldMkLst>
-      </pc:sldChg>
-      <pc:sldChg chg="del">
-        <pc:chgData name="Matthieu De Mari" userId="dfb708c9-d8dc-439f-9a3b-c772bf4a311c" providerId="ADAL" clId="{0A8E5E50-AABB-4D3D-A438-A1F78BC47CD3}" dt="2023-02-26T09:41:53.106" v="73" actId="47"/>
-        <pc:sldMkLst>
-          <pc:docMk/>
-          <pc:sldMk cId="1079237185" sldId="612"/>
-        </pc:sldMkLst>
-      </pc:sldChg>
-      <pc:sldChg chg="del">
-        <pc:chgData name="Matthieu De Mari" userId="dfb708c9-d8dc-439f-9a3b-c772bf4a311c" providerId="ADAL" clId="{0A8E5E50-AABB-4D3D-A438-A1F78BC47CD3}" dt="2023-02-26T09:41:53.106" v="73" actId="47"/>
-        <pc:sldMkLst>
-          <pc:docMk/>
-          <pc:sldMk cId="3584089474" sldId="613"/>
-        </pc:sldMkLst>
-      </pc:sldChg>
-      <pc:sldChg chg="del">
-        <pc:chgData name="Matthieu De Mari" userId="dfb708c9-d8dc-439f-9a3b-c772bf4a311c" providerId="ADAL" clId="{0A8E5E50-AABB-4D3D-A438-A1F78BC47CD3}" dt="2023-02-26T09:41:53.106" v="73" actId="47"/>
-        <pc:sldMkLst>
-          <pc:docMk/>
-          <pc:sldMk cId="1726322392" sldId="614"/>
-        </pc:sldMkLst>
-      </pc:sldChg>
-      <pc:sldChg chg="del">
-        <pc:chgData name="Matthieu De Mari" userId="dfb708c9-d8dc-439f-9a3b-c772bf4a311c" providerId="ADAL" clId="{0A8E5E50-AABB-4D3D-A438-A1F78BC47CD3}" dt="2023-02-26T09:41:53.106" v="73" actId="47"/>
-        <pc:sldMkLst>
-          <pc:docMk/>
-          <pc:sldMk cId="1478687394" sldId="615"/>
-        </pc:sldMkLst>
-      </pc:sldChg>
-      <pc:sldChg chg="del">
-        <pc:chgData name="Matthieu De Mari" userId="dfb708c9-d8dc-439f-9a3b-c772bf4a311c" providerId="ADAL" clId="{0A8E5E50-AABB-4D3D-A438-A1F78BC47CD3}" dt="2023-02-26T09:41:54.397" v="74" actId="47"/>
-        <pc:sldMkLst>
-          <pc:docMk/>
-          <pc:sldMk cId="2697134679" sldId="616"/>
-        </pc:sldMkLst>
-      </pc:sldChg>
-      <pc:sldChg chg="del">
-        <pc:chgData name="Matthieu De Mari" userId="dfb708c9-d8dc-439f-9a3b-c772bf4a311c" providerId="ADAL" clId="{0A8E5E50-AABB-4D3D-A438-A1F78BC47CD3}" dt="2023-02-26T09:41:50.965" v="72" actId="47"/>
-        <pc:sldMkLst>
-          <pc:docMk/>
-          <pc:sldMk cId="1087818113" sldId="617"/>
-        </pc:sldMkLst>
-      </pc:sldChg>
-      <pc:sldChg chg="del">
-        <pc:chgData name="Matthieu De Mari" userId="dfb708c9-d8dc-439f-9a3b-c772bf4a311c" providerId="ADAL" clId="{0A8E5E50-AABB-4D3D-A438-A1F78BC47CD3}" dt="2023-02-26T09:41:54.397" v="74" actId="47"/>
-        <pc:sldMkLst>
-          <pc:docMk/>
-          <pc:sldMk cId="2052607657" sldId="619"/>
-        </pc:sldMkLst>
-      </pc:sldChg>
-      <pc:sldChg chg="del">
-        <pc:chgData name="Matthieu De Mari" userId="dfb708c9-d8dc-439f-9a3b-c772bf4a311c" providerId="ADAL" clId="{0A8E5E50-AABB-4D3D-A438-A1F78BC47CD3}" dt="2023-02-26T09:42:06.748" v="79" actId="47"/>
-        <pc:sldMkLst>
-          <pc:docMk/>
-          <pc:sldMk cId="1028237814" sldId="620"/>
-        </pc:sldMkLst>
-      </pc:sldChg>
-      <pc:sldChg chg="del">
-        <pc:chgData name="Matthieu De Mari" userId="dfb708c9-d8dc-439f-9a3b-c772bf4a311c" providerId="ADAL" clId="{0A8E5E50-AABB-4D3D-A438-A1F78BC47CD3}" dt="2023-02-26T09:41:50.965" v="72" actId="47"/>
-        <pc:sldMkLst>
-          <pc:docMk/>
-          <pc:sldMk cId="204647563" sldId="622"/>
-        </pc:sldMkLst>
-      </pc:sldChg>
-      <pc:sldChg chg="del">
-        <pc:chgData name="Matthieu De Mari" userId="dfb708c9-d8dc-439f-9a3b-c772bf4a311c" providerId="ADAL" clId="{0A8E5E50-AABB-4D3D-A438-A1F78BC47CD3}" dt="2023-02-26T09:41:50.965" v="72" actId="47"/>
-        <pc:sldMkLst>
-          <pc:docMk/>
-          <pc:sldMk cId="3109980527" sldId="624"/>
-        </pc:sldMkLst>
-      </pc:sldChg>
-      <pc:sldChg chg="del">
-        <pc:chgData name="Matthieu De Mari" userId="dfb708c9-d8dc-439f-9a3b-c772bf4a311c" providerId="ADAL" clId="{0A8E5E50-AABB-4D3D-A438-A1F78BC47CD3}" dt="2023-02-26T09:41:50.965" v="72" actId="47"/>
-        <pc:sldMkLst>
-          <pc:docMk/>
-          <pc:sldMk cId="491578291" sldId="627"/>
-        </pc:sldMkLst>
-      </pc:sldChg>
-      <pc:sldChg chg="del">
-        <pc:chgData name="Matthieu De Mari" userId="dfb708c9-d8dc-439f-9a3b-c772bf4a311c" providerId="ADAL" clId="{0A8E5E50-AABB-4D3D-A438-A1F78BC47CD3}" dt="2023-02-26T09:41:50.965" v="72" actId="47"/>
-        <pc:sldMkLst>
-          <pc:docMk/>
-          <pc:sldMk cId="4059265678" sldId="628"/>
-        </pc:sldMkLst>
-      </pc:sldChg>
-      <pc:sldChg chg="del">
-        <pc:chgData name="Matthieu De Mari" userId="dfb708c9-d8dc-439f-9a3b-c772bf4a311c" providerId="ADAL" clId="{0A8E5E50-AABB-4D3D-A438-A1F78BC47CD3}" dt="2023-02-26T09:41:50.965" v="72" actId="47"/>
-        <pc:sldMkLst>
-          <pc:docMk/>
-          <pc:sldMk cId="2696285505" sldId="629"/>
-        </pc:sldMkLst>
-      </pc:sldChg>
-      <pc:sldChg chg="del">
-        <pc:chgData name="Matthieu De Mari" userId="dfb708c9-d8dc-439f-9a3b-c772bf4a311c" providerId="ADAL" clId="{0A8E5E50-AABB-4D3D-A438-A1F78BC47CD3}" dt="2023-02-26T09:41:50.965" v="72" actId="47"/>
-        <pc:sldMkLst>
-          <pc:docMk/>
-          <pc:sldMk cId="3403244392" sldId="630"/>
-        </pc:sldMkLst>
-      </pc:sldChg>
-      <pc:sldChg chg="del">
-        <pc:chgData name="Matthieu De Mari" userId="dfb708c9-d8dc-439f-9a3b-c772bf4a311c" providerId="ADAL" clId="{0A8E5E50-AABB-4D3D-A438-A1F78BC47CD3}" dt="2023-02-26T09:41:50.965" v="72" actId="47"/>
-        <pc:sldMkLst>
-          <pc:docMk/>
-          <pc:sldMk cId="3378674748" sldId="631"/>
-        </pc:sldMkLst>
-      </pc:sldChg>
-      <pc:sldChg chg="del">
-        <pc:chgData name="Matthieu De Mari" userId="dfb708c9-d8dc-439f-9a3b-c772bf4a311c" providerId="ADAL" clId="{0A8E5E50-AABB-4D3D-A438-A1F78BC47CD3}" dt="2023-02-26T09:41:50.965" v="72" actId="47"/>
-        <pc:sldMkLst>
-          <pc:docMk/>
-          <pc:sldMk cId="3237577112" sldId="632"/>
-        </pc:sldMkLst>
-      </pc:sldChg>
-      <pc:sldChg chg="del">
-        <pc:chgData name="Matthieu De Mari" userId="dfb708c9-d8dc-439f-9a3b-c772bf4a311c" providerId="ADAL" clId="{0A8E5E50-AABB-4D3D-A438-A1F78BC47CD3}" dt="2023-02-26T09:41:50.965" v="72" actId="47"/>
-        <pc:sldMkLst>
-          <pc:docMk/>
-          <pc:sldMk cId="3821484596" sldId="633"/>
-        </pc:sldMkLst>
-      </pc:sldChg>
-      <pc:sldChg chg="del">
-        <pc:chgData name="Matthieu De Mari" userId="dfb708c9-d8dc-439f-9a3b-c772bf4a311c" providerId="ADAL" clId="{0A8E5E50-AABB-4D3D-A438-A1F78BC47CD3}" dt="2023-02-26T09:41:50.965" v="72" actId="47"/>
-        <pc:sldMkLst>
-          <pc:docMk/>
-          <pc:sldMk cId="875945898" sldId="634"/>
-        </pc:sldMkLst>
-      </pc:sldChg>
-      <pc:sldChg chg="del">
-        <pc:chgData name="Matthieu De Mari" userId="dfb708c9-d8dc-439f-9a3b-c772bf4a311c" providerId="ADAL" clId="{0A8E5E50-AABB-4D3D-A438-A1F78BC47CD3}" dt="2023-02-26T09:41:50.965" v="72" actId="47"/>
-        <pc:sldMkLst>
-          <pc:docMk/>
-          <pc:sldMk cId="956888542" sldId="635"/>
-        </pc:sldMkLst>
-      </pc:sldChg>
-      <pc:sldChg chg="del">
-        <pc:chgData name="Matthieu De Mari" userId="dfb708c9-d8dc-439f-9a3b-c772bf4a311c" providerId="ADAL" clId="{0A8E5E50-AABB-4D3D-A438-A1F78BC47CD3}" dt="2023-02-26T09:41:50.965" v="72" actId="47"/>
-        <pc:sldMkLst>
-          <pc:docMk/>
-          <pc:sldMk cId="9821103" sldId="636"/>
-        </pc:sldMkLst>
-      </pc:sldChg>
-      <pc:sldChg chg="del">
-        <pc:chgData name="Matthieu De Mari" userId="dfb708c9-d8dc-439f-9a3b-c772bf4a311c" providerId="ADAL" clId="{0A8E5E50-AABB-4D3D-A438-A1F78BC47CD3}" dt="2023-02-26T09:41:58.986" v="77" actId="47"/>
-        <pc:sldMkLst>
-          <pc:docMk/>
-          <pc:sldMk cId="1731878414" sldId="637"/>
-        </pc:sldMkLst>
-      </pc:sldChg>
-      <pc:sldChg chg="del">
-        <pc:chgData name="Matthieu De Mari" userId="dfb708c9-d8dc-439f-9a3b-c772bf4a311c" providerId="ADAL" clId="{0A8E5E50-AABB-4D3D-A438-A1F78BC47CD3}" dt="2023-02-26T09:41:56.173" v="75" actId="47"/>
-        <pc:sldMkLst>
-          <pc:docMk/>
-          <pc:sldMk cId="1290242122" sldId="638"/>
-        </pc:sldMkLst>
-      </pc:sldChg>
-      <pc:sldChg chg="del">
-        <pc:chgData name="Matthieu De Mari" userId="dfb708c9-d8dc-439f-9a3b-c772bf4a311c" providerId="ADAL" clId="{0A8E5E50-AABB-4D3D-A438-A1F78BC47CD3}" dt="2023-02-26T09:41:56.173" v="75" actId="47"/>
-        <pc:sldMkLst>
-          <pc:docMk/>
-          <pc:sldMk cId="4283342382" sldId="639"/>
-        </pc:sldMkLst>
-      </pc:sldChg>
-      <pc:sldChg chg="del">
-        <pc:chgData name="Matthieu De Mari" userId="dfb708c9-d8dc-439f-9a3b-c772bf4a311c" providerId="ADAL" clId="{0A8E5E50-AABB-4D3D-A438-A1F78BC47CD3}" dt="2023-02-26T09:41:56.173" v="75" actId="47"/>
-        <pc:sldMkLst>
-          <pc:docMk/>
-          <pc:sldMk cId="3527748531" sldId="640"/>
-        </pc:sldMkLst>
-      </pc:sldChg>
-      <pc:sldChg chg="del">
-        <pc:chgData name="Matthieu De Mari" userId="dfb708c9-d8dc-439f-9a3b-c772bf4a311c" providerId="ADAL" clId="{0A8E5E50-AABB-4D3D-A438-A1F78BC47CD3}" dt="2023-02-26T09:41:56.173" v="75" actId="47"/>
-        <pc:sldMkLst>
-          <pc:docMk/>
-          <pc:sldMk cId="3298110552" sldId="641"/>
-        </pc:sldMkLst>
-      </pc:sldChg>
-      <pc:sldChg chg="del">
-        <pc:chgData name="Matthieu De Mari" userId="dfb708c9-d8dc-439f-9a3b-c772bf4a311c" providerId="ADAL" clId="{0A8E5E50-AABB-4D3D-A438-A1F78BC47CD3}" dt="2023-02-26T09:41:56.173" v="75" actId="47"/>
-        <pc:sldMkLst>
-          <pc:docMk/>
-          <pc:sldMk cId="4241197121" sldId="642"/>
-        </pc:sldMkLst>
-      </pc:sldChg>
-      <pc:sldChg chg="del">
-        <pc:chgData name="Matthieu De Mari" userId="dfb708c9-d8dc-439f-9a3b-c772bf4a311c" providerId="ADAL" clId="{0A8E5E50-AABB-4D3D-A438-A1F78BC47CD3}" dt="2023-02-26T09:41:56.173" v="75" actId="47"/>
-        <pc:sldMkLst>
-          <pc:docMk/>
-          <pc:sldMk cId="1487822837" sldId="643"/>
-        </pc:sldMkLst>
-      </pc:sldChg>
-      <pc:sldChg chg="del">
-        <pc:chgData name="Matthieu De Mari" userId="dfb708c9-d8dc-439f-9a3b-c772bf4a311c" providerId="ADAL" clId="{0A8E5E50-AABB-4D3D-A438-A1F78BC47CD3}" dt="2023-02-26T09:41:56.173" v="75" actId="47"/>
-        <pc:sldMkLst>
-          <pc:docMk/>
-          <pc:sldMk cId="715032396" sldId="644"/>
-        </pc:sldMkLst>
-      </pc:sldChg>
-      <pc:sldChg chg="del">
-        <pc:chgData name="Matthieu De Mari" userId="dfb708c9-d8dc-439f-9a3b-c772bf4a311c" providerId="ADAL" clId="{0A8E5E50-AABB-4D3D-A438-A1F78BC47CD3}" dt="2023-02-26T09:41:56.173" v="75" actId="47"/>
-        <pc:sldMkLst>
-          <pc:docMk/>
-          <pc:sldMk cId="1850403076" sldId="645"/>
-        </pc:sldMkLst>
-      </pc:sldChg>
-      <pc:sldChg chg="del">
-        <pc:chgData name="Matthieu De Mari" userId="dfb708c9-d8dc-439f-9a3b-c772bf4a311c" providerId="ADAL" clId="{0A8E5E50-AABB-4D3D-A438-A1F78BC47CD3}" dt="2023-02-26T09:41:57.535" v="76" actId="47"/>
-        <pc:sldMkLst>
-          <pc:docMk/>
-          <pc:sldMk cId="3708794977" sldId="646"/>
-        </pc:sldMkLst>
-      </pc:sldChg>
-      <pc:sldChg chg="del">
-        <pc:chgData name="Matthieu De Mari" userId="dfb708c9-d8dc-439f-9a3b-c772bf4a311c" providerId="ADAL" clId="{0A8E5E50-AABB-4D3D-A438-A1F78BC47CD3}" dt="2023-02-26T09:41:57.535" v="76" actId="47"/>
-        <pc:sldMkLst>
-          <pc:docMk/>
-          <pc:sldMk cId="2404237809" sldId="648"/>
-        </pc:sldMkLst>
-      </pc:sldChg>
-      <pc:sldChg chg="del">
-        <pc:chgData name="Matthieu De Mari" userId="dfb708c9-d8dc-439f-9a3b-c772bf4a311c" providerId="ADAL" clId="{0A8E5E50-AABB-4D3D-A438-A1F78BC47CD3}" dt="2023-02-26T09:41:57.535" v="76" actId="47"/>
-        <pc:sldMkLst>
-          <pc:docMk/>
-          <pc:sldMk cId="1952442680" sldId="649"/>
-        </pc:sldMkLst>
-      </pc:sldChg>
-      <pc:sldChg chg="del">
-        <pc:chgData name="Matthieu De Mari" userId="dfb708c9-d8dc-439f-9a3b-c772bf4a311c" providerId="ADAL" clId="{0A8E5E50-AABB-4D3D-A438-A1F78BC47CD3}" dt="2023-02-26T09:41:57.535" v="76" actId="47"/>
-        <pc:sldMkLst>
-          <pc:docMk/>
-          <pc:sldMk cId="3215884619" sldId="650"/>
-        </pc:sldMkLst>
-      </pc:sldChg>
-      <pc:sldChg chg="del">
-        <pc:chgData name="Matthieu De Mari" userId="dfb708c9-d8dc-439f-9a3b-c772bf4a311c" providerId="ADAL" clId="{0A8E5E50-AABB-4D3D-A438-A1F78BC47CD3}" dt="2023-02-26T09:41:56.173" v="75" actId="47"/>
-        <pc:sldMkLst>
-          <pc:docMk/>
-          <pc:sldMk cId="2595195584" sldId="651"/>
-        </pc:sldMkLst>
-      </pc:sldChg>
-      <pc:sldChg chg="del">
-        <pc:chgData name="Matthieu De Mari" userId="dfb708c9-d8dc-439f-9a3b-c772bf4a311c" providerId="ADAL" clId="{0A8E5E50-AABB-4D3D-A438-A1F78BC47CD3}" dt="2023-02-26T09:41:56.173" v="75" actId="47"/>
-        <pc:sldMkLst>
-          <pc:docMk/>
-          <pc:sldMk cId="773672680" sldId="652"/>
-        </pc:sldMkLst>
-      </pc:sldChg>
-      <pc:sldChg chg="del">
-        <pc:chgData name="Matthieu De Mari" userId="dfb708c9-d8dc-439f-9a3b-c772bf4a311c" providerId="ADAL" clId="{0A8E5E50-AABB-4D3D-A438-A1F78BC47CD3}" dt="2023-02-26T09:41:57.535" v="76" actId="47"/>
-        <pc:sldMkLst>
-          <pc:docMk/>
-          <pc:sldMk cId="855321949" sldId="653"/>
-        </pc:sldMkLst>
-      </pc:sldChg>
-      <pc:sldChg chg="del">
-        <pc:chgData name="Matthieu De Mari" userId="dfb708c9-d8dc-439f-9a3b-c772bf4a311c" providerId="ADAL" clId="{0A8E5E50-AABB-4D3D-A438-A1F78BC47CD3}" dt="2023-02-26T09:41:57.535" v="76" actId="47"/>
-        <pc:sldMkLst>
-          <pc:docMk/>
-          <pc:sldMk cId="2099660639" sldId="654"/>
-        </pc:sldMkLst>
-      </pc:sldChg>
-      <pc:sldChg chg="del">
-        <pc:chgData name="Matthieu De Mari" userId="dfb708c9-d8dc-439f-9a3b-c772bf4a311c" providerId="ADAL" clId="{0A8E5E50-AABB-4D3D-A438-A1F78BC47CD3}" dt="2023-02-26T09:41:58.986" v="77" actId="47"/>
-        <pc:sldMkLst>
-          <pc:docMk/>
-          <pc:sldMk cId="2451971174" sldId="655"/>
-        </pc:sldMkLst>
-      </pc:sldChg>
-      <pc:sldChg chg="del">
-        <pc:chgData name="Matthieu De Mari" userId="dfb708c9-d8dc-439f-9a3b-c772bf4a311c" providerId="ADAL" clId="{0A8E5E50-AABB-4D3D-A438-A1F78BC47CD3}" dt="2023-02-26T09:41:58.986" v="77" actId="47"/>
-        <pc:sldMkLst>
-          <pc:docMk/>
-          <pc:sldMk cId="148017835" sldId="656"/>
-        </pc:sldMkLst>
-      </pc:sldChg>
-      <pc:sldChg chg="del">
-        <pc:chgData name="Matthieu De Mari" userId="dfb708c9-d8dc-439f-9a3b-c772bf4a311c" providerId="ADAL" clId="{0A8E5E50-AABB-4D3D-A438-A1F78BC47CD3}" dt="2023-02-26T09:41:58.986" v="77" actId="47"/>
-        <pc:sldMkLst>
-          <pc:docMk/>
-          <pc:sldMk cId="1922511899" sldId="657"/>
-        </pc:sldMkLst>
-      </pc:sldChg>
-      <pc:sldChg chg="del">
-        <pc:chgData name="Matthieu De Mari" userId="dfb708c9-d8dc-439f-9a3b-c772bf4a311c" providerId="ADAL" clId="{0A8E5E50-AABB-4D3D-A438-A1F78BC47CD3}" dt="2023-02-26T09:41:58.986" v="77" actId="47"/>
-        <pc:sldMkLst>
-          <pc:docMk/>
-          <pc:sldMk cId="4035742227" sldId="658"/>
-        </pc:sldMkLst>
-      </pc:sldChg>
-      <pc:sldChg chg="del">
-        <pc:chgData name="Matthieu De Mari" userId="dfb708c9-d8dc-439f-9a3b-c772bf4a311c" providerId="ADAL" clId="{0A8E5E50-AABB-4D3D-A438-A1F78BC47CD3}" dt="2023-02-26T09:41:58.986" v="77" actId="47"/>
-        <pc:sldMkLst>
-          <pc:docMk/>
-          <pc:sldMk cId="2096824087" sldId="659"/>
-        </pc:sldMkLst>
-      </pc:sldChg>
-      <pc:sldChg chg="del">
-        <pc:chgData name="Matthieu De Mari" userId="dfb708c9-d8dc-439f-9a3b-c772bf4a311c" providerId="ADAL" clId="{0A8E5E50-AABB-4D3D-A438-A1F78BC47CD3}" dt="2023-02-26T09:41:58.986" v="77" actId="47"/>
-        <pc:sldMkLst>
-          <pc:docMk/>
-          <pc:sldMk cId="3023865042" sldId="660"/>
-        </pc:sldMkLst>
-      </pc:sldChg>
-      <pc:sldChg chg="del">
-        <pc:chgData name="Matthieu De Mari" userId="dfb708c9-d8dc-439f-9a3b-c772bf4a311c" providerId="ADAL" clId="{0A8E5E50-AABB-4D3D-A438-A1F78BC47CD3}" dt="2023-02-26T09:41:58.986" v="77" actId="47"/>
-        <pc:sldMkLst>
-          <pc:docMk/>
-          <pc:sldMk cId="2303339168" sldId="661"/>
-        </pc:sldMkLst>
-      </pc:sldChg>
-      <pc:sldChg chg="del">
-        <pc:chgData name="Matthieu De Mari" userId="dfb708c9-d8dc-439f-9a3b-c772bf4a311c" providerId="ADAL" clId="{0A8E5E50-AABB-4D3D-A438-A1F78BC47CD3}" dt="2023-02-26T09:41:58.986" v="77" actId="47"/>
-        <pc:sldMkLst>
-          <pc:docMk/>
-          <pc:sldMk cId="365986058" sldId="663"/>
-        </pc:sldMkLst>
-      </pc:sldChg>
-      <pc:sldChg chg="addSp delSp modSp new mod modClrScheme chgLayout">
-        <pc:chgData name="Matthieu De Mari" userId="dfb708c9-d8dc-439f-9a3b-c772bf4a311c" providerId="ADAL" clId="{0A8E5E50-AABB-4D3D-A438-A1F78BC47CD3}" dt="2023-02-26T09:41:08.437" v="66" actId="20577"/>
-        <pc:sldMkLst>
-          <pc:docMk/>
-          <pc:sldMk cId="1783786614" sldId="664"/>
-        </pc:sldMkLst>
       </pc:sldChg>
     </pc:docChg>
   </pc:docChgLst>
@@ -2943,7 +393,7 @@
           <a:p>
             <a:fld id="{61478373-EB31-4867-8CF0-FA31364748A5}" type="datetimeFigureOut">
               <a:rPr lang="en-GB" smtClean="0"/>
-              <a:t>24/02/2025</a:t>
+              <a:t>06/01/2026</a:t>
             </a:fld>
             <a:endParaRPr lang="en-GB"/>
           </a:p>
@@ -3360,7 +810,7 @@
           <a:p>
             <a:fld id="{E85DF616-B21E-4EF6-A6A5-95E2FB3EB1A1}" type="datetimeFigureOut">
               <a:rPr lang="en-GB" smtClean="0"/>
-              <a:t>24/02/2025</a:t>
+              <a:t>06/01/2026</a:t>
             </a:fld>
             <a:endParaRPr lang="en-GB"/>
           </a:p>
@@ -3560,7 +1010,7 @@
           <a:p>
             <a:fld id="{E85DF616-B21E-4EF6-A6A5-95E2FB3EB1A1}" type="datetimeFigureOut">
               <a:rPr lang="en-GB" smtClean="0"/>
-              <a:t>24/02/2025</a:t>
+              <a:t>06/01/2026</a:t>
             </a:fld>
             <a:endParaRPr lang="en-GB"/>
           </a:p>
@@ -3770,7 +1220,7 @@
           <a:p>
             <a:fld id="{E85DF616-B21E-4EF6-A6A5-95E2FB3EB1A1}" type="datetimeFigureOut">
               <a:rPr lang="en-GB" smtClean="0"/>
-              <a:t>24/02/2025</a:t>
+              <a:t>06/01/2026</a:t>
             </a:fld>
             <a:endParaRPr lang="en-GB"/>
           </a:p>
@@ -3970,7 +1420,7 @@
           <a:p>
             <a:fld id="{E85DF616-B21E-4EF6-A6A5-95E2FB3EB1A1}" type="datetimeFigureOut">
               <a:rPr lang="en-GB" smtClean="0"/>
-              <a:t>24/02/2025</a:t>
+              <a:t>06/01/2026</a:t>
             </a:fld>
             <a:endParaRPr lang="en-GB"/>
           </a:p>
@@ -4246,7 +1696,7 @@
           <a:p>
             <a:fld id="{E85DF616-B21E-4EF6-A6A5-95E2FB3EB1A1}" type="datetimeFigureOut">
               <a:rPr lang="en-GB" smtClean="0"/>
-              <a:t>24/02/2025</a:t>
+              <a:t>06/01/2026</a:t>
             </a:fld>
             <a:endParaRPr lang="en-GB"/>
           </a:p>
@@ -4514,7 +1964,7 @@
           <a:p>
             <a:fld id="{E85DF616-B21E-4EF6-A6A5-95E2FB3EB1A1}" type="datetimeFigureOut">
               <a:rPr lang="en-GB" smtClean="0"/>
-              <a:t>24/02/2025</a:t>
+              <a:t>06/01/2026</a:t>
             </a:fld>
             <a:endParaRPr lang="en-GB"/>
           </a:p>
@@ -4929,7 +2379,7 @@
           <a:p>
             <a:fld id="{E85DF616-B21E-4EF6-A6A5-95E2FB3EB1A1}" type="datetimeFigureOut">
               <a:rPr lang="en-GB" smtClean="0"/>
-              <a:t>24/02/2025</a:t>
+              <a:t>06/01/2026</a:t>
             </a:fld>
             <a:endParaRPr lang="en-GB"/>
           </a:p>
@@ -5071,7 +2521,7 @@
           <a:p>
             <a:fld id="{E85DF616-B21E-4EF6-A6A5-95E2FB3EB1A1}" type="datetimeFigureOut">
               <a:rPr lang="en-GB" smtClean="0"/>
-              <a:t>24/02/2025</a:t>
+              <a:t>06/01/2026</a:t>
             </a:fld>
             <a:endParaRPr lang="en-GB"/>
           </a:p>
@@ -5184,7 +2634,7 @@
           <a:p>
             <a:fld id="{E85DF616-B21E-4EF6-A6A5-95E2FB3EB1A1}" type="datetimeFigureOut">
               <a:rPr lang="en-GB" smtClean="0"/>
-              <a:t>24/02/2025</a:t>
+              <a:t>06/01/2026</a:t>
             </a:fld>
             <a:endParaRPr lang="en-GB"/>
           </a:p>
@@ -5497,7 +2947,7 @@
           <a:p>
             <a:fld id="{E85DF616-B21E-4EF6-A6A5-95E2FB3EB1A1}" type="datetimeFigureOut">
               <a:rPr lang="en-GB" smtClean="0"/>
-              <a:t>24/02/2025</a:t>
+              <a:t>06/01/2026</a:t>
             </a:fld>
             <a:endParaRPr lang="en-GB"/>
           </a:p>
@@ -5786,7 +3236,7 @@
           <a:p>
             <a:fld id="{E85DF616-B21E-4EF6-A6A5-95E2FB3EB1A1}" type="datetimeFigureOut">
               <a:rPr lang="en-GB" smtClean="0"/>
-              <a:t>24/02/2025</a:t>
+              <a:t>06/01/2026</a:t>
             </a:fld>
             <a:endParaRPr lang="en-GB"/>
           </a:p>
@@ -6029,7 +3479,7 @@
           <a:p>
             <a:fld id="{E85DF616-B21E-4EF6-A6A5-95E2FB3EB1A1}" type="datetimeFigureOut">
               <a:rPr lang="en-GB" smtClean="0"/>
-              <a:t>24/02/2025</a:t>
+              <a:t>06/01/2026</a:t>
             </a:fld>
             <a:endParaRPr lang="en-GB"/>
           </a:p>
@@ -6875,7 +4325,13 @@
   <p:cSld>
     <p:spTree>
       <p:nvGrpSpPr>
-        <p:cNvPr id="1" name=""/>
+        <p:cNvPr id="1" name="">
+          <a:extLst>
+            <a:ext uri="{FF2B5EF4-FFF2-40B4-BE49-F238E27FC236}">
+              <a16:creationId xmlns:a16="http://schemas.microsoft.com/office/drawing/2014/main" id="{0E6C4921-A257-498A-7823-3DE6525F9B84}"/>
+            </a:ext>
+          </a:extLst>
+        </p:cNvPr>
         <p:cNvGrpSpPr/>
         <p:nvPr/>
       </p:nvGrpSpPr>
@@ -6889,10 +4345,10 @@
       </p:grpSpPr>
       <p:sp>
         <p:nvSpPr>
-          <p:cNvPr id="4" name="Title 3">
+          <p:cNvPr id="5" name="Title 4">
             <a:extLst>
               <a:ext uri="{FF2B5EF4-FFF2-40B4-BE49-F238E27FC236}">
-                <a16:creationId xmlns:a16="http://schemas.microsoft.com/office/drawing/2014/main" id="{81B1015D-E7F1-F3D9-E560-C9E82C06BBB9}"/>
+                <a16:creationId xmlns:a16="http://schemas.microsoft.com/office/drawing/2014/main" id="{2FA62BAB-0365-E25F-E7AA-0B21849DE445}"/>
               </a:ext>
             </a:extLst>
           </p:cNvPr>
@@ -6910,7 +4366,7 @@
           <a:p>
             <a:r>
               <a:rPr lang="en-GB" dirty="0"/>
-              <a:t>Typical methods for analysing a time series</a:t>
+              <a:t>A quick word about decomposition</a:t>
             </a:r>
             <a:endParaRPr lang="en-SG" dirty="0"/>
           </a:p>
@@ -6918,10 +4374,10 @@
       </p:sp>
       <p:sp>
         <p:nvSpPr>
-          <p:cNvPr id="5" name="Content Placeholder 4">
+          <p:cNvPr id="6" name="Content Placeholder 5">
             <a:extLst>
               <a:ext uri="{FF2B5EF4-FFF2-40B4-BE49-F238E27FC236}">
-                <a16:creationId xmlns:a16="http://schemas.microsoft.com/office/drawing/2014/main" id="{B00D7D74-AD4E-73AE-79C0-432D2B4B2341}"/>
+                <a16:creationId xmlns:a16="http://schemas.microsoft.com/office/drawing/2014/main" id="{A3CE3216-BB60-B2EA-0A77-7CD1D1669BBE}"/>
               </a:ext>
             </a:extLst>
           </p:cNvPr>
@@ -6935,76 +4391,59 @@
         <p:spPr>
           <a:xfrm>
             <a:off x="838200" y="1825624"/>
-            <a:ext cx="5181600" cy="5032375"/>
+            <a:ext cx="4256314" cy="5032375"/>
           </a:xfrm>
         </p:spPr>
         <p:txBody>
           <a:bodyPr>
-            <a:normAutofit fontScale="92500" lnSpcReduction="10000"/>
+            <a:normAutofit/>
           </a:bodyPr>
           <a:lstStyle/>
-          <a:p>
-            <a:pPr marL="514350" indent="-514350">
-              <a:buFont typeface="+mj-lt"/>
-              <a:buAutoNum type="arabicPeriod" startAt="4"/>
-            </a:pPr>
-            <a:r>
-              <a:rPr lang="en-GB" b="1" dirty="0"/>
-              <a:t>Time series models: </a:t>
-            </a:r>
-            <a:r>
-              <a:rPr lang="en-GB" dirty="0"/>
-              <a:t>Statistical models used to describe the underlying processes that generate the time series data.</a:t>
-            </a:r>
-          </a:p>
           <a:p>
             <a:pPr marL="0" indent="0">
               <a:buNone/>
             </a:pPr>
             <a:r>
+              <a:rPr lang="en-GB" b="1" dirty="0"/>
+              <a:t>Time Series Decomposition </a:t>
+            </a:r>
+            <a:r>
               <a:rPr lang="en-GB" dirty="0"/>
-              <a:t>Time series models can be used for forecasting future values, identifying important predictors, and understanding the relationships among variables.</a:t>
+              <a:t>is technically out-of-scope for 50.039 DL, but it can give great insights about your data set before you dive into training AI models.</a:t>
             </a:r>
           </a:p>
           <a:p>
             <a:pPr marL="0" indent="0">
               <a:buNone/>
             </a:pPr>
-            <a:r>
-              <a:rPr lang="en-GB" b="1" dirty="0"/>
-              <a:t>ML models: </a:t>
-            </a:r>
-            <a:r>
-              <a:rPr lang="en-GB" dirty="0"/>
-              <a:t>autoregressive integrated moving average (ARIMA) models, exponential smoothing models, state space models, etc.</a:t>
-            </a:r>
+            <a:endParaRPr lang="en-GB" dirty="0"/>
           </a:p>
           <a:p>
             <a:pPr marL="0" indent="0">
               <a:buNone/>
             </a:pPr>
             <a:r>
-              <a:rPr lang="en-GB" i="1" dirty="0"/>
-              <a:t>(These are </a:t>
-            </a:r>
-            <a:r>
-              <a:rPr lang="en-GB" i="1" u="sng" dirty="0"/>
-              <a:t>out-of-scope.</a:t>
-            </a:r>
-            <a:r>
-              <a:rPr lang="en-GB" i="1" dirty="0"/>
-              <a:t>)</a:t>
-            </a:r>
-            <a:endParaRPr lang="en-SG" i="1" dirty="0"/>
+              <a:rPr lang="en-GB" dirty="0"/>
+              <a:t>We attach to these lecture slides an additional “bonus” notebook</a:t>
+            </a:r>
+            <a:r>
+              <a:rPr lang="en-GB"/>
+              <a:t>, which briefly </a:t>
+            </a:r>
+            <a:r>
+              <a:rPr lang="en-GB" dirty="0"/>
+              <a:t>introducing these concepts.</a:t>
+            </a:r>
+            <a:endParaRPr lang="en-SG" dirty="0"/>
           </a:p>
         </p:txBody>
       </p:sp>
       <p:pic>
         <p:nvPicPr>
-          <p:cNvPr id="2" name="Picture 1">
+          <p:cNvPr id="3" name="Picture 2" descr="Chart, line chart&#10;&#10;Description automatically generated">
             <a:extLst>
               <a:ext uri="{FF2B5EF4-FFF2-40B4-BE49-F238E27FC236}">
-                <a16:creationId xmlns:a16="http://schemas.microsoft.com/office/drawing/2014/main" id="{6CB90404-07DB-3B57-BA11-DEDB66328E1C}"/>
+                <a16:creationId xmlns:a16="http://schemas.microsoft.com/office/drawing/2014/main" id="{2FBCE472-B101-706E-49C1-78BEAA685A6A}"/>
               </a:ext>
             </a:extLst>
           </p:cNvPr>
@@ -7014,15 +4453,21 @@
           <p:nvPr/>
         </p:nvPicPr>
         <p:blipFill>
-          <a:blip r:embed="rId2"/>
+          <a:blip r:embed="rId2">
+            <a:extLst>
+              <a:ext uri="{28A0092B-C50C-407E-A947-70E740481C1C}">
+                <a14:useLocalDpi xmlns:a14="http://schemas.microsoft.com/office/drawing/2010/main" val="0"/>
+              </a:ext>
+            </a:extLst>
+          </a:blip>
           <a:stretch>
             <a:fillRect/>
           </a:stretch>
         </p:blipFill>
         <p:spPr>
           <a:xfrm>
-            <a:off x="6372228" y="1570786"/>
-            <a:ext cx="5486452" cy="4796162"/>
+            <a:off x="5383763" y="1499053"/>
+            <a:ext cx="6808237" cy="5106178"/>
           </a:xfrm>
           <a:prstGeom prst="rect">
             <a:avLst/>
@@ -7032,7 +4477,7 @@
     </p:spTree>
     <p:extLst>
       <p:ext uri="{BB962C8B-B14F-4D97-AF65-F5344CB8AC3E}">
-        <p14:creationId xmlns:p14="http://schemas.microsoft.com/office/powerpoint/2010/main" val="1990152231"/>
+        <p14:creationId xmlns:p14="http://schemas.microsoft.com/office/powerpoint/2010/main" val="559955036"/>
       </p:ext>
     </p:extLst>
   </p:cSld>
@@ -7143,6 +4588,178 @@
               <a:buNone/>
             </a:pPr>
             <a:r>
+              <a:rPr lang="en-GB" b="1" dirty="0"/>
+              <a:t>ML models: </a:t>
+            </a:r>
+            <a:r>
+              <a:rPr lang="en-GB" dirty="0"/>
+              <a:t>autoregressive integrated moving average (ARIMA) models, exponential smoothing models, state space models, etc.</a:t>
+            </a:r>
+          </a:p>
+          <a:p>
+            <a:pPr marL="0" indent="0">
+              <a:buNone/>
+            </a:pPr>
+            <a:r>
+              <a:rPr lang="en-GB" i="1" dirty="0"/>
+              <a:t>(These are </a:t>
+            </a:r>
+            <a:r>
+              <a:rPr lang="en-GB" i="1" u="sng" dirty="0"/>
+              <a:t>out-of-scope.</a:t>
+            </a:r>
+            <a:r>
+              <a:rPr lang="en-GB" i="1" dirty="0"/>
+              <a:t>)</a:t>
+            </a:r>
+            <a:endParaRPr lang="en-SG" i="1" dirty="0"/>
+          </a:p>
+        </p:txBody>
+      </p:sp>
+      <p:pic>
+        <p:nvPicPr>
+          <p:cNvPr id="2" name="Picture 1">
+            <a:extLst>
+              <a:ext uri="{FF2B5EF4-FFF2-40B4-BE49-F238E27FC236}">
+                <a16:creationId xmlns:a16="http://schemas.microsoft.com/office/drawing/2014/main" id="{6CB90404-07DB-3B57-BA11-DEDB66328E1C}"/>
+              </a:ext>
+            </a:extLst>
+          </p:cNvPr>
+          <p:cNvPicPr>
+            <a:picLocks noChangeAspect="1"/>
+          </p:cNvPicPr>
+          <p:nvPr/>
+        </p:nvPicPr>
+        <p:blipFill>
+          <a:blip r:embed="rId2"/>
+          <a:stretch>
+            <a:fillRect/>
+          </a:stretch>
+        </p:blipFill>
+        <p:spPr>
+          <a:xfrm>
+            <a:off x="6372228" y="1570786"/>
+            <a:ext cx="5486452" cy="4796162"/>
+          </a:xfrm>
+          <a:prstGeom prst="rect">
+            <a:avLst/>
+          </a:prstGeom>
+        </p:spPr>
+      </p:pic>
+    </p:spTree>
+    <p:extLst>
+      <p:ext uri="{BB962C8B-B14F-4D97-AF65-F5344CB8AC3E}">
+        <p14:creationId xmlns:p14="http://schemas.microsoft.com/office/powerpoint/2010/main" val="1990152231"/>
+      </p:ext>
+    </p:extLst>
+  </p:cSld>
+  <p:clrMapOvr>
+    <a:masterClrMapping/>
+  </p:clrMapOvr>
+</p:sld>
+</file>
+
+<file path=ppt/slides/slide13.xml><?xml version="1.0" encoding="utf-8"?>
+<p:sld xmlns:a="http://schemas.openxmlformats.org/drawingml/2006/main" xmlns:r="http://schemas.openxmlformats.org/officeDocument/2006/relationships" xmlns:p="http://schemas.openxmlformats.org/presentationml/2006/main">
+  <p:cSld>
+    <p:spTree>
+      <p:nvGrpSpPr>
+        <p:cNvPr id="1" name=""/>
+        <p:cNvGrpSpPr/>
+        <p:nvPr/>
+      </p:nvGrpSpPr>
+      <p:grpSpPr>
+        <a:xfrm>
+          <a:off x="0" y="0"/>
+          <a:ext cx="0" cy="0"/>
+          <a:chOff x="0" y="0"/>
+          <a:chExt cx="0" cy="0"/>
+        </a:xfrm>
+      </p:grpSpPr>
+      <p:sp>
+        <p:nvSpPr>
+          <p:cNvPr id="4" name="Title 3">
+            <a:extLst>
+              <a:ext uri="{FF2B5EF4-FFF2-40B4-BE49-F238E27FC236}">
+                <a16:creationId xmlns:a16="http://schemas.microsoft.com/office/drawing/2014/main" id="{81B1015D-E7F1-F3D9-E560-C9E82C06BBB9}"/>
+              </a:ext>
+            </a:extLst>
+          </p:cNvPr>
+          <p:cNvSpPr>
+            <a:spLocks noGrp="1"/>
+          </p:cNvSpPr>
+          <p:nvPr>
+            <p:ph type="title"/>
+          </p:nvPr>
+        </p:nvSpPr>
+        <p:spPr/>
+        <p:txBody>
+          <a:bodyPr/>
+          <a:lstStyle/>
+          <a:p>
+            <a:r>
+              <a:rPr lang="en-GB" dirty="0"/>
+              <a:t>Typical methods for analysing a time series</a:t>
+            </a:r>
+            <a:endParaRPr lang="en-SG" dirty="0"/>
+          </a:p>
+        </p:txBody>
+      </p:sp>
+      <p:sp>
+        <p:nvSpPr>
+          <p:cNvPr id="5" name="Content Placeholder 4">
+            <a:extLst>
+              <a:ext uri="{FF2B5EF4-FFF2-40B4-BE49-F238E27FC236}">
+                <a16:creationId xmlns:a16="http://schemas.microsoft.com/office/drawing/2014/main" id="{B00D7D74-AD4E-73AE-79C0-432D2B4B2341}"/>
+              </a:ext>
+            </a:extLst>
+          </p:cNvPr>
+          <p:cNvSpPr>
+            <a:spLocks noGrp="1"/>
+          </p:cNvSpPr>
+          <p:nvPr>
+            <p:ph sz="half" idx="1"/>
+          </p:nvPr>
+        </p:nvSpPr>
+        <p:spPr>
+          <a:xfrm>
+            <a:off x="838200" y="1825624"/>
+            <a:ext cx="5181600" cy="5032375"/>
+          </a:xfrm>
+        </p:spPr>
+        <p:txBody>
+          <a:bodyPr>
+            <a:normAutofit fontScale="92500" lnSpcReduction="10000"/>
+          </a:bodyPr>
+          <a:lstStyle/>
+          <a:p>
+            <a:pPr marL="514350" indent="-514350">
+              <a:buFont typeface="+mj-lt"/>
+              <a:buAutoNum type="arabicPeriod" startAt="4"/>
+            </a:pPr>
+            <a:r>
+              <a:rPr lang="en-GB" b="1" dirty="0"/>
+              <a:t>Time series models: </a:t>
+            </a:r>
+            <a:r>
+              <a:rPr lang="en-GB" dirty="0"/>
+              <a:t>Statistical models used to describe the underlying processes that generate the time series data.</a:t>
+            </a:r>
+          </a:p>
+          <a:p>
+            <a:pPr marL="0" indent="0">
+              <a:buNone/>
+            </a:pPr>
+            <a:r>
+              <a:rPr lang="en-GB" dirty="0"/>
+              <a:t>Time series models can be used for forecasting future values, identifying important predictors, and understanding the relationships among variables.</a:t>
+            </a:r>
+          </a:p>
+          <a:p>
+            <a:pPr marL="0" indent="0">
+              <a:buNone/>
+            </a:pPr>
+            <a:r>
               <a:rPr lang="en-GB" b="1" dirty="0">
                 <a:solidFill>
                   <a:srgbClr val="7030A0"/>
@@ -7217,7 +4834,7 @@
 </p:sld>
 </file>
 
-<file path=ppt/slides/slide13.xml><?xml version="1.0" encoding="utf-8"?>
+<file path=ppt/slides/slide14.xml><?xml version="1.0" encoding="utf-8"?>
 <p:sld xmlns:a="http://schemas.openxmlformats.org/drawingml/2006/main" xmlns:r="http://schemas.openxmlformats.org/officeDocument/2006/relationships" xmlns:p="http://schemas.openxmlformats.org/presentationml/2006/main">
   <p:cSld>
     <p:spTree>
@@ -7904,7 +5521,7 @@
 </p:sld>
 </file>
 
-<file path=ppt/slides/slide14.xml><?xml version="1.0" encoding="utf-8"?>
+<file path=ppt/slides/slide15.xml><?xml version="1.0" encoding="utf-8"?>
 <p:sld xmlns:a="http://schemas.openxmlformats.org/drawingml/2006/main" xmlns:r="http://schemas.openxmlformats.org/officeDocument/2006/relationships" xmlns:p="http://schemas.openxmlformats.org/presentationml/2006/main">
   <p:cSld>
     <p:spTree>
@@ -8836,7 +6453,7 @@
 </p:sld>
 </file>
 
-<file path=ppt/slides/slide15.xml><?xml version="1.0" encoding="utf-8"?>
+<file path=ppt/slides/slide16.xml><?xml version="1.0" encoding="utf-8"?>
 <p:sld xmlns:a="http://schemas.openxmlformats.org/drawingml/2006/main" xmlns:r="http://schemas.openxmlformats.org/officeDocument/2006/relationships" xmlns:p="http://schemas.openxmlformats.org/presentationml/2006/main">
   <p:cSld>
     <p:spTree>
@@ -9014,7 +6631,7 @@
 </p:sld>
 </file>
 
-<file path=ppt/slides/slide16.xml><?xml version="1.0" encoding="utf-8"?>
+<file path=ppt/slides/slide17.xml><?xml version="1.0" encoding="utf-8"?>
 <p:sld xmlns:a="http://schemas.openxmlformats.org/drawingml/2006/main" xmlns:r="http://schemas.openxmlformats.org/officeDocument/2006/relationships" xmlns:p="http://schemas.openxmlformats.org/presentationml/2006/main">
   <p:cSld>
     <p:spTree>
@@ -9208,7 +6825,7 @@
 </p:sld>
 </file>
 
-<file path=ppt/slides/slide17.xml><?xml version="1.0" encoding="utf-8"?>
+<file path=ppt/slides/slide18.xml><?xml version="1.0" encoding="utf-8"?>
 <p:sld xmlns:a="http://schemas.openxmlformats.org/drawingml/2006/main" xmlns:r="http://schemas.openxmlformats.org/officeDocument/2006/relationships" xmlns:p="http://schemas.openxmlformats.org/presentationml/2006/main">
   <p:cSld>
     <p:spTree>
@@ -9507,7 +7124,7 @@
 </p:sld>
 </file>
 
-<file path=ppt/slides/slide18.xml><?xml version="1.0" encoding="utf-8"?>
+<file path=ppt/slides/slide19.xml><?xml version="1.0" encoding="utf-8"?>
 <p:sld xmlns:a="http://schemas.openxmlformats.org/drawingml/2006/main" xmlns:r="http://schemas.openxmlformats.org/officeDocument/2006/relationships" xmlns:p="http://schemas.openxmlformats.org/presentationml/2006/main">
   <p:cSld>
     <p:spTree>
@@ -10287,7 +7904,246 @@
 </p:sld>
 </file>
 
-<file path=ppt/slides/slide19.xml><?xml version="1.0" encoding="utf-8"?>
+<file path=ppt/slides/slide2.xml><?xml version="1.0" encoding="utf-8"?>
+<p:sld xmlns:a="http://schemas.openxmlformats.org/drawingml/2006/main" xmlns:r="http://schemas.openxmlformats.org/officeDocument/2006/relationships" xmlns:p="http://schemas.openxmlformats.org/presentationml/2006/main">
+  <p:cSld>
+    <p:spTree>
+      <p:nvGrpSpPr>
+        <p:cNvPr id="1" name=""/>
+        <p:cNvGrpSpPr/>
+        <p:nvPr/>
+      </p:nvGrpSpPr>
+      <p:grpSpPr>
+        <a:xfrm>
+          <a:off x="0" y="0"/>
+          <a:ext cx="0" cy="0"/>
+          <a:chOff x="0" y="0"/>
+          <a:chExt cx="0" cy="0"/>
+        </a:xfrm>
+      </p:grpSpPr>
+      <p:sp>
+        <p:nvSpPr>
+          <p:cNvPr id="2" name="Title 1">
+            <a:extLst>
+              <a:ext uri="{FF2B5EF4-FFF2-40B4-BE49-F238E27FC236}">
+                <a16:creationId xmlns:a16="http://schemas.microsoft.com/office/drawing/2014/main" id="{49D40417-A4D3-4CE8-96E7-708E2439AE7B}"/>
+              </a:ext>
+            </a:extLst>
+          </p:cNvPr>
+          <p:cNvSpPr>
+            <a:spLocks noGrp="1"/>
+          </p:cNvSpPr>
+          <p:nvPr>
+            <p:ph type="title"/>
+          </p:nvPr>
+        </p:nvSpPr>
+        <p:spPr/>
+        <p:txBody>
+          <a:bodyPr/>
+          <a:lstStyle/>
+          <a:p>
+            <a:r>
+              <a:rPr lang="en-US" dirty="0"/>
+              <a:t>About this week (Week 5)</a:t>
+            </a:r>
+            <a:endParaRPr lang="en-GB" dirty="0"/>
+          </a:p>
+        </p:txBody>
+      </p:sp>
+      <p:sp>
+        <p:nvSpPr>
+          <p:cNvPr id="3" name="Content Placeholder 2">
+            <a:extLst>
+              <a:ext uri="{FF2B5EF4-FFF2-40B4-BE49-F238E27FC236}">
+                <a16:creationId xmlns:a16="http://schemas.microsoft.com/office/drawing/2014/main" id="{35995840-A9D9-479A-A34F-EA7DC229D38E}"/>
+              </a:ext>
+            </a:extLst>
+          </p:cNvPr>
+          <p:cNvSpPr>
+            <a:spLocks noGrp="1"/>
+          </p:cNvSpPr>
+          <p:nvPr>
+            <p:ph idx="1"/>
+          </p:nvPr>
+        </p:nvSpPr>
+        <p:spPr>
+          <a:xfrm>
+            <a:off x="838200" y="1825624"/>
+            <a:ext cx="10515600" cy="5032375"/>
+          </a:xfrm>
+        </p:spPr>
+        <p:txBody>
+          <a:bodyPr>
+            <a:normAutofit/>
+          </a:bodyPr>
+          <a:lstStyle/>
+          <a:p>
+            <a:pPr marL="514350" indent="-514350">
+              <a:buFont typeface="+mj-lt"/>
+              <a:buAutoNum type="arabicPeriod"/>
+            </a:pPr>
+            <a:r>
+              <a:rPr lang="en-US" dirty="0"/>
+              <a:t>What is a </a:t>
+            </a:r>
+            <a:r>
+              <a:rPr lang="en-US" b="1" dirty="0"/>
+              <a:t>time</a:t>
+            </a:r>
+            <a:r>
+              <a:rPr lang="en-US" dirty="0"/>
+              <a:t> </a:t>
+            </a:r>
+            <a:r>
+              <a:rPr lang="en-US" b="1" dirty="0"/>
+              <a:t>series</a:t>
+            </a:r>
+            <a:r>
+              <a:rPr lang="en-US" dirty="0"/>
+              <a:t> </a:t>
+            </a:r>
+            <a:r>
+              <a:rPr lang="en-US" b="1" dirty="0"/>
+              <a:t>dataset</a:t>
+            </a:r>
+            <a:r>
+              <a:rPr lang="en-US" dirty="0"/>
+              <a:t>?</a:t>
+            </a:r>
+          </a:p>
+          <a:p>
+            <a:pPr marL="514350" indent="-514350">
+              <a:buFont typeface="+mj-lt"/>
+              <a:buAutoNum type="arabicPeriod"/>
+            </a:pPr>
+            <a:r>
+              <a:rPr lang="en-US" dirty="0"/>
+              <a:t>How to </a:t>
+            </a:r>
+            <a:r>
+              <a:rPr lang="en-US" b="1" dirty="0"/>
+              <a:t>analyze a time series</a:t>
+            </a:r>
+            <a:r>
+              <a:rPr lang="en-US" dirty="0"/>
+              <a:t>, and what are </a:t>
+            </a:r>
+            <a:r>
+              <a:rPr lang="en-US" b="1" dirty="0"/>
+              <a:t>typical deep learning models</a:t>
+            </a:r>
+            <a:r>
+              <a:rPr lang="en-US" dirty="0"/>
+              <a:t> capable of doing that?</a:t>
+            </a:r>
+          </a:p>
+          <a:p>
+            <a:pPr marL="514350" indent="-514350">
+              <a:buFont typeface="+mj-lt"/>
+              <a:buAutoNum type="arabicPeriod"/>
+            </a:pPr>
+            <a:r>
+              <a:rPr lang="en-US" dirty="0"/>
+              <a:t>What is </a:t>
+            </a:r>
+            <a:r>
+              <a:rPr lang="en-US" b="1" dirty="0"/>
+              <a:t>history</a:t>
+            </a:r>
+            <a:r>
+              <a:rPr lang="en-US" dirty="0"/>
+              <a:t>, and why is it needed for time series predictions?</a:t>
+            </a:r>
+          </a:p>
+          <a:p>
+            <a:pPr marL="514350" indent="-514350">
+              <a:buFont typeface="+mj-lt"/>
+              <a:buAutoNum type="arabicPeriod"/>
+            </a:pPr>
+            <a:r>
+              <a:rPr lang="en-US" dirty="0"/>
+              <a:t>What is a </a:t>
+            </a:r>
+            <a:r>
+              <a:rPr lang="en-US" b="1" dirty="0"/>
+              <a:t>good history length</a:t>
+            </a:r>
+            <a:r>
+              <a:rPr lang="en-US" dirty="0"/>
+              <a:t>?</a:t>
+            </a:r>
+          </a:p>
+          <a:p>
+            <a:pPr marL="514350" indent="-514350">
+              <a:buFont typeface="+mj-lt"/>
+              <a:buAutoNum type="arabicPeriod"/>
+            </a:pPr>
+            <a:r>
+              <a:rPr lang="en-US" dirty="0"/>
+              <a:t>What is </a:t>
+            </a:r>
+            <a:r>
+              <a:rPr lang="en-US" b="1" dirty="0"/>
+              <a:t>memory</a:t>
+            </a:r>
+            <a:r>
+              <a:rPr lang="en-US" dirty="0"/>
+              <a:t> and how to represent it in a Neural Network model?</a:t>
+            </a:r>
+          </a:p>
+          <a:p>
+            <a:pPr marL="514350" indent="-514350">
+              <a:buFont typeface="+mj-lt"/>
+              <a:buAutoNum type="arabicPeriod"/>
+            </a:pPr>
+            <a:r>
+              <a:rPr lang="en-US" dirty="0"/>
+              <a:t>How to implement a first </a:t>
+            </a:r>
+            <a:r>
+              <a:rPr lang="en-US" b="1" dirty="0"/>
+              <a:t>vanilla Recurrent Neural Network </a:t>
+            </a:r>
+            <a:r>
+              <a:rPr lang="en-US" dirty="0"/>
+              <a:t>model?</a:t>
+            </a:r>
+          </a:p>
+          <a:p>
+            <a:pPr marL="514350" indent="-514350">
+              <a:buFont typeface="+mj-lt"/>
+              <a:buAutoNum type="arabicPeriod"/>
+            </a:pPr>
+            <a:r>
+              <a:rPr lang="en-US" dirty="0"/>
+              <a:t>Why is the </a:t>
+            </a:r>
+            <a:r>
+              <a:rPr lang="en-US" b="1" dirty="0"/>
+              <a:t>vanishing gradient problem </a:t>
+            </a:r>
+            <a:r>
+              <a:rPr lang="en-US" dirty="0"/>
+              <a:t>prominent in RNNs?</a:t>
+            </a:r>
+            <a:endParaRPr lang="en-GB" dirty="0"/>
+          </a:p>
+        </p:txBody>
+      </p:sp>
+    </p:spTree>
+    <p:extLst>
+      <p:ext uri="{BB962C8B-B14F-4D97-AF65-F5344CB8AC3E}">
+        <p14:creationId xmlns:p14="http://schemas.microsoft.com/office/powerpoint/2010/main" val="3442501962"/>
+      </p:ext>
+    </p:extLst>
+  </p:cSld>
+  <p:clrMapOvr>
+    <a:masterClrMapping/>
+  </p:clrMapOvr>
+</p:sld>
+</file>
+
+<file path=ppt/slides/slide20.xml><?xml version="1.0" encoding="utf-8"?>
 <p:sld xmlns:a="http://schemas.openxmlformats.org/drawingml/2006/main" xmlns:r="http://schemas.openxmlformats.org/officeDocument/2006/relationships" xmlns:p="http://schemas.openxmlformats.org/presentationml/2006/main">
   <p:cSld>
     <p:spTree>
@@ -11028,246 +8884,7 @@
 </p:sld>
 </file>
 
-<file path=ppt/slides/slide2.xml><?xml version="1.0" encoding="utf-8"?>
-<p:sld xmlns:a="http://schemas.openxmlformats.org/drawingml/2006/main" xmlns:r="http://schemas.openxmlformats.org/officeDocument/2006/relationships" xmlns:p="http://schemas.openxmlformats.org/presentationml/2006/main">
-  <p:cSld>
-    <p:spTree>
-      <p:nvGrpSpPr>
-        <p:cNvPr id="1" name=""/>
-        <p:cNvGrpSpPr/>
-        <p:nvPr/>
-      </p:nvGrpSpPr>
-      <p:grpSpPr>
-        <a:xfrm>
-          <a:off x="0" y="0"/>
-          <a:ext cx="0" cy="0"/>
-          <a:chOff x="0" y="0"/>
-          <a:chExt cx="0" cy="0"/>
-        </a:xfrm>
-      </p:grpSpPr>
-      <p:sp>
-        <p:nvSpPr>
-          <p:cNvPr id="2" name="Title 1">
-            <a:extLst>
-              <a:ext uri="{FF2B5EF4-FFF2-40B4-BE49-F238E27FC236}">
-                <a16:creationId xmlns:a16="http://schemas.microsoft.com/office/drawing/2014/main" id="{49D40417-A4D3-4CE8-96E7-708E2439AE7B}"/>
-              </a:ext>
-            </a:extLst>
-          </p:cNvPr>
-          <p:cNvSpPr>
-            <a:spLocks noGrp="1"/>
-          </p:cNvSpPr>
-          <p:nvPr>
-            <p:ph type="title"/>
-          </p:nvPr>
-        </p:nvSpPr>
-        <p:spPr/>
-        <p:txBody>
-          <a:bodyPr/>
-          <a:lstStyle/>
-          <a:p>
-            <a:r>
-              <a:rPr lang="en-US" dirty="0"/>
-              <a:t>About this week (Week 5)</a:t>
-            </a:r>
-            <a:endParaRPr lang="en-GB" dirty="0"/>
-          </a:p>
-        </p:txBody>
-      </p:sp>
-      <p:sp>
-        <p:nvSpPr>
-          <p:cNvPr id="3" name="Content Placeholder 2">
-            <a:extLst>
-              <a:ext uri="{FF2B5EF4-FFF2-40B4-BE49-F238E27FC236}">
-                <a16:creationId xmlns:a16="http://schemas.microsoft.com/office/drawing/2014/main" id="{35995840-A9D9-479A-A34F-EA7DC229D38E}"/>
-              </a:ext>
-            </a:extLst>
-          </p:cNvPr>
-          <p:cNvSpPr>
-            <a:spLocks noGrp="1"/>
-          </p:cNvSpPr>
-          <p:nvPr>
-            <p:ph idx="1"/>
-          </p:nvPr>
-        </p:nvSpPr>
-        <p:spPr>
-          <a:xfrm>
-            <a:off x="838200" y="1825624"/>
-            <a:ext cx="10515600" cy="5032375"/>
-          </a:xfrm>
-        </p:spPr>
-        <p:txBody>
-          <a:bodyPr>
-            <a:normAutofit/>
-          </a:bodyPr>
-          <a:lstStyle/>
-          <a:p>
-            <a:pPr marL="514350" indent="-514350">
-              <a:buFont typeface="+mj-lt"/>
-              <a:buAutoNum type="arabicPeriod"/>
-            </a:pPr>
-            <a:r>
-              <a:rPr lang="en-US" dirty="0"/>
-              <a:t>What is a </a:t>
-            </a:r>
-            <a:r>
-              <a:rPr lang="en-US" b="1" dirty="0"/>
-              <a:t>time</a:t>
-            </a:r>
-            <a:r>
-              <a:rPr lang="en-US" dirty="0"/>
-              <a:t> </a:t>
-            </a:r>
-            <a:r>
-              <a:rPr lang="en-US" b="1" dirty="0"/>
-              <a:t>series</a:t>
-            </a:r>
-            <a:r>
-              <a:rPr lang="en-US" dirty="0"/>
-              <a:t> </a:t>
-            </a:r>
-            <a:r>
-              <a:rPr lang="en-US" b="1" dirty="0"/>
-              <a:t>dataset</a:t>
-            </a:r>
-            <a:r>
-              <a:rPr lang="en-US" dirty="0"/>
-              <a:t>?</a:t>
-            </a:r>
-          </a:p>
-          <a:p>
-            <a:pPr marL="514350" indent="-514350">
-              <a:buFont typeface="+mj-lt"/>
-              <a:buAutoNum type="arabicPeriod"/>
-            </a:pPr>
-            <a:r>
-              <a:rPr lang="en-US" dirty="0"/>
-              <a:t>How to </a:t>
-            </a:r>
-            <a:r>
-              <a:rPr lang="en-US" b="1" dirty="0"/>
-              <a:t>analyze a time series</a:t>
-            </a:r>
-            <a:r>
-              <a:rPr lang="en-US" dirty="0"/>
-              <a:t>, and what are </a:t>
-            </a:r>
-            <a:r>
-              <a:rPr lang="en-US" b="1" dirty="0"/>
-              <a:t>typical deep learning models</a:t>
-            </a:r>
-            <a:r>
-              <a:rPr lang="en-US" dirty="0"/>
-              <a:t> capable of doing that?</a:t>
-            </a:r>
-          </a:p>
-          <a:p>
-            <a:pPr marL="514350" indent="-514350">
-              <a:buFont typeface="+mj-lt"/>
-              <a:buAutoNum type="arabicPeriod"/>
-            </a:pPr>
-            <a:r>
-              <a:rPr lang="en-US" dirty="0"/>
-              <a:t>What is </a:t>
-            </a:r>
-            <a:r>
-              <a:rPr lang="en-US" b="1" dirty="0"/>
-              <a:t>history</a:t>
-            </a:r>
-            <a:r>
-              <a:rPr lang="en-US" dirty="0"/>
-              <a:t>, and why is it needed for time series predictions?</a:t>
-            </a:r>
-          </a:p>
-          <a:p>
-            <a:pPr marL="514350" indent="-514350">
-              <a:buFont typeface="+mj-lt"/>
-              <a:buAutoNum type="arabicPeriod"/>
-            </a:pPr>
-            <a:r>
-              <a:rPr lang="en-US" dirty="0"/>
-              <a:t>What is a </a:t>
-            </a:r>
-            <a:r>
-              <a:rPr lang="en-US" b="1" dirty="0"/>
-              <a:t>good history length</a:t>
-            </a:r>
-            <a:r>
-              <a:rPr lang="en-US" dirty="0"/>
-              <a:t>?</a:t>
-            </a:r>
-          </a:p>
-          <a:p>
-            <a:pPr marL="514350" indent="-514350">
-              <a:buFont typeface="+mj-lt"/>
-              <a:buAutoNum type="arabicPeriod"/>
-            </a:pPr>
-            <a:r>
-              <a:rPr lang="en-US" dirty="0"/>
-              <a:t>What is </a:t>
-            </a:r>
-            <a:r>
-              <a:rPr lang="en-US" b="1" dirty="0"/>
-              <a:t>memory</a:t>
-            </a:r>
-            <a:r>
-              <a:rPr lang="en-US" dirty="0"/>
-              <a:t> and how to represent it in a Neural Network model?</a:t>
-            </a:r>
-          </a:p>
-          <a:p>
-            <a:pPr marL="514350" indent="-514350">
-              <a:buFont typeface="+mj-lt"/>
-              <a:buAutoNum type="arabicPeriod"/>
-            </a:pPr>
-            <a:r>
-              <a:rPr lang="en-US" dirty="0"/>
-              <a:t>How to implement a first </a:t>
-            </a:r>
-            <a:r>
-              <a:rPr lang="en-US" b="1" dirty="0"/>
-              <a:t>vanilla Recurrent Neural Network </a:t>
-            </a:r>
-            <a:r>
-              <a:rPr lang="en-US" dirty="0"/>
-              <a:t>model?</a:t>
-            </a:r>
-          </a:p>
-          <a:p>
-            <a:pPr marL="514350" indent="-514350">
-              <a:buFont typeface="+mj-lt"/>
-              <a:buAutoNum type="arabicPeriod"/>
-            </a:pPr>
-            <a:r>
-              <a:rPr lang="en-US" dirty="0"/>
-              <a:t>Why is the </a:t>
-            </a:r>
-            <a:r>
-              <a:rPr lang="en-US" b="1" dirty="0"/>
-              <a:t>vanishing gradient problem </a:t>
-            </a:r>
-            <a:r>
-              <a:rPr lang="en-US" dirty="0"/>
-              <a:t>prominent in RNNs?</a:t>
-            </a:r>
-            <a:endParaRPr lang="en-GB" dirty="0"/>
-          </a:p>
-        </p:txBody>
-      </p:sp>
-    </p:spTree>
-    <p:extLst>
-      <p:ext uri="{BB962C8B-B14F-4D97-AF65-F5344CB8AC3E}">
-        <p14:creationId xmlns:p14="http://schemas.microsoft.com/office/powerpoint/2010/main" val="3442501962"/>
-      </p:ext>
-    </p:extLst>
-  </p:cSld>
-  <p:clrMapOvr>
-    <a:masterClrMapping/>
-  </p:clrMapOvr>
-</p:sld>
-</file>
-
-<file path=ppt/slides/slide20.xml><?xml version="1.0" encoding="utf-8"?>
+<file path=ppt/slides/slide21.xml><?xml version="1.0" encoding="utf-8"?>
 <p:sld xmlns:a="http://schemas.openxmlformats.org/drawingml/2006/main" xmlns:r="http://schemas.openxmlformats.org/officeDocument/2006/relationships" xmlns:p="http://schemas.openxmlformats.org/presentationml/2006/main">
   <p:cSld>
     <p:spTree>
@@ -11455,7 +9072,7 @@
 </p:sld>
 </file>
 
-<file path=ppt/slides/slide21.xml><?xml version="1.0" encoding="utf-8"?>
+<file path=ppt/slides/slide22.xml><?xml version="1.0" encoding="utf-8"?>
 <p:sld xmlns:a="http://schemas.openxmlformats.org/drawingml/2006/main" xmlns:r="http://schemas.openxmlformats.org/officeDocument/2006/relationships" xmlns:p="http://schemas.openxmlformats.org/presentationml/2006/main">
   <p:cSld>
     <p:spTree>
@@ -11807,7 +9424,7 @@
 </p:sld>
 </file>
 
-<file path=ppt/slides/slide22.xml><?xml version="1.0" encoding="utf-8"?>
+<file path=ppt/slides/slide23.xml><?xml version="1.0" encoding="utf-8"?>
 <p:sld xmlns:a="http://schemas.openxmlformats.org/drawingml/2006/main" xmlns:r="http://schemas.openxmlformats.org/officeDocument/2006/relationships" xmlns:p="http://schemas.openxmlformats.org/presentationml/2006/main">
   <p:cSld>
     <p:spTree>
@@ -12019,7 +9636,7 @@
 </p:sld>
 </file>
 
-<file path=ppt/slides/slide23.xml><?xml version="1.0" encoding="utf-8"?>
+<file path=ppt/slides/slide24.xml><?xml version="1.0" encoding="utf-8"?>
 <p:sld xmlns:a="http://schemas.openxmlformats.org/drawingml/2006/main" xmlns:r="http://schemas.openxmlformats.org/officeDocument/2006/relationships" xmlns:p="http://schemas.openxmlformats.org/presentationml/2006/main">
   <p:cSld>
     <p:spTree>
@@ -12448,7 +10065,7 @@
 </p:sld>
 </file>
 
-<file path=ppt/slides/slide24.xml><?xml version="1.0" encoding="utf-8"?>
+<file path=ppt/slides/slide25.xml><?xml version="1.0" encoding="utf-8"?>
 <p:sld xmlns:a="http://schemas.openxmlformats.org/drawingml/2006/main" xmlns:r="http://schemas.openxmlformats.org/officeDocument/2006/relationships" xmlns:p="http://schemas.openxmlformats.org/presentationml/2006/main">
   <p:cSld>
     <p:spTree>
@@ -12567,7 +10184,7 @@
 </p:sld>
 </file>
 
-<file path=ppt/slides/slide25.xml><?xml version="1.0" encoding="utf-8"?>
+<file path=ppt/slides/slide26.xml><?xml version="1.0" encoding="utf-8"?>
 <p:sld xmlns:a="http://schemas.openxmlformats.org/drawingml/2006/main" xmlns:r="http://schemas.openxmlformats.org/officeDocument/2006/relationships" xmlns:p="http://schemas.openxmlformats.org/presentationml/2006/main">
   <p:cSld>
     <p:spTree>
@@ -13026,7 +10643,7 @@
 </p:sld>
 </file>
 
-<file path=ppt/slides/slide26.xml><?xml version="1.0" encoding="utf-8"?>
+<file path=ppt/slides/slide27.xml><?xml version="1.0" encoding="utf-8"?>
 <p:sld xmlns:a="http://schemas.openxmlformats.org/drawingml/2006/main" xmlns:r="http://schemas.openxmlformats.org/officeDocument/2006/relationships" xmlns:p="http://schemas.openxmlformats.org/presentationml/2006/main">
   <p:cSld>
     <p:spTree>
@@ -13574,7 +11191,7 @@
 </p:sld>
 </file>
 
-<file path=ppt/slides/slide27.xml><?xml version="1.0" encoding="utf-8"?>
+<file path=ppt/slides/slide28.xml><?xml version="1.0" encoding="utf-8"?>
 <p:sld xmlns:a="http://schemas.openxmlformats.org/drawingml/2006/main" xmlns:r="http://schemas.openxmlformats.org/officeDocument/2006/relationships" xmlns:p="http://schemas.openxmlformats.org/presentationml/2006/main">
   <p:cSld>
     <p:spTree>
@@ -14095,7 +11712,7 @@
 </p:sld>
 </file>
 
-<file path=ppt/slides/slide28.xml><?xml version="1.0" encoding="utf-8"?>
+<file path=ppt/slides/slide29.xml><?xml version="1.0" encoding="utf-8"?>
 <p:sld xmlns:a="http://schemas.openxmlformats.org/drawingml/2006/main" xmlns:r="http://schemas.openxmlformats.org/officeDocument/2006/relationships" xmlns:p="http://schemas.openxmlformats.org/presentationml/2006/main">
   <p:cSld>
     <p:spTree>
@@ -14822,159 +12439,6 @@
     <p:extLst>
       <p:ext uri="{BB962C8B-B14F-4D97-AF65-F5344CB8AC3E}">
         <p14:creationId xmlns:p14="http://schemas.microsoft.com/office/powerpoint/2010/main" val="2755235485"/>
-      </p:ext>
-    </p:extLst>
-  </p:cSld>
-  <p:clrMapOvr>
-    <a:masterClrMapping/>
-  </p:clrMapOvr>
-</p:sld>
-</file>
-
-<file path=ppt/slides/slide29.xml><?xml version="1.0" encoding="utf-8"?>
-<p:sld xmlns:a="http://schemas.openxmlformats.org/drawingml/2006/main" xmlns:r="http://schemas.openxmlformats.org/officeDocument/2006/relationships" xmlns:p="http://schemas.openxmlformats.org/presentationml/2006/main">
-  <p:cSld>
-    <p:spTree>
-      <p:nvGrpSpPr>
-        <p:cNvPr id="1" name=""/>
-        <p:cNvGrpSpPr/>
-        <p:nvPr/>
-      </p:nvGrpSpPr>
-      <p:grpSpPr>
-        <a:xfrm>
-          <a:off x="0" y="0"/>
-          <a:ext cx="0" cy="0"/>
-          <a:chOff x="0" y="0"/>
-          <a:chExt cx="0" cy="0"/>
-        </a:xfrm>
-      </p:grpSpPr>
-      <p:sp>
-        <p:nvSpPr>
-          <p:cNvPr id="2" name="Title 1">
-            <a:extLst>
-              <a:ext uri="{FF2B5EF4-FFF2-40B4-BE49-F238E27FC236}">
-                <a16:creationId xmlns:a16="http://schemas.microsoft.com/office/drawing/2014/main" id="{53C1FADA-A607-AC57-2747-033B87B9B376}"/>
-              </a:ext>
-            </a:extLst>
-          </p:cNvPr>
-          <p:cNvSpPr>
-            <a:spLocks noGrp="1"/>
-          </p:cNvSpPr>
-          <p:nvPr>
-            <p:ph type="title"/>
-          </p:nvPr>
-        </p:nvSpPr>
-        <p:spPr/>
-        <p:txBody>
-          <a:bodyPr/>
-          <a:lstStyle/>
-          <a:p>
-            <a:r>
-              <a:rPr lang="en-GB" dirty="0"/>
-              <a:t>The problem of varying length</a:t>
-            </a:r>
-            <a:endParaRPr lang="en-SG" dirty="0"/>
-          </a:p>
-        </p:txBody>
-      </p:sp>
-      <p:sp>
-        <p:nvSpPr>
-          <p:cNvPr id="3" name="Content Placeholder 2">
-            <a:extLst>
-              <a:ext uri="{FF2B5EF4-FFF2-40B4-BE49-F238E27FC236}">
-                <a16:creationId xmlns:a16="http://schemas.microsoft.com/office/drawing/2014/main" id="{8EBF6E0C-044D-8EFD-D82D-C462D1332AE5}"/>
-              </a:ext>
-            </a:extLst>
-          </p:cNvPr>
-          <p:cNvSpPr>
-            <a:spLocks noGrp="1"/>
-          </p:cNvSpPr>
-          <p:nvPr>
-            <p:ph idx="1"/>
-          </p:nvPr>
-        </p:nvSpPr>
-        <p:spPr>
-          <a:xfrm>
-            <a:off x="838200" y="1825624"/>
-            <a:ext cx="10515600" cy="5032375"/>
-          </a:xfrm>
-        </p:spPr>
-        <p:txBody>
-          <a:bodyPr>
-            <a:normAutofit/>
-          </a:bodyPr>
-          <a:lstStyle/>
-          <a:p>
-            <a:pPr marL="0" indent="0">
-              <a:buNone/>
-            </a:pPr>
-            <a:r>
-              <a:rPr lang="en-GB" b="1" dirty="0"/>
-              <a:t>Problem: </a:t>
-            </a:r>
-            <a:r>
-              <a:rPr lang="en-GB" dirty="0"/>
-              <a:t>Variable history length cannot work with our current neural network because </a:t>
-            </a:r>
-            <a:r>
-              <a:rPr lang="en-GB" b="1" dirty="0"/>
-              <a:t>it</a:t>
-            </a:r>
-            <a:r>
-              <a:rPr lang="en-GB" dirty="0"/>
-              <a:t> </a:t>
-            </a:r>
-            <a:r>
-              <a:rPr lang="en-GB" b="1" dirty="0"/>
-              <a:t>requires fixed-length input sequences</a:t>
-            </a:r>
-            <a:r>
-              <a:rPr lang="en-GB" dirty="0"/>
-              <a:t>.</a:t>
-            </a:r>
-          </a:p>
-          <a:p>
-            <a:pPr marL="0" indent="0">
-              <a:buNone/>
-            </a:pPr>
-            <a:endParaRPr lang="en-SG" dirty="0"/>
-          </a:p>
-        </p:txBody>
-      </p:sp>
-      <p:pic>
-        <p:nvPicPr>
-          <p:cNvPr id="5" name="Picture 4">
-            <a:extLst>
-              <a:ext uri="{FF2B5EF4-FFF2-40B4-BE49-F238E27FC236}">
-                <a16:creationId xmlns:a16="http://schemas.microsoft.com/office/drawing/2014/main" id="{FF2FBCA8-55AF-AA7F-47FF-79896BF4CD39}"/>
-              </a:ext>
-            </a:extLst>
-          </p:cNvPr>
-          <p:cNvPicPr>
-            <a:picLocks noChangeAspect="1"/>
-          </p:cNvPicPr>
-          <p:nvPr/>
-        </p:nvPicPr>
-        <p:blipFill>
-          <a:blip r:embed="rId2"/>
-          <a:stretch>
-            <a:fillRect/>
-          </a:stretch>
-        </p:blipFill>
-        <p:spPr>
-          <a:xfrm>
-            <a:off x="1966336" y="2944604"/>
-            <a:ext cx="8259328" cy="3629532"/>
-          </a:xfrm>
-          <a:prstGeom prst="rect">
-            <a:avLst/>
-          </a:prstGeom>
-        </p:spPr>
-      </p:pic>
-    </p:spTree>
-    <p:extLst>
-      <p:ext uri="{BB962C8B-B14F-4D97-AF65-F5344CB8AC3E}">
-        <p14:creationId xmlns:p14="http://schemas.microsoft.com/office/powerpoint/2010/main" val="3821622736"/>
       </p:ext>
     </p:extLst>
   </p:cSld>
@@ -15289,465 +12753,104 @@
           </a:p>
         </p:txBody>
       </p:sp>
-      <mc:AlternateContent xmlns:mc="http://schemas.openxmlformats.org/markup-compatibility/2006" xmlns:a14="http://schemas.microsoft.com/office/drawing/2010/main">
-        <mc:Choice Requires="a14">
-          <p:sp>
-            <p:nvSpPr>
-              <p:cNvPr id="3" name="Content Placeholder 2">
-                <a:extLst>
-                  <a:ext uri="{FF2B5EF4-FFF2-40B4-BE49-F238E27FC236}">
-                    <a16:creationId xmlns:a16="http://schemas.microsoft.com/office/drawing/2014/main" id="{8EBF6E0C-044D-8EFD-D82D-C462D1332AE5}"/>
-                  </a:ext>
-                </a:extLst>
-              </p:cNvPr>
-              <p:cNvSpPr>
-                <a:spLocks noGrp="1"/>
-              </p:cNvSpPr>
-              <p:nvPr>
-                <p:ph idx="1"/>
-              </p:nvPr>
-            </p:nvSpPr>
-            <p:spPr>
-              <a:xfrm>
-                <a:off x="838200" y="1825624"/>
-                <a:ext cx="10515600" cy="5032375"/>
-              </a:xfrm>
-            </p:spPr>
-            <p:txBody>
-              <a:bodyPr>
-                <a:normAutofit/>
-              </a:bodyPr>
-              <a:lstStyle/>
-              <a:p>
-                <a:pPr marL="0" indent="0">
-                  <a:buNone/>
-                </a:pPr>
-                <a:r>
-                  <a:rPr lang="en-GB" b="1" dirty="0"/>
-                  <a:t>Problem: </a:t>
-                </a:r>
-                <a:r>
-                  <a:rPr lang="en-GB" dirty="0"/>
-                  <a:t>Variable history length cannot work with our current neural network because </a:t>
-                </a:r>
-                <a:r>
-                  <a:rPr lang="en-GB" b="1" dirty="0"/>
-                  <a:t>it</a:t>
-                </a:r>
-                <a:r>
-                  <a:rPr lang="en-GB" dirty="0"/>
-                  <a:t> </a:t>
-                </a:r>
-                <a:r>
-                  <a:rPr lang="en-GB" b="1" dirty="0"/>
-                  <a:t>requires fixed-length input sequences</a:t>
-                </a:r>
-                <a:r>
-                  <a:rPr lang="en-GB" dirty="0"/>
-                  <a:t>.</a:t>
-                </a:r>
-              </a:p>
-              <a:p>
-                <a:pPr marL="0" indent="0">
-                  <a:buNone/>
-                </a:pPr>
-                <a:r>
-                  <a:rPr lang="en-GB" b="1" dirty="0"/>
-                  <a:t>A quick fix would be to assume a fixed length </a:t>
-                </a:r>
-                <a14:m>
-                  <m:oMath xmlns:m="http://schemas.openxmlformats.org/officeDocument/2006/math">
-                    <m:r>
-                      <a:rPr lang="en-GB" b="1" i="1" dirty="0" smtClean="0">
-                        <a:latin typeface="Cambria Math" panose="02040503050406030204" pitchFamily="18" charset="0"/>
-                      </a:rPr>
-                      <m:t>𝒍</m:t>
-                    </m:r>
-                  </m:oMath>
-                </a14:m>
-                <a:r>
-                  <a:rPr lang="en-GB" b="1" dirty="0"/>
-                  <a:t> for the history vector </a:t>
-                </a:r>
-                <a14:m>
-                  <m:oMath xmlns:m="http://schemas.openxmlformats.org/officeDocument/2006/math">
-                    <m:sSub>
-                      <m:sSubPr>
-                        <m:ctrlPr>
-                          <a:rPr lang="en-GB" b="1" i="1" dirty="0" smtClean="0">
-                            <a:latin typeface="Cambria Math" panose="02040503050406030204" pitchFamily="18" charset="0"/>
-                          </a:rPr>
-                        </m:ctrlPr>
-                      </m:sSubPr>
-                      <m:e>
-                        <m:r>
-                          <a:rPr lang="en-GB" b="1" i="1" dirty="0" smtClean="0">
-                            <a:latin typeface="Cambria Math" panose="02040503050406030204" pitchFamily="18" charset="0"/>
-                          </a:rPr>
-                          <m:t>𝒉</m:t>
-                        </m:r>
-                      </m:e>
-                      <m:sub>
-                        <m:r>
-                          <a:rPr lang="en-GB" b="1" i="1" dirty="0" smtClean="0">
-                            <a:latin typeface="Cambria Math" panose="02040503050406030204" pitchFamily="18" charset="0"/>
-                          </a:rPr>
-                          <m:t>𝒕</m:t>
-                        </m:r>
-                      </m:sub>
-                    </m:sSub>
-                    <m:r>
-                      <a:rPr lang="en-GB" b="1" i="1" dirty="0">
-                        <a:latin typeface="Cambria Math" panose="02040503050406030204" pitchFamily="18" charset="0"/>
-                      </a:rPr>
-                      <m:t> </m:t>
-                    </m:r>
-                  </m:oMath>
-                </a14:m>
-                <a:r>
-                  <a:rPr lang="en-GB" b="1" dirty="0"/>
-                  <a:t>to be used at all times:</a:t>
-                </a:r>
-              </a:p>
-              <a:p>
-                <a:r>
-                  <a:rPr lang="en-GB" dirty="0"/>
-                  <a:t>We could </a:t>
-                </a:r>
-                <a:r>
-                  <a:rPr lang="en-GB" b="1" dirty="0"/>
-                  <a:t>truncate</a:t>
-                </a:r>
-                <a:r>
-                  <a:rPr lang="en-GB" dirty="0"/>
-                  <a:t> the history vectors that have a length greater than </a:t>
-                </a:r>
-                <a14:m>
-                  <m:oMath xmlns:m="http://schemas.openxmlformats.org/officeDocument/2006/math">
-                    <m:r>
-                      <a:rPr lang="en-GB" i="1" dirty="0" smtClean="0">
-                        <a:latin typeface="Cambria Math" panose="02040503050406030204" pitchFamily="18" charset="0"/>
-                      </a:rPr>
-                      <m:t>𝑙</m:t>
-                    </m:r>
-                  </m:oMath>
-                </a14:m>
-                <a:r>
-                  <a:rPr lang="en-GB" dirty="0"/>
-                  <a:t>, keeping the last elements only, i.e. </a:t>
-                </a:r>
-                <a14:m>
-                  <m:oMath xmlns:m="http://schemas.openxmlformats.org/officeDocument/2006/math">
-                    <m:sSub>
-                      <m:sSubPr>
-                        <m:ctrlPr>
-                          <a:rPr lang="en-GB" b="0" i="1" smtClean="0">
-                            <a:latin typeface="Cambria Math" panose="02040503050406030204" pitchFamily="18" charset="0"/>
-                          </a:rPr>
-                        </m:ctrlPr>
-                      </m:sSubPr>
-                      <m:e>
-                        <m:r>
-                          <a:rPr lang="en-GB" b="0" i="1" smtClean="0">
-                            <a:latin typeface="Cambria Math" panose="02040503050406030204" pitchFamily="18" charset="0"/>
-                          </a:rPr>
-                          <m:t>h</m:t>
-                        </m:r>
-                      </m:e>
-                      <m:sub>
-                        <m:r>
-                          <a:rPr lang="en-GB" b="0" i="1" smtClean="0">
-                            <a:latin typeface="Cambria Math" panose="02040503050406030204" pitchFamily="18" charset="0"/>
-                          </a:rPr>
-                          <m:t>𝑡</m:t>
-                        </m:r>
-                      </m:sub>
-                    </m:sSub>
-                    <m:r>
-                      <a:rPr lang="en-GB" b="0" i="1" smtClean="0">
-                        <a:latin typeface="Cambria Math" panose="02040503050406030204" pitchFamily="18" charset="0"/>
-                      </a:rPr>
-                      <m:t>=(</m:t>
-                    </m:r>
-                    <m:sSub>
-                      <m:sSubPr>
-                        <m:ctrlPr>
-                          <a:rPr lang="en-GB" b="0" i="1" smtClean="0">
-                            <a:latin typeface="Cambria Math" panose="02040503050406030204" pitchFamily="18" charset="0"/>
-                          </a:rPr>
-                        </m:ctrlPr>
-                      </m:sSubPr>
-                      <m:e>
-                        <m:r>
-                          <a:rPr lang="en-GB" b="0" i="1" smtClean="0">
-                            <a:latin typeface="Cambria Math" panose="02040503050406030204" pitchFamily="18" charset="0"/>
-                          </a:rPr>
-                          <m:t>𝑥</m:t>
-                        </m:r>
-                      </m:e>
-                      <m:sub>
-                        <m:r>
-                          <a:rPr lang="en-GB" b="0" i="1" smtClean="0">
-                            <a:latin typeface="Cambria Math" panose="02040503050406030204" pitchFamily="18" charset="0"/>
-                          </a:rPr>
-                          <m:t>𝑡</m:t>
-                        </m:r>
-                        <m:r>
-                          <a:rPr lang="en-GB" b="0" i="1" smtClean="0">
-                            <a:latin typeface="Cambria Math" panose="02040503050406030204" pitchFamily="18" charset="0"/>
-                          </a:rPr>
-                          <m:t>−</m:t>
-                        </m:r>
-                        <m:r>
-                          <a:rPr lang="en-GB" b="0" i="1" smtClean="0">
-                            <a:latin typeface="Cambria Math" panose="02040503050406030204" pitchFamily="18" charset="0"/>
-                          </a:rPr>
-                          <m:t>𝑙</m:t>
-                        </m:r>
-                      </m:sub>
-                    </m:sSub>
-                    <m:r>
-                      <a:rPr lang="en-GB" b="0" i="1" smtClean="0">
-                        <a:latin typeface="Cambria Math" panose="02040503050406030204" pitchFamily="18" charset="0"/>
-                      </a:rPr>
-                      <m:t>,…,</m:t>
-                    </m:r>
-                    <m:sSub>
-                      <m:sSubPr>
-                        <m:ctrlPr>
-                          <a:rPr lang="en-GB" b="0" i="1" smtClean="0">
-                            <a:latin typeface="Cambria Math" panose="02040503050406030204" pitchFamily="18" charset="0"/>
-                          </a:rPr>
-                        </m:ctrlPr>
-                      </m:sSubPr>
-                      <m:e>
-                        <m:r>
-                          <a:rPr lang="en-GB" b="0" i="1" smtClean="0">
-                            <a:latin typeface="Cambria Math" panose="02040503050406030204" pitchFamily="18" charset="0"/>
-                          </a:rPr>
-                          <m:t>𝑥</m:t>
-                        </m:r>
-                      </m:e>
-                      <m:sub>
-                        <m:r>
-                          <a:rPr lang="en-GB" b="0" i="1" smtClean="0">
-                            <a:latin typeface="Cambria Math" panose="02040503050406030204" pitchFamily="18" charset="0"/>
-                          </a:rPr>
-                          <m:t>𝑡</m:t>
-                        </m:r>
-                        <m:r>
-                          <a:rPr lang="en-GB" b="0" i="1" smtClean="0">
-                            <a:latin typeface="Cambria Math" panose="02040503050406030204" pitchFamily="18" charset="0"/>
-                          </a:rPr>
-                          <m:t>−1</m:t>
-                        </m:r>
-                      </m:sub>
-                    </m:sSub>
-                    <m:r>
-                      <a:rPr lang="en-GB" b="0" i="1" smtClean="0">
-                        <a:latin typeface="Cambria Math" panose="02040503050406030204" pitchFamily="18" charset="0"/>
-                      </a:rPr>
-                      <m:t>)</m:t>
-                    </m:r>
-                  </m:oMath>
-                </a14:m>
-                <a:r>
-                  <a:rPr lang="en-GB" dirty="0"/>
-                  <a:t>.</a:t>
-                </a:r>
-              </a:p>
-              <a:p>
-                <a:r>
-                  <a:rPr lang="en-GB" dirty="0"/>
-                  <a:t>If too short, we could use </a:t>
-                </a:r>
-                <a:r>
-                  <a:rPr lang="en-GB" b="1" dirty="0"/>
-                  <a:t>padding</a:t>
-                </a:r>
-                <a:r>
-                  <a:rPr lang="en-GB" dirty="0"/>
-                  <a:t> for the history vectors that have a lower length than </a:t>
-                </a:r>
-                <a14:m>
-                  <m:oMath xmlns:m="http://schemas.openxmlformats.org/officeDocument/2006/math">
-                    <m:r>
-                      <a:rPr lang="en-GB" i="1" dirty="0" smtClean="0">
-                        <a:latin typeface="Cambria Math" panose="02040503050406030204" pitchFamily="18" charset="0"/>
-                      </a:rPr>
-                      <m:t>𝑙</m:t>
-                    </m:r>
-                  </m:oMath>
-                </a14:m>
-                <a:r>
-                  <a:rPr lang="en-GB" dirty="0"/>
-                  <a:t>, adding zeros to artificially increase their length. For instance, after padding, we could have </a:t>
-                </a:r>
-                <a14:m>
-                  <m:oMath xmlns:m="http://schemas.openxmlformats.org/officeDocument/2006/math">
-                    <m:sSub>
-                      <m:sSubPr>
-                        <m:ctrlPr>
-                          <a:rPr lang="en-GB" i="1">
-                            <a:latin typeface="Cambria Math" panose="02040503050406030204" pitchFamily="18" charset="0"/>
-                          </a:rPr>
-                        </m:ctrlPr>
-                      </m:sSubPr>
-                      <m:e>
-                        <m:r>
-                          <a:rPr lang="en-GB" i="1">
-                            <a:latin typeface="Cambria Math" panose="02040503050406030204" pitchFamily="18" charset="0"/>
-                          </a:rPr>
-                          <m:t>h</m:t>
-                        </m:r>
-                      </m:e>
-                      <m:sub>
-                        <m:r>
-                          <a:rPr lang="en-GB" i="1">
-                            <a:latin typeface="Cambria Math" panose="02040503050406030204" pitchFamily="18" charset="0"/>
-                          </a:rPr>
-                          <m:t>3</m:t>
-                        </m:r>
-                      </m:sub>
-                    </m:sSub>
-                    <m:r>
-                      <a:rPr lang="en-GB">
-                        <a:latin typeface="Cambria Math" panose="02040503050406030204" pitchFamily="18" charset="0"/>
-                      </a:rPr>
-                      <m:t>=</m:t>
-                    </m:r>
-                    <m:r>
-                      <a:rPr lang="en-GB" i="1">
-                        <a:latin typeface="Cambria Math" panose="02040503050406030204" pitchFamily="18" charset="0"/>
-                      </a:rPr>
-                      <m:t>(</m:t>
-                    </m:r>
-                    <m:r>
-                      <a:rPr lang="en-GB" b="0" i="1" smtClean="0">
-                        <a:latin typeface="Cambria Math" panose="02040503050406030204" pitchFamily="18" charset="0"/>
-                      </a:rPr>
-                      <m:t>0, …, 0, </m:t>
-                    </m:r>
-                    <m:sSub>
-                      <m:sSubPr>
-                        <m:ctrlPr>
-                          <a:rPr lang="en-GB" i="1">
-                            <a:latin typeface="Cambria Math" panose="02040503050406030204" pitchFamily="18" charset="0"/>
-                          </a:rPr>
-                        </m:ctrlPr>
-                      </m:sSubPr>
-                      <m:e>
-                        <m:r>
-                          <a:rPr lang="en-GB" i="1">
-                            <a:latin typeface="Cambria Math" panose="02040503050406030204" pitchFamily="18" charset="0"/>
-                          </a:rPr>
-                          <m:t>𝑥</m:t>
-                        </m:r>
-                      </m:e>
-                      <m:sub>
-                        <m:r>
-                          <a:rPr lang="en-GB" i="1">
-                            <a:latin typeface="Cambria Math" panose="02040503050406030204" pitchFamily="18" charset="0"/>
-                          </a:rPr>
-                          <m:t>1</m:t>
-                        </m:r>
-                      </m:sub>
-                    </m:sSub>
-                    <m:r>
-                      <a:rPr lang="en-GB" i="1">
-                        <a:latin typeface="Cambria Math" panose="02040503050406030204" pitchFamily="18" charset="0"/>
-                      </a:rPr>
-                      <m:t>, </m:t>
-                    </m:r>
-                    <m:sSub>
-                      <m:sSubPr>
-                        <m:ctrlPr>
-                          <a:rPr lang="en-GB" i="1">
-                            <a:latin typeface="Cambria Math" panose="02040503050406030204" pitchFamily="18" charset="0"/>
-                          </a:rPr>
-                        </m:ctrlPr>
-                      </m:sSubPr>
-                      <m:e>
-                        <m:r>
-                          <a:rPr lang="en-GB" i="1">
-                            <a:latin typeface="Cambria Math" panose="02040503050406030204" pitchFamily="18" charset="0"/>
-                          </a:rPr>
-                          <m:t>𝑥</m:t>
-                        </m:r>
-                      </m:e>
-                      <m:sub>
-                        <m:r>
-                          <a:rPr lang="en-GB" i="1">
-                            <a:latin typeface="Cambria Math" panose="02040503050406030204" pitchFamily="18" charset="0"/>
-                          </a:rPr>
-                          <m:t>2</m:t>
-                        </m:r>
-                      </m:sub>
-                    </m:sSub>
-                    <m:r>
-                      <a:rPr lang="en-GB" i="1">
-                        <a:latin typeface="Cambria Math" panose="02040503050406030204" pitchFamily="18" charset="0"/>
-                      </a:rPr>
-                      <m:t>)</m:t>
-                    </m:r>
-                  </m:oMath>
-                </a14:m>
-                <a:r>
-                  <a:rPr lang="en-GB" dirty="0"/>
-                  <a:t>.</a:t>
-                </a:r>
-              </a:p>
-            </p:txBody>
-          </p:sp>
-        </mc:Choice>
-        <mc:Fallback xmlns="">
-          <p:sp>
-            <p:nvSpPr>
-              <p:cNvPr id="3" name="Content Placeholder 2">
-                <a:extLst>
-                  <a:ext uri="{FF2B5EF4-FFF2-40B4-BE49-F238E27FC236}">
-                    <a16:creationId xmlns:a16="http://schemas.microsoft.com/office/drawing/2014/main" id="{8EBF6E0C-044D-8EFD-D82D-C462D1332AE5}"/>
-                  </a:ext>
-                </a:extLst>
-              </p:cNvPr>
-              <p:cNvSpPr>
-                <a:spLocks noGrp="1" noRot="1" noChangeAspect="1" noMove="1" noResize="1" noEditPoints="1" noAdjustHandles="1" noChangeArrowheads="1" noChangeShapeType="1" noTextEdit="1"/>
-              </p:cNvSpPr>
-              <p:nvPr>
-                <p:ph idx="1"/>
-              </p:nvPr>
-            </p:nvSpPr>
-            <p:spPr>
-              <a:xfrm>
-                <a:off x="838200" y="1825624"/>
-                <a:ext cx="10515600" cy="5032375"/>
-              </a:xfrm>
-              <a:blipFill>
-                <a:blip r:embed="rId2"/>
-                <a:stretch>
-                  <a:fillRect l="-1217" t="-1937" r="-928"/>
-                </a:stretch>
-              </a:blipFill>
-            </p:spPr>
-            <p:txBody>
-              <a:bodyPr/>
-              <a:lstStyle/>
-              <a:p>
-                <a:r>
-                  <a:rPr lang="en-SG">
-                    <a:noFill/>
-                  </a:rPr>
-                  <a:t> </a:t>
-                </a:r>
-              </a:p>
-            </p:txBody>
-          </p:sp>
-        </mc:Fallback>
-      </mc:AlternateContent>
+      <p:sp>
+        <p:nvSpPr>
+          <p:cNvPr id="3" name="Content Placeholder 2">
+            <a:extLst>
+              <a:ext uri="{FF2B5EF4-FFF2-40B4-BE49-F238E27FC236}">
+                <a16:creationId xmlns:a16="http://schemas.microsoft.com/office/drawing/2014/main" id="{8EBF6E0C-044D-8EFD-D82D-C462D1332AE5}"/>
+              </a:ext>
+            </a:extLst>
+          </p:cNvPr>
+          <p:cNvSpPr>
+            <a:spLocks noGrp="1"/>
+          </p:cNvSpPr>
+          <p:nvPr>
+            <p:ph idx="1"/>
+          </p:nvPr>
+        </p:nvSpPr>
+        <p:spPr>
+          <a:xfrm>
+            <a:off x="838200" y="1825624"/>
+            <a:ext cx="10515600" cy="5032375"/>
+          </a:xfrm>
+        </p:spPr>
+        <p:txBody>
+          <a:bodyPr>
+            <a:normAutofit/>
+          </a:bodyPr>
+          <a:lstStyle/>
+          <a:p>
+            <a:pPr marL="0" indent="0">
+              <a:buNone/>
+            </a:pPr>
+            <a:r>
+              <a:rPr lang="en-GB" b="1" dirty="0"/>
+              <a:t>Problem: </a:t>
+            </a:r>
+            <a:r>
+              <a:rPr lang="en-GB" dirty="0"/>
+              <a:t>Variable history length cannot work with our current neural network because </a:t>
+            </a:r>
+            <a:r>
+              <a:rPr lang="en-GB" b="1" dirty="0"/>
+              <a:t>it</a:t>
+            </a:r>
+            <a:r>
+              <a:rPr lang="en-GB" dirty="0"/>
+              <a:t> </a:t>
+            </a:r>
+            <a:r>
+              <a:rPr lang="en-GB" b="1" dirty="0"/>
+              <a:t>requires fixed-length input sequences</a:t>
+            </a:r>
+            <a:r>
+              <a:rPr lang="en-GB" dirty="0"/>
+              <a:t>.</a:t>
+            </a:r>
+          </a:p>
+          <a:p>
+            <a:pPr marL="0" indent="0">
+              <a:buNone/>
+            </a:pPr>
+            <a:endParaRPr lang="en-SG" dirty="0"/>
+          </a:p>
+        </p:txBody>
+      </p:sp>
+      <p:pic>
+        <p:nvPicPr>
+          <p:cNvPr id="5" name="Picture 4">
+            <a:extLst>
+              <a:ext uri="{FF2B5EF4-FFF2-40B4-BE49-F238E27FC236}">
+                <a16:creationId xmlns:a16="http://schemas.microsoft.com/office/drawing/2014/main" id="{FF2FBCA8-55AF-AA7F-47FF-79896BF4CD39}"/>
+              </a:ext>
+            </a:extLst>
+          </p:cNvPr>
+          <p:cNvPicPr>
+            <a:picLocks noChangeAspect="1"/>
+          </p:cNvPicPr>
+          <p:nvPr/>
+        </p:nvPicPr>
+        <p:blipFill>
+          <a:blip r:embed="rId2"/>
+          <a:stretch>
+            <a:fillRect/>
+          </a:stretch>
+        </p:blipFill>
+        <p:spPr>
+          <a:xfrm>
+            <a:off x="1966336" y="2944604"/>
+            <a:ext cx="8259328" cy="3629532"/>
+          </a:xfrm>
+          <a:prstGeom prst="rect">
+            <a:avLst/>
+          </a:prstGeom>
+        </p:spPr>
+      </p:pic>
     </p:spTree>
     <p:extLst>
       <p:ext uri="{BB962C8B-B14F-4D97-AF65-F5344CB8AC3E}">
-        <p14:creationId xmlns:p14="http://schemas.microsoft.com/office/powerpoint/2010/main" val="1343460073"/>
+        <p14:creationId xmlns:p14="http://schemas.microsoft.com/office/powerpoint/2010/main" val="3821622736"/>
       </p:ext>
     </p:extLst>
   </p:cSld>
@@ -16211,6 +13314,520 @@
                   <a:t>.</a:t>
                 </a:r>
               </a:p>
+            </p:txBody>
+          </p:sp>
+        </mc:Choice>
+        <mc:Fallback xmlns="">
+          <p:sp>
+            <p:nvSpPr>
+              <p:cNvPr id="3" name="Content Placeholder 2">
+                <a:extLst>
+                  <a:ext uri="{FF2B5EF4-FFF2-40B4-BE49-F238E27FC236}">
+                    <a16:creationId xmlns:a16="http://schemas.microsoft.com/office/drawing/2014/main" id="{8EBF6E0C-044D-8EFD-D82D-C462D1332AE5}"/>
+                  </a:ext>
+                </a:extLst>
+              </p:cNvPr>
+              <p:cNvSpPr>
+                <a:spLocks noGrp="1" noRot="1" noChangeAspect="1" noMove="1" noResize="1" noEditPoints="1" noAdjustHandles="1" noChangeArrowheads="1" noChangeShapeType="1" noTextEdit="1"/>
+              </p:cNvSpPr>
+              <p:nvPr>
+                <p:ph idx="1"/>
+              </p:nvPr>
+            </p:nvSpPr>
+            <p:spPr>
+              <a:xfrm>
+                <a:off x="838200" y="1825624"/>
+                <a:ext cx="10515600" cy="5032375"/>
+              </a:xfrm>
+              <a:blipFill>
+                <a:blip r:embed="rId2"/>
+                <a:stretch>
+                  <a:fillRect l="-1217" t="-1937" r="-928"/>
+                </a:stretch>
+              </a:blipFill>
+            </p:spPr>
+            <p:txBody>
+              <a:bodyPr/>
+              <a:lstStyle/>
+              <a:p>
+                <a:r>
+                  <a:rPr lang="en-SG">
+                    <a:noFill/>
+                  </a:rPr>
+                  <a:t> </a:t>
+                </a:r>
+              </a:p>
+            </p:txBody>
+          </p:sp>
+        </mc:Fallback>
+      </mc:AlternateContent>
+    </p:spTree>
+    <p:extLst>
+      <p:ext uri="{BB962C8B-B14F-4D97-AF65-F5344CB8AC3E}">
+        <p14:creationId xmlns:p14="http://schemas.microsoft.com/office/powerpoint/2010/main" val="1343460073"/>
+      </p:ext>
+    </p:extLst>
+  </p:cSld>
+  <p:clrMapOvr>
+    <a:masterClrMapping/>
+  </p:clrMapOvr>
+</p:sld>
+</file>
+
+<file path=ppt/slides/slide32.xml><?xml version="1.0" encoding="utf-8"?>
+<p:sld xmlns:a="http://schemas.openxmlformats.org/drawingml/2006/main" xmlns:r="http://schemas.openxmlformats.org/officeDocument/2006/relationships" xmlns:p="http://schemas.openxmlformats.org/presentationml/2006/main">
+  <p:cSld>
+    <p:spTree>
+      <p:nvGrpSpPr>
+        <p:cNvPr id="1" name=""/>
+        <p:cNvGrpSpPr/>
+        <p:nvPr/>
+      </p:nvGrpSpPr>
+      <p:grpSpPr>
+        <a:xfrm>
+          <a:off x="0" y="0"/>
+          <a:ext cx="0" cy="0"/>
+          <a:chOff x="0" y="0"/>
+          <a:chExt cx="0" cy="0"/>
+        </a:xfrm>
+      </p:grpSpPr>
+      <p:sp>
+        <p:nvSpPr>
+          <p:cNvPr id="2" name="Title 1">
+            <a:extLst>
+              <a:ext uri="{FF2B5EF4-FFF2-40B4-BE49-F238E27FC236}">
+                <a16:creationId xmlns:a16="http://schemas.microsoft.com/office/drawing/2014/main" id="{53C1FADA-A607-AC57-2747-033B87B9B376}"/>
+              </a:ext>
+            </a:extLst>
+          </p:cNvPr>
+          <p:cNvSpPr>
+            <a:spLocks noGrp="1"/>
+          </p:cNvSpPr>
+          <p:nvPr>
+            <p:ph type="title"/>
+          </p:nvPr>
+        </p:nvSpPr>
+        <p:spPr/>
+        <p:txBody>
+          <a:bodyPr/>
+          <a:lstStyle/>
+          <a:p>
+            <a:r>
+              <a:rPr lang="en-GB" dirty="0"/>
+              <a:t>The problem of varying length</a:t>
+            </a:r>
+            <a:endParaRPr lang="en-SG" dirty="0"/>
+          </a:p>
+        </p:txBody>
+      </p:sp>
+      <mc:AlternateContent xmlns:mc="http://schemas.openxmlformats.org/markup-compatibility/2006" xmlns:a14="http://schemas.microsoft.com/office/drawing/2010/main">
+        <mc:Choice Requires="a14">
+          <p:sp>
+            <p:nvSpPr>
+              <p:cNvPr id="3" name="Content Placeholder 2">
+                <a:extLst>
+                  <a:ext uri="{FF2B5EF4-FFF2-40B4-BE49-F238E27FC236}">
+                    <a16:creationId xmlns:a16="http://schemas.microsoft.com/office/drawing/2014/main" id="{8EBF6E0C-044D-8EFD-D82D-C462D1332AE5}"/>
+                  </a:ext>
+                </a:extLst>
+              </p:cNvPr>
+              <p:cNvSpPr>
+                <a:spLocks noGrp="1"/>
+              </p:cNvSpPr>
+              <p:nvPr>
+                <p:ph idx="1"/>
+              </p:nvPr>
+            </p:nvSpPr>
+            <p:spPr>
+              <a:xfrm>
+                <a:off x="838200" y="1825624"/>
+                <a:ext cx="10515600" cy="5032375"/>
+              </a:xfrm>
+            </p:spPr>
+            <p:txBody>
+              <a:bodyPr>
+                <a:normAutofit/>
+              </a:bodyPr>
+              <a:lstStyle/>
+              <a:p>
+                <a:pPr marL="0" indent="0">
+                  <a:buNone/>
+                </a:pPr>
+                <a:r>
+                  <a:rPr lang="en-GB" b="1" dirty="0"/>
+                  <a:t>Problem: </a:t>
+                </a:r>
+                <a:r>
+                  <a:rPr lang="en-GB" dirty="0"/>
+                  <a:t>Variable history length cannot work with our current neural network because </a:t>
+                </a:r>
+                <a:r>
+                  <a:rPr lang="en-GB" b="1" dirty="0"/>
+                  <a:t>it</a:t>
+                </a:r>
+                <a:r>
+                  <a:rPr lang="en-GB" dirty="0"/>
+                  <a:t> </a:t>
+                </a:r>
+                <a:r>
+                  <a:rPr lang="en-GB" b="1" dirty="0"/>
+                  <a:t>requires fixed-length input sequences</a:t>
+                </a:r>
+                <a:r>
+                  <a:rPr lang="en-GB" dirty="0"/>
+                  <a:t>.</a:t>
+                </a:r>
+              </a:p>
+              <a:p>
+                <a:pPr marL="0" indent="0">
+                  <a:buNone/>
+                </a:pPr>
+                <a:r>
+                  <a:rPr lang="en-GB" b="1" dirty="0"/>
+                  <a:t>A quick fix would be to assume a fixed length </a:t>
+                </a:r>
+                <a14:m>
+                  <m:oMath xmlns:m="http://schemas.openxmlformats.org/officeDocument/2006/math">
+                    <m:r>
+                      <a:rPr lang="en-GB" b="1" i="1" dirty="0" smtClean="0">
+                        <a:latin typeface="Cambria Math" panose="02040503050406030204" pitchFamily="18" charset="0"/>
+                      </a:rPr>
+                      <m:t>𝒍</m:t>
+                    </m:r>
+                  </m:oMath>
+                </a14:m>
+                <a:r>
+                  <a:rPr lang="en-GB" b="1" dirty="0"/>
+                  <a:t> for the history vector </a:t>
+                </a:r>
+                <a14:m>
+                  <m:oMath xmlns:m="http://schemas.openxmlformats.org/officeDocument/2006/math">
+                    <m:sSub>
+                      <m:sSubPr>
+                        <m:ctrlPr>
+                          <a:rPr lang="en-GB" b="1" i="1" dirty="0" smtClean="0">
+                            <a:latin typeface="Cambria Math" panose="02040503050406030204" pitchFamily="18" charset="0"/>
+                          </a:rPr>
+                        </m:ctrlPr>
+                      </m:sSubPr>
+                      <m:e>
+                        <m:r>
+                          <a:rPr lang="en-GB" b="1" i="1" dirty="0" smtClean="0">
+                            <a:latin typeface="Cambria Math" panose="02040503050406030204" pitchFamily="18" charset="0"/>
+                          </a:rPr>
+                          <m:t>𝒉</m:t>
+                        </m:r>
+                      </m:e>
+                      <m:sub>
+                        <m:r>
+                          <a:rPr lang="en-GB" b="1" i="1" dirty="0" smtClean="0">
+                            <a:latin typeface="Cambria Math" panose="02040503050406030204" pitchFamily="18" charset="0"/>
+                          </a:rPr>
+                          <m:t>𝒕</m:t>
+                        </m:r>
+                      </m:sub>
+                    </m:sSub>
+                    <m:r>
+                      <a:rPr lang="en-GB" b="1" i="1" dirty="0">
+                        <a:latin typeface="Cambria Math" panose="02040503050406030204" pitchFamily="18" charset="0"/>
+                      </a:rPr>
+                      <m:t> </m:t>
+                    </m:r>
+                  </m:oMath>
+                </a14:m>
+                <a:r>
+                  <a:rPr lang="en-GB" b="1" dirty="0"/>
+                  <a:t>to be used at all times:</a:t>
+                </a:r>
+              </a:p>
+              <a:p>
+                <a:r>
+                  <a:rPr lang="en-GB" dirty="0"/>
+                  <a:t>We could </a:t>
+                </a:r>
+                <a:r>
+                  <a:rPr lang="en-GB" b="1" dirty="0"/>
+                  <a:t>truncate</a:t>
+                </a:r>
+                <a:r>
+                  <a:rPr lang="en-GB" dirty="0"/>
+                  <a:t> the history vectors that have a length greater than </a:t>
+                </a:r>
+                <a14:m>
+                  <m:oMath xmlns:m="http://schemas.openxmlformats.org/officeDocument/2006/math">
+                    <m:r>
+                      <a:rPr lang="en-GB" i="1" dirty="0" smtClean="0">
+                        <a:latin typeface="Cambria Math" panose="02040503050406030204" pitchFamily="18" charset="0"/>
+                      </a:rPr>
+                      <m:t>𝑙</m:t>
+                    </m:r>
+                  </m:oMath>
+                </a14:m>
+                <a:r>
+                  <a:rPr lang="en-GB" dirty="0"/>
+                  <a:t>, keeping the last elements only, i.e. </a:t>
+                </a:r>
+                <a14:m>
+                  <m:oMath xmlns:m="http://schemas.openxmlformats.org/officeDocument/2006/math">
+                    <m:sSub>
+                      <m:sSubPr>
+                        <m:ctrlPr>
+                          <a:rPr lang="en-GB" b="0" i="1" smtClean="0">
+                            <a:latin typeface="Cambria Math" panose="02040503050406030204" pitchFamily="18" charset="0"/>
+                          </a:rPr>
+                        </m:ctrlPr>
+                      </m:sSubPr>
+                      <m:e>
+                        <m:r>
+                          <a:rPr lang="en-GB" b="0" i="1" smtClean="0">
+                            <a:latin typeface="Cambria Math" panose="02040503050406030204" pitchFamily="18" charset="0"/>
+                          </a:rPr>
+                          <m:t>h</m:t>
+                        </m:r>
+                      </m:e>
+                      <m:sub>
+                        <m:r>
+                          <a:rPr lang="en-GB" b="0" i="1" smtClean="0">
+                            <a:latin typeface="Cambria Math" panose="02040503050406030204" pitchFamily="18" charset="0"/>
+                          </a:rPr>
+                          <m:t>𝑡</m:t>
+                        </m:r>
+                      </m:sub>
+                    </m:sSub>
+                    <m:r>
+                      <a:rPr lang="en-GB" b="0" i="1" smtClean="0">
+                        <a:latin typeface="Cambria Math" panose="02040503050406030204" pitchFamily="18" charset="0"/>
+                      </a:rPr>
+                      <m:t>=(</m:t>
+                    </m:r>
+                    <m:sSub>
+                      <m:sSubPr>
+                        <m:ctrlPr>
+                          <a:rPr lang="en-GB" b="0" i="1" smtClean="0">
+                            <a:latin typeface="Cambria Math" panose="02040503050406030204" pitchFamily="18" charset="0"/>
+                          </a:rPr>
+                        </m:ctrlPr>
+                      </m:sSubPr>
+                      <m:e>
+                        <m:r>
+                          <a:rPr lang="en-GB" b="0" i="1" smtClean="0">
+                            <a:latin typeface="Cambria Math" panose="02040503050406030204" pitchFamily="18" charset="0"/>
+                          </a:rPr>
+                          <m:t>𝑥</m:t>
+                        </m:r>
+                      </m:e>
+                      <m:sub>
+                        <m:r>
+                          <a:rPr lang="en-GB" b="0" i="1" smtClean="0">
+                            <a:latin typeface="Cambria Math" panose="02040503050406030204" pitchFamily="18" charset="0"/>
+                          </a:rPr>
+                          <m:t>𝑡</m:t>
+                        </m:r>
+                        <m:r>
+                          <a:rPr lang="en-GB" b="0" i="1" smtClean="0">
+                            <a:latin typeface="Cambria Math" panose="02040503050406030204" pitchFamily="18" charset="0"/>
+                          </a:rPr>
+                          <m:t>−</m:t>
+                        </m:r>
+                        <m:r>
+                          <a:rPr lang="en-GB" b="0" i="1" smtClean="0">
+                            <a:latin typeface="Cambria Math" panose="02040503050406030204" pitchFamily="18" charset="0"/>
+                          </a:rPr>
+                          <m:t>𝑙</m:t>
+                        </m:r>
+                      </m:sub>
+                    </m:sSub>
+                    <m:r>
+                      <a:rPr lang="en-GB" b="0" i="1" smtClean="0">
+                        <a:latin typeface="Cambria Math" panose="02040503050406030204" pitchFamily="18" charset="0"/>
+                      </a:rPr>
+                      <m:t>,…,</m:t>
+                    </m:r>
+                    <m:sSub>
+                      <m:sSubPr>
+                        <m:ctrlPr>
+                          <a:rPr lang="en-GB" b="0" i="1" smtClean="0">
+                            <a:latin typeface="Cambria Math" panose="02040503050406030204" pitchFamily="18" charset="0"/>
+                          </a:rPr>
+                        </m:ctrlPr>
+                      </m:sSubPr>
+                      <m:e>
+                        <m:r>
+                          <a:rPr lang="en-GB" b="0" i="1" smtClean="0">
+                            <a:latin typeface="Cambria Math" panose="02040503050406030204" pitchFamily="18" charset="0"/>
+                          </a:rPr>
+                          <m:t>𝑥</m:t>
+                        </m:r>
+                      </m:e>
+                      <m:sub>
+                        <m:r>
+                          <a:rPr lang="en-GB" b="0" i="1" smtClean="0">
+                            <a:latin typeface="Cambria Math" panose="02040503050406030204" pitchFamily="18" charset="0"/>
+                          </a:rPr>
+                          <m:t>𝑡</m:t>
+                        </m:r>
+                        <m:r>
+                          <a:rPr lang="en-GB" b="0" i="1" smtClean="0">
+                            <a:latin typeface="Cambria Math" panose="02040503050406030204" pitchFamily="18" charset="0"/>
+                          </a:rPr>
+                          <m:t>−1</m:t>
+                        </m:r>
+                      </m:sub>
+                    </m:sSub>
+                    <m:r>
+                      <a:rPr lang="en-GB" b="0" i="1" smtClean="0">
+                        <a:latin typeface="Cambria Math" panose="02040503050406030204" pitchFamily="18" charset="0"/>
+                      </a:rPr>
+                      <m:t>)</m:t>
+                    </m:r>
+                  </m:oMath>
+                </a14:m>
+                <a:r>
+                  <a:rPr lang="en-GB" dirty="0"/>
+                  <a:t>.</a:t>
+                </a:r>
+              </a:p>
+              <a:p>
+                <a:r>
+                  <a:rPr lang="en-GB" dirty="0"/>
+                  <a:t>If too short, we could use </a:t>
+                </a:r>
+                <a:r>
+                  <a:rPr lang="en-GB" b="1" dirty="0"/>
+                  <a:t>padding</a:t>
+                </a:r>
+                <a:r>
+                  <a:rPr lang="en-GB" dirty="0"/>
+                  <a:t> for the history vectors that have a lower length than </a:t>
+                </a:r>
+                <a14:m>
+                  <m:oMath xmlns:m="http://schemas.openxmlformats.org/officeDocument/2006/math">
+                    <m:r>
+                      <a:rPr lang="en-GB" i="1" dirty="0" smtClean="0">
+                        <a:latin typeface="Cambria Math" panose="02040503050406030204" pitchFamily="18" charset="0"/>
+                      </a:rPr>
+                      <m:t>𝑙</m:t>
+                    </m:r>
+                  </m:oMath>
+                </a14:m>
+                <a:r>
+                  <a:rPr lang="en-GB" dirty="0"/>
+                  <a:t>, adding zeros to artificially increase their length. For instance, after padding, we could have </a:t>
+                </a:r>
+                <a14:m>
+                  <m:oMath xmlns:m="http://schemas.openxmlformats.org/officeDocument/2006/math">
+                    <m:sSub>
+                      <m:sSubPr>
+                        <m:ctrlPr>
+                          <a:rPr lang="en-GB" i="1">
+                            <a:latin typeface="Cambria Math" panose="02040503050406030204" pitchFamily="18" charset="0"/>
+                          </a:rPr>
+                        </m:ctrlPr>
+                      </m:sSubPr>
+                      <m:e>
+                        <m:r>
+                          <a:rPr lang="en-GB" i="1">
+                            <a:latin typeface="Cambria Math" panose="02040503050406030204" pitchFamily="18" charset="0"/>
+                          </a:rPr>
+                          <m:t>h</m:t>
+                        </m:r>
+                      </m:e>
+                      <m:sub>
+                        <m:r>
+                          <a:rPr lang="en-GB" i="1">
+                            <a:latin typeface="Cambria Math" panose="02040503050406030204" pitchFamily="18" charset="0"/>
+                          </a:rPr>
+                          <m:t>3</m:t>
+                        </m:r>
+                      </m:sub>
+                    </m:sSub>
+                    <m:r>
+                      <a:rPr lang="en-GB">
+                        <a:latin typeface="Cambria Math" panose="02040503050406030204" pitchFamily="18" charset="0"/>
+                      </a:rPr>
+                      <m:t>=</m:t>
+                    </m:r>
+                    <m:r>
+                      <a:rPr lang="en-GB" i="1">
+                        <a:latin typeface="Cambria Math" panose="02040503050406030204" pitchFamily="18" charset="0"/>
+                      </a:rPr>
+                      <m:t>(</m:t>
+                    </m:r>
+                    <m:r>
+                      <a:rPr lang="en-GB" b="0" i="1" smtClean="0">
+                        <a:latin typeface="Cambria Math" panose="02040503050406030204" pitchFamily="18" charset="0"/>
+                      </a:rPr>
+                      <m:t>0, …, 0, </m:t>
+                    </m:r>
+                    <m:sSub>
+                      <m:sSubPr>
+                        <m:ctrlPr>
+                          <a:rPr lang="en-GB" i="1">
+                            <a:latin typeface="Cambria Math" panose="02040503050406030204" pitchFamily="18" charset="0"/>
+                          </a:rPr>
+                        </m:ctrlPr>
+                      </m:sSubPr>
+                      <m:e>
+                        <m:r>
+                          <a:rPr lang="en-GB" i="1">
+                            <a:latin typeface="Cambria Math" panose="02040503050406030204" pitchFamily="18" charset="0"/>
+                          </a:rPr>
+                          <m:t>𝑥</m:t>
+                        </m:r>
+                      </m:e>
+                      <m:sub>
+                        <m:r>
+                          <a:rPr lang="en-GB" i="1">
+                            <a:latin typeface="Cambria Math" panose="02040503050406030204" pitchFamily="18" charset="0"/>
+                          </a:rPr>
+                          <m:t>1</m:t>
+                        </m:r>
+                      </m:sub>
+                    </m:sSub>
+                    <m:r>
+                      <a:rPr lang="en-GB" i="1">
+                        <a:latin typeface="Cambria Math" panose="02040503050406030204" pitchFamily="18" charset="0"/>
+                      </a:rPr>
+                      <m:t>, </m:t>
+                    </m:r>
+                    <m:sSub>
+                      <m:sSubPr>
+                        <m:ctrlPr>
+                          <a:rPr lang="en-GB" i="1">
+                            <a:latin typeface="Cambria Math" panose="02040503050406030204" pitchFamily="18" charset="0"/>
+                          </a:rPr>
+                        </m:ctrlPr>
+                      </m:sSubPr>
+                      <m:e>
+                        <m:r>
+                          <a:rPr lang="en-GB" i="1">
+                            <a:latin typeface="Cambria Math" panose="02040503050406030204" pitchFamily="18" charset="0"/>
+                          </a:rPr>
+                          <m:t>𝑥</m:t>
+                        </m:r>
+                      </m:e>
+                      <m:sub>
+                        <m:r>
+                          <a:rPr lang="en-GB" i="1">
+                            <a:latin typeface="Cambria Math" panose="02040503050406030204" pitchFamily="18" charset="0"/>
+                          </a:rPr>
+                          <m:t>2</m:t>
+                        </m:r>
+                      </m:sub>
+                    </m:sSub>
+                    <m:r>
+                      <a:rPr lang="en-GB" i="1">
+                        <a:latin typeface="Cambria Math" panose="02040503050406030204" pitchFamily="18" charset="0"/>
+                      </a:rPr>
+                      <m:t>)</m:t>
+                    </m:r>
+                  </m:oMath>
+                </a14:m>
+                <a:r>
+                  <a:rPr lang="en-GB" dirty="0"/>
+                  <a:t>.</a:t>
+                </a:r>
+              </a:p>
               <a:p>
                 <a:pPr marL="0" indent="0">
                   <a:buNone/>
@@ -16289,7 +13906,7 @@
 </p:sld>
 </file>
 
-<file path=ppt/slides/slide32.xml><?xml version="1.0" encoding="utf-8"?>
+<file path=ppt/slides/slide33.xml><?xml version="1.0" encoding="utf-8"?>
 <p:sld xmlns:a="http://schemas.openxmlformats.org/drawingml/2006/main" xmlns:r="http://schemas.openxmlformats.org/officeDocument/2006/relationships" xmlns:p="http://schemas.openxmlformats.org/presentationml/2006/main">
   <p:cSld>
     <p:spTree>
@@ -16809,7 +14426,7 @@
 </p:sld>
 </file>
 
-<file path=ppt/slides/slide33.xml><?xml version="1.0" encoding="utf-8"?>
+<file path=ppt/slides/slide34.xml><?xml version="1.0" encoding="utf-8"?>
 <p:sld xmlns:a="http://schemas.openxmlformats.org/drawingml/2006/main" xmlns:r="http://schemas.openxmlformats.org/officeDocument/2006/relationships" xmlns:p="http://schemas.openxmlformats.org/presentationml/2006/main">
   <p:cSld>
     <p:spTree>
@@ -18488,7 +16105,7 @@
 </p:sld>
 </file>
 
-<file path=ppt/slides/slide34.xml><?xml version="1.0" encoding="utf-8"?>
+<file path=ppt/slides/slide35.xml><?xml version="1.0" encoding="utf-8"?>
 <p:sld xmlns:a="http://schemas.openxmlformats.org/drawingml/2006/main" xmlns:r="http://schemas.openxmlformats.org/officeDocument/2006/relationships" xmlns:p="http://schemas.openxmlformats.org/presentationml/2006/main">
   <p:cSld>
     <p:spTree>
@@ -18999,7 +16616,7 @@
 </p:sld>
 </file>
 
-<file path=ppt/slides/slide35.xml><?xml version="1.0" encoding="utf-8"?>
+<file path=ppt/slides/slide36.xml><?xml version="1.0" encoding="utf-8"?>
 <p:sld xmlns:a="http://schemas.openxmlformats.org/drawingml/2006/main" xmlns:r="http://schemas.openxmlformats.org/officeDocument/2006/relationships" xmlns:p="http://schemas.openxmlformats.org/presentationml/2006/main">
   <p:cSld>
     <p:spTree>
@@ -20678,7 +18295,7 @@
 </p:sld>
 </file>
 
-<file path=ppt/slides/slide36.xml><?xml version="1.0" encoding="utf-8"?>
+<file path=ppt/slides/slide37.xml><?xml version="1.0" encoding="utf-8"?>
 <p:sld xmlns:a="http://schemas.openxmlformats.org/drawingml/2006/main" xmlns:r="http://schemas.openxmlformats.org/officeDocument/2006/relationships" xmlns:p="http://schemas.openxmlformats.org/presentationml/2006/main">
   <p:cSld>
     <p:spTree>
@@ -20738,7 +18355,7 @@
 </p:sld>
 </file>
 
-<file path=ppt/slides/slide37.xml><?xml version="1.0" encoding="utf-8"?>
+<file path=ppt/slides/slide38.xml><?xml version="1.0" encoding="utf-8"?>
 <p:sld xmlns:a="http://schemas.openxmlformats.org/drawingml/2006/main" xmlns:r="http://schemas.openxmlformats.org/officeDocument/2006/relationships" xmlns:p="http://schemas.openxmlformats.org/presentationml/2006/main">
   <p:cSld>
     <p:spTree>
@@ -21589,7 +19206,7 @@
 </p:sld>
 </file>
 
-<file path=ppt/slides/slide38.xml><?xml version="1.0" encoding="utf-8"?>
+<file path=ppt/slides/slide39.xml><?xml version="1.0" encoding="utf-8"?>
 <p:sld xmlns:a="http://schemas.openxmlformats.org/drawingml/2006/main" xmlns:r="http://schemas.openxmlformats.org/officeDocument/2006/relationships" xmlns:p="http://schemas.openxmlformats.org/presentationml/2006/main">
   <p:cSld>
     <p:spTree>
@@ -22279,95 +19896,6 @@
 </p:sld>
 </file>
 
-<file path=ppt/slides/slide39.xml><?xml version="1.0" encoding="utf-8"?>
-<p:sld xmlns:a="http://schemas.openxmlformats.org/drawingml/2006/main" xmlns:r="http://schemas.openxmlformats.org/officeDocument/2006/relationships" xmlns:p="http://schemas.openxmlformats.org/presentationml/2006/main">
-  <p:cSld>
-    <p:spTree>
-      <p:nvGrpSpPr>
-        <p:cNvPr id="1" name=""/>
-        <p:cNvGrpSpPr/>
-        <p:nvPr/>
-      </p:nvGrpSpPr>
-      <p:grpSpPr>
-        <a:xfrm>
-          <a:off x="0" y="0"/>
-          <a:ext cx="0" cy="0"/>
-          <a:chOff x="0" y="0"/>
-          <a:chExt cx="0" cy="0"/>
-        </a:xfrm>
-      </p:grpSpPr>
-      <p:sp>
-        <p:nvSpPr>
-          <p:cNvPr id="2" name="Title 1">
-            <a:extLst>
-              <a:ext uri="{FF2B5EF4-FFF2-40B4-BE49-F238E27FC236}">
-                <a16:creationId xmlns:a16="http://schemas.microsoft.com/office/drawing/2014/main" id="{27475721-EED9-80CE-F23D-A742DFC9C6E2}"/>
-              </a:ext>
-            </a:extLst>
-          </p:cNvPr>
-          <p:cNvSpPr>
-            <a:spLocks noGrp="1"/>
-          </p:cNvSpPr>
-          <p:nvPr>
-            <p:ph type="title"/>
-          </p:nvPr>
-        </p:nvSpPr>
-        <p:spPr/>
-        <p:txBody>
-          <a:bodyPr/>
-          <a:lstStyle/>
-          <a:p>
-            <a:r>
-              <a:rPr lang="en-GB" dirty="0"/>
-              <a:t>It trains!</a:t>
-            </a:r>
-            <a:endParaRPr lang="en-SG" dirty="0"/>
-          </a:p>
-        </p:txBody>
-      </p:sp>
-      <p:pic>
-        <p:nvPicPr>
-          <p:cNvPr id="5" name="Picture 4">
-            <a:extLst>
-              <a:ext uri="{FF2B5EF4-FFF2-40B4-BE49-F238E27FC236}">
-                <a16:creationId xmlns:a16="http://schemas.microsoft.com/office/drawing/2014/main" id="{D6DDE19B-E25E-831A-A8E7-E62EFA527FA6}"/>
-              </a:ext>
-            </a:extLst>
-          </p:cNvPr>
-          <p:cNvPicPr>
-            <a:picLocks noChangeAspect="1"/>
-          </p:cNvPicPr>
-          <p:nvPr/>
-        </p:nvPicPr>
-        <p:blipFill>
-          <a:blip r:embed="rId2"/>
-          <a:stretch>
-            <a:fillRect/>
-          </a:stretch>
-        </p:blipFill>
-        <p:spPr>
-          <a:xfrm>
-            <a:off x="1302238" y="1434643"/>
-            <a:ext cx="9587523" cy="5423357"/>
-          </a:xfrm>
-          <a:prstGeom prst="rect">
-            <a:avLst/>
-          </a:prstGeom>
-        </p:spPr>
-      </p:pic>
-    </p:spTree>
-    <p:extLst>
-      <p:ext uri="{BB962C8B-B14F-4D97-AF65-F5344CB8AC3E}">
-        <p14:creationId xmlns:p14="http://schemas.microsoft.com/office/powerpoint/2010/main" val="1700821507"/>
-      </p:ext>
-    </p:extLst>
-  </p:cSld>
-  <p:clrMapOvr>
-    <a:masterClrMapping/>
-  </p:clrMapOvr>
-</p:sld>
-</file>
-
 <file path=ppt/slides/slide4.xml><?xml version="1.0" encoding="utf-8"?>
 <p:sld xmlns:a="http://schemas.openxmlformats.org/drawingml/2006/main" xmlns:r="http://schemas.openxmlformats.org/officeDocument/2006/relationships" xmlns:p="http://schemas.openxmlformats.org/presentationml/2006/main">
   <p:cSld>
@@ -22635,6 +20163,95 @@
           <a:p>
             <a:r>
               <a:rPr lang="en-GB" dirty="0"/>
+              <a:t>It trains!</a:t>
+            </a:r>
+            <a:endParaRPr lang="en-SG" dirty="0"/>
+          </a:p>
+        </p:txBody>
+      </p:sp>
+      <p:pic>
+        <p:nvPicPr>
+          <p:cNvPr id="5" name="Picture 4">
+            <a:extLst>
+              <a:ext uri="{FF2B5EF4-FFF2-40B4-BE49-F238E27FC236}">
+                <a16:creationId xmlns:a16="http://schemas.microsoft.com/office/drawing/2014/main" id="{D6DDE19B-E25E-831A-A8E7-E62EFA527FA6}"/>
+              </a:ext>
+            </a:extLst>
+          </p:cNvPr>
+          <p:cNvPicPr>
+            <a:picLocks noChangeAspect="1"/>
+          </p:cNvPicPr>
+          <p:nvPr/>
+        </p:nvPicPr>
+        <p:blipFill>
+          <a:blip r:embed="rId2"/>
+          <a:stretch>
+            <a:fillRect/>
+          </a:stretch>
+        </p:blipFill>
+        <p:spPr>
+          <a:xfrm>
+            <a:off x="1302238" y="1434643"/>
+            <a:ext cx="9587523" cy="5423357"/>
+          </a:xfrm>
+          <a:prstGeom prst="rect">
+            <a:avLst/>
+          </a:prstGeom>
+        </p:spPr>
+      </p:pic>
+    </p:spTree>
+    <p:extLst>
+      <p:ext uri="{BB962C8B-B14F-4D97-AF65-F5344CB8AC3E}">
+        <p14:creationId xmlns:p14="http://schemas.microsoft.com/office/powerpoint/2010/main" val="1700821507"/>
+      </p:ext>
+    </p:extLst>
+  </p:cSld>
+  <p:clrMapOvr>
+    <a:masterClrMapping/>
+  </p:clrMapOvr>
+</p:sld>
+</file>
+
+<file path=ppt/slides/slide41.xml><?xml version="1.0" encoding="utf-8"?>
+<p:sld xmlns:a="http://schemas.openxmlformats.org/drawingml/2006/main" xmlns:r="http://schemas.openxmlformats.org/officeDocument/2006/relationships" xmlns:p="http://schemas.openxmlformats.org/presentationml/2006/main">
+  <p:cSld>
+    <p:spTree>
+      <p:nvGrpSpPr>
+        <p:cNvPr id="1" name=""/>
+        <p:cNvGrpSpPr/>
+        <p:nvPr/>
+      </p:nvGrpSpPr>
+      <p:grpSpPr>
+        <a:xfrm>
+          <a:off x="0" y="0"/>
+          <a:ext cx="0" cy="0"/>
+          <a:chOff x="0" y="0"/>
+          <a:chExt cx="0" cy="0"/>
+        </a:xfrm>
+      </p:grpSpPr>
+      <p:sp>
+        <p:nvSpPr>
+          <p:cNvPr id="2" name="Title 1">
+            <a:extLst>
+              <a:ext uri="{FF2B5EF4-FFF2-40B4-BE49-F238E27FC236}">
+                <a16:creationId xmlns:a16="http://schemas.microsoft.com/office/drawing/2014/main" id="{27475721-EED9-80CE-F23D-A742DFC9C6E2}"/>
+              </a:ext>
+            </a:extLst>
+          </p:cNvPr>
+          <p:cNvSpPr>
+            <a:spLocks noGrp="1"/>
+          </p:cNvSpPr>
+          <p:nvPr>
+            <p:ph type="title"/>
+          </p:nvPr>
+        </p:nvSpPr>
+        <p:spPr/>
+        <p:txBody>
+          <a:bodyPr/>
+          <a:lstStyle/>
+          <a:p>
+            <a:r>
+              <a:rPr lang="en-GB" dirty="0"/>
               <a:t>And it is not too bad at predicting!</a:t>
             </a:r>
             <a:endParaRPr lang="en-SG" dirty="0"/>
@@ -22684,7 +20301,7 @@
 </p:sld>
 </file>
 
-<file path=ppt/slides/slide41.xml><?xml version="1.0" encoding="utf-8"?>
+<file path=ppt/slides/slide42.xml><?xml version="1.0" encoding="utf-8"?>
 <p:sld xmlns:a="http://schemas.openxmlformats.org/drawingml/2006/main" xmlns:r="http://schemas.openxmlformats.org/officeDocument/2006/relationships" xmlns:p="http://schemas.openxmlformats.org/presentationml/2006/main">
   <p:cSld>
     <p:spTree>
@@ -23545,7 +21162,7 @@
 </p:sld>
 </file>
 
-<file path=ppt/slides/slide42.xml><?xml version="1.0" encoding="utf-8"?>
+<file path=ppt/slides/slide43.xml><?xml version="1.0" encoding="utf-8"?>
 <p:sld xmlns:a="http://schemas.openxmlformats.org/drawingml/2006/main" xmlns:r="http://schemas.openxmlformats.org/officeDocument/2006/relationships" xmlns:p="http://schemas.openxmlformats.org/presentationml/2006/main">
   <p:cSld>
     <p:spTree>
@@ -23889,162 +21506,6 @@
     <p:extLst>
       <p:ext uri="{BB962C8B-B14F-4D97-AF65-F5344CB8AC3E}">
         <p14:creationId xmlns:p14="http://schemas.microsoft.com/office/powerpoint/2010/main" val="1663617131"/>
-      </p:ext>
-    </p:extLst>
-  </p:cSld>
-  <p:clrMapOvr>
-    <a:masterClrMapping/>
-  </p:clrMapOvr>
-</p:sld>
-</file>
-
-<file path=ppt/slides/slide43.xml><?xml version="1.0" encoding="utf-8"?>
-<p:sld xmlns:a="http://schemas.openxmlformats.org/drawingml/2006/main" xmlns:r="http://schemas.openxmlformats.org/officeDocument/2006/relationships" xmlns:p="http://schemas.openxmlformats.org/presentationml/2006/main">
-  <p:cSld>
-    <p:spTree>
-      <p:nvGrpSpPr>
-        <p:cNvPr id="1" name=""/>
-        <p:cNvGrpSpPr/>
-        <p:nvPr/>
-      </p:nvGrpSpPr>
-      <p:grpSpPr>
-        <a:xfrm>
-          <a:off x="0" y="0"/>
-          <a:ext cx="0" cy="0"/>
-          <a:chOff x="0" y="0"/>
-          <a:chExt cx="0" cy="0"/>
-        </a:xfrm>
-      </p:grpSpPr>
-      <p:sp>
-        <p:nvSpPr>
-          <p:cNvPr id="2" name="Title 1">
-            <a:extLst>
-              <a:ext uri="{FF2B5EF4-FFF2-40B4-BE49-F238E27FC236}">
-                <a16:creationId xmlns:a16="http://schemas.microsoft.com/office/drawing/2014/main" id="{B7F2B696-BAB3-3B95-364A-DA9C343AFF9C}"/>
-              </a:ext>
-            </a:extLst>
-          </p:cNvPr>
-          <p:cNvSpPr>
-            <a:spLocks noGrp="1"/>
-          </p:cNvSpPr>
-          <p:nvPr>
-            <p:ph type="title"/>
-          </p:nvPr>
-        </p:nvSpPr>
-        <p:spPr/>
-        <p:txBody>
-          <a:bodyPr/>
-          <a:lstStyle/>
-          <a:p>
-            <a:r>
-              <a:rPr lang="en-GB" dirty="0"/>
-              <a:t>What is a good memory length then?</a:t>
-            </a:r>
-            <a:endParaRPr lang="en-SG" dirty="0"/>
-          </a:p>
-        </p:txBody>
-      </p:sp>
-      <p:sp>
-        <p:nvSpPr>
-          <p:cNvPr id="3" name="Content Placeholder 2">
-            <a:extLst>
-              <a:ext uri="{FF2B5EF4-FFF2-40B4-BE49-F238E27FC236}">
-                <a16:creationId xmlns:a16="http://schemas.microsoft.com/office/drawing/2014/main" id="{3F321E73-C55F-1D84-B04E-3A310D33B527}"/>
-              </a:ext>
-            </a:extLst>
-          </p:cNvPr>
-          <p:cNvSpPr>
-            <a:spLocks noGrp="1"/>
-          </p:cNvSpPr>
-          <p:nvPr>
-            <p:ph idx="1"/>
-          </p:nvPr>
-        </p:nvSpPr>
-        <p:spPr>
-          <a:xfrm>
-            <a:off x="838200" y="1825624"/>
-            <a:ext cx="10515600" cy="5032375"/>
-          </a:xfrm>
-        </p:spPr>
-        <p:txBody>
-          <a:bodyPr>
-            <a:normAutofit/>
-          </a:bodyPr>
-          <a:lstStyle/>
-          <a:p>
-            <a:pPr marL="0" indent="0">
-              <a:buNone/>
-            </a:pPr>
-            <a:r>
-              <a:rPr lang="en-SG" sz="2800" dirty="0"/>
-              <a:t>In practice,</a:t>
-            </a:r>
-            <a:endParaRPr lang="en-GB" dirty="0"/>
-          </a:p>
-          <a:p>
-            <a:pPr marL="514350" indent="-514350">
-              <a:buFont typeface="+mj-lt"/>
-              <a:buAutoNum type="arabicPeriod"/>
-            </a:pPr>
-            <a:r>
-              <a:rPr lang="en-GB" b="1" dirty="0"/>
-              <a:t>Consider the time scale of the problem: </a:t>
-            </a:r>
-            <a:r>
-              <a:rPr lang="en-GB" dirty="0"/>
-              <a:t>The appropriate lookback length typically depends on the </a:t>
-            </a:r>
-            <a:r>
-              <a:rPr lang="en-GB" b="1" dirty="0"/>
-              <a:t>time scale of the problem </a:t>
-            </a:r>
-            <a:r>
-              <a:rPr lang="en-GB" dirty="0"/>
-              <a:t>you are trying to solve.</a:t>
-            </a:r>
-          </a:p>
-          <a:p>
-            <a:pPr marL="0" indent="0">
-              <a:buNone/>
-            </a:pPr>
-            <a:r>
-              <a:rPr lang="en-GB" dirty="0"/>
-              <a:t>For example, if you are trying to predict daily stock prices, you might use a lookback length of 30 days. If you are trying to predict hourly traffic patterns, you might use a lookback length of 24 hours.</a:t>
-            </a:r>
-          </a:p>
-          <a:p>
-            <a:pPr marL="0" indent="0">
-              <a:buNone/>
-            </a:pPr>
-            <a:r>
-              <a:rPr lang="en-GB" dirty="0"/>
-              <a:t>(Typically, look at seasonality and trend of your data!)</a:t>
-            </a:r>
-          </a:p>
-          <a:p>
-            <a:pPr marL="0" indent="0">
-              <a:buNone/>
-            </a:pPr>
-            <a:r>
-              <a:rPr lang="en-GB" b="1" dirty="0">
-                <a:sym typeface="Wingdings" panose="05000000000000000000" pitchFamily="2" charset="2"/>
-              </a:rPr>
-              <a:t> </a:t>
-            </a:r>
-            <a:r>
-              <a:rPr lang="en-GB" b="1" dirty="0"/>
-              <a:t>The more information you need in the memory, the larger the memory size of it should be.</a:t>
-            </a:r>
-          </a:p>
-          <a:p>
-            <a:endParaRPr lang="en-SG" dirty="0"/>
-          </a:p>
-        </p:txBody>
-      </p:sp>
-    </p:spTree>
-    <p:extLst>
-      <p:ext uri="{BB962C8B-B14F-4D97-AF65-F5344CB8AC3E}">
-        <p14:creationId xmlns:p14="http://schemas.microsoft.com/office/powerpoint/2010/main" val="1885554493"/>
       </p:ext>
     </p:extLst>
   </p:cSld>
@@ -24132,6 +21593,162 @@
               <a:buNone/>
             </a:pPr>
             <a:r>
+              <a:rPr lang="en-SG" sz="2800" dirty="0"/>
+              <a:t>In practice,</a:t>
+            </a:r>
+            <a:endParaRPr lang="en-GB" dirty="0"/>
+          </a:p>
+          <a:p>
+            <a:pPr marL="514350" indent="-514350">
+              <a:buFont typeface="+mj-lt"/>
+              <a:buAutoNum type="arabicPeriod"/>
+            </a:pPr>
+            <a:r>
+              <a:rPr lang="en-GB" b="1" dirty="0"/>
+              <a:t>Consider the time scale of the problem: </a:t>
+            </a:r>
+            <a:r>
+              <a:rPr lang="en-GB" dirty="0"/>
+              <a:t>The appropriate lookback length typically depends on the </a:t>
+            </a:r>
+            <a:r>
+              <a:rPr lang="en-GB" b="1" dirty="0"/>
+              <a:t>time scale of the problem </a:t>
+            </a:r>
+            <a:r>
+              <a:rPr lang="en-GB" dirty="0"/>
+              <a:t>you are trying to solve.</a:t>
+            </a:r>
+          </a:p>
+          <a:p>
+            <a:pPr marL="0" indent="0">
+              <a:buNone/>
+            </a:pPr>
+            <a:r>
+              <a:rPr lang="en-GB" dirty="0"/>
+              <a:t>For example, if you are trying to predict daily stock prices, you might use a lookback length of 30 days. If you are trying to predict hourly traffic patterns, you might use a lookback length of 24 hours.</a:t>
+            </a:r>
+          </a:p>
+          <a:p>
+            <a:pPr marL="0" indent="0">
+              <a:buNone/>
+            </a:pPr>
+            <a:r>
+              <a:rPr lang="en-GB" dirty="0"/>
+              <a:t>(Typically, look at seasonality and trend of your data!)</a:t>
+            </a:r>
+          </a:p>
+          <a:p>
+            <a:pPr marL="0" indent="0">
+              <a:buNone/>
+            </a:pPr>
+            <a:r>
+              <a:rPr lang="en-GB" b="1" dirty="0">
+                <a:sym typeface="Wingdings" panose="05000000000000000000" pitchFamily="2" charset="2"/>
+              </a:rPr>
+              <a:t> </a:t>
+            </a:r>
+            <a:r>
+              <a:rPr lang="en-GB" b="1" dirty="0"/>
+              <a:t>The more information you need in the memory, the larger the memory size of it should be.</a:t>
+            </a:r>
+          </a:p>
+          <a:p>
+            <a:endParaRPr lang="en-SG" dirty="0"/>
+          </a:p>
+        </p:txBody>
+      </p:sp>
+    </p:spTree>
+    <p:extLst>
+      <p:ext uri="{BB962C8B-B14F-4D97-AF65-F5344CB8AC3E}">
+        <p14:creationId xmlns:p14="http://schemas.microsoft.com/office/powerpoint/2010/main" val="1885554493"/>
+      </p:ext>
+    </p:extLst>
+  </p:cSld>
+  <p:clrMapOvr>
+    <a:masterClrMapping/>
+  </p:clrMapOvr>
+</p:sld>
+</file>
+
+<file path=ppt/slides/slide45.xml><?xml version="1.0" encoding="utf-8"?>
+<p:sld xmlns:a="http://schemas.openxmlformats.org/drawingml/2006/main" xmlns:r="http://schemas.openxmlformats.org/officeDocument/2006/relationships" xmlns:p="http://schemas.openxmlformats.org/presentationml/2006/main">
+  <p:cSld>
+    <p:spTree>
+      <p:nvGrpSpPr>
+        <p:cNvPr id="1" name=""/>
+        <p:cNvGrpSpPr/>
+        <p:nvPr/>
+      </p:nvGrpSpPr>
+      <p:grpSpPr>
+        <a:xfrm>
+          <a:off x="0" y="0"/>
+          <a:ext cx="0" cy="0"/>
+          <a:chOff x="0" y="0"/>
+          <a:chExt cx="0" cy="0"/>
+        </a:xfrm>
+      </p:grpSpPr>
+      <p:sp>
+        <p:nvSpPr>
+          <p:cNvPr id="2" name="Title 1">
+            <a:extLst>
+              <a:ext uri="{FF2B5EF4-FFF2-40B4-BE49-F238E27FC236}">
+                <a16:creationId xmlns:a16="http://schemas.microsoft.com/office/drawing/2014/main" id="{B7F2B696-BAB3-3B95-364A-DA9C343AFF9C}"/>
+              </a:ext>
+            </a:extLst>
+          </p:cNvPr>
+          <p:cNvSpPr>
+            <a:spLocks noGrp="1"/>
+          </p:cNvSpPr>
+          <p:nvPr>
+            <p:ph type="title"/>
+          </p:nvPr>
+        </p:nvSpPr>
+        <p:spPr/>
+        <p:txBody>
+          <a:bodyPr/>
+          <a:lstStyle/>
+          <a:p>
+            <a:r>
+              <a:rPr lang="en-GB" dirty="0"/>
+              <a:t>What is a good memory length then?</a:t>
+            </a:r>
+            <a:endParaRPr lang="en-SG" dirty="0"/>
+          </a:p>
+        </p:txBody>
+      </p:sp>
+      <p:sp>
+        <p:nvSpPr>
+          <p:cNvPr id="3" name="Content Placeholder 2">
+            <a:extLst>
+              <a:ext uri="{FF2B5EF4-FFF2-40B4-BE49-F238E27FC236}">
+                <a16:creationId xmlns:a16="http://schemas.microsoft.com/office/drawing/2014/main" id="{3F321E73-C55F-1D84-B04E-3A310D33B527}"/>
+              </a:ext>
+            </a:extLst>
+          </p:cNvPr>
+          <p:cNvSpPr>
+            <a:spLocks noGrp="1"/>
+          </p:cNvSpPr>
+          <p:nvPr>
+            <p:ph idx="1"/>
+          </p:nvPr>
+        </p:nvSpPr>
+        <p:spPr>
+          <a:xfrm>
+            <a:off x="838200" y="1825624"/>
+            <a:ext cx="10515600" cy="5032375"/>
+          </a:xfrm>
+        </p:spPr>
+        <p:txBody>
+          <a:bodyPr>
+            <a:normAutofit/>
+          </a:bodyPr>
+          <a:lstStyle/>
+          <a:p>
+            <a:pPr marL="0" indent="0">
+              <a:buNone/>
+            </a:pPr>
+            <a:r>
               <a:rPr lang="en-SG" dirty="0"/>
               <a:t>In practice,</a:t>
             </a:r>
@@ -24207,7 +21824,7 @@
 </p:sld>
 </file>
 
-<file path=ppt/slides/slide45.xml><?xml version="1.0" encoding="utf-8"?>
+<file path=ppt/slides/slide46.xml><?xml version="1.0" encoding="utf-8"?>
 <p:sld xmlns:a="http://schemas.openxmlformats.org/drawingml/2006/main" xmlns:r="http://schemas.openxmlformats.org/officeDocument/2006/relationships" xmlns:p="http://schemas.openxmlformats.org/presentationml/2006/main">
   <p:cSld>
     <p:spTree>
@@ -24718,7 +22335,7 @@
 </p:sld>
 </file>
 
-<file path=ppt/slides/slide46.xml><?xml version="1.0" encoding="utf-8"?>
+<file path=ppt/slides/slide47.xml><?xml version="1.0" encoding="utf-8"?>
 <p:sld xmlns:a="http://schemas.openxmlformats.org/drawingml/2006/main" xmlns:r="http://schemas.openxmlformats.org/officeDocument/2006/relationships" xmlns:p="http://schemas.openxmlformats.org/presentationml/2006/main">
   <p:cSld>
     <p:spTree>
@@ -26397,7 +24014,7 @@
 </p:sld>
 </file>
 
-<file path=ppt/slides/slide47.xml><?xml version="1.0" encoding="utf-8"?>
+<file path=ppt/slides/slide48.xml><?xml version="1.0" encoding="utf-8"?>
 <p:sld xmlns:a="http://schemas.openxmlformats.org/drawingml/2006/main" xmlns:r="http://schemas.openxmlformats.org/officeDocument/2006/relationships" xmlns:p="http://schemas.openxmlformats.org/presentationml/2006/main">
   <p:cSld>
     <p:spTree>
@@ -26783,7 +24400,7 @@
 </p:sld>
 </file>
 
-<file path=ppt/slides/slide48.xml><?xml version="1.0" encoding="utf-8"?>
+<file path=ppt/slides/slide49.xml><?xml version="1.0" encoding="utf-8"?>
 <p:sld xmlns:a="http://schemas.openxmlformats.org/drawingml/2006/main" xmlns:r="http://schemas.openxmlformats.org/officeDocument/2006/relationships" xmlns:p="http://schemas.openxmlformats.org/presentationml/2006/main">
   <p:cSld>
     <p:spTree>
@@ -27011,297 +24628,6 @@
     <p:extLst>
       <p:ext uri="{BB962C8B-B14F-4D97-AF65-F5344CB8AC3E}">
         <p14:creationId xmlns:p14="http://schemas.microsoft.com/office/powerpoint/2010/main" val="2646292586"/>
-      </p:ext>
-    </p:extLst>
-  </p:cSld>
-  <p:clrMapOvr>
-    <a:masterClrMapping/>
-  </p:clrMapOvr>
-</p:sld>
-</file>
-
-<file path=ppt/slides/slide49.xml><?xml version="1.0" encoding="utf-8"?>
-<p:sld xmlns:a="http://schemas.openxmlformats.org/drawingml/2006/main" xmlns:r="http://schemas.openxmlformats.org/officeDocument/2006/relationships" xmlns:p="http://schemas.openxmlformats.org/presentationml/2006/main">
-  <p:cSld>
-    <p:spTree>
-      <p:nvGrpSpPr>
-        <p:cNvPr id="1" name=""/>
-        <p:cNvGrpSpPr/>
-        <p:nvPr/>
-      </p:nvGrpSpPr>
-      <p:grpSpPr>
-        <a:xfrm>
-          <a:off x="0" y="0"/>
-          <a:ext cx="0" cy="0"/>
-          <a:chOff x="0" y="0"/>
-          <a:chExt cx="0" cy="0"/>
-        </a:xfrm>
-      </p:grpSpPr>
-      <p:sp>
-        <p:nvSpPr>
-          <p:cNvPr id="2" name="Title 1">
-            <a:extLst>
-              <a:ext uri="{FF2B5EF4-FFF2-40B4-BE49-F238E27FC236}">
-                <a16:creationId xmlns:a16="http://schemas.microsoft.com/office/drawing/2014/main" id="{837744AD-8C96-9D7F-5FF3-DFA6E36E9AD6}"/>
-              </a:ext>
-            </a:extLst>
-          </p:cNvPr>
-          <p:cNvSpPr>
-            <a:spLocks noGrp="1"/>
-          </p:cNvSpPr>
-          <p:nvPr>
-            <p:ph type="title"/>
-          </p:nvPr>
-        </p:nvSpPr>
-        <p:spPr/>
-        <p:txBody>
-          <a:bodyPr/>
-          <a:lstStyle/>
-          <a:p>
-            <a:r>
-              <a:rPr lang="en-GB" dirty="0"/>
-              <a:t>The vanishing gradient problem (part 3)</a:t>
-            </a:r>
-            <a:endParaRPr lang="en-SG" dirty="0"/>
-          </a:p>
-        </p:txBody>
-      </p:sp>
-      <mc:AlternateContent xmlns:mc="http://schemas.openxmlformats.org/markup-compatibility/2006" xmlns:a14="http://schemas.microsoft.com/office/drawing/2010/main">
-        <mc:Choice Requires="a14">
-          <p:sp>
-            <p:nvSpPr>
-              <p:cNvPr id="3" name="Content Placeholder 2">
-                <a:extLst>
-                  <a:ext uri="{FF2B5EF4-FFF2-40B4-BE49-F238E27FC236}">
-                    <a16:creationId xmlns:a16="http://schemas.microsoft.com/office/drawing/2014/main" id="{C27E85C4-C37D-BCBC-37B4-67BAAE68237E}"/>
-                  </a:ext>
-                </a:extLst>
-              </p:cNvPr>
-              <p:cNvSpPr>
-                <a:spLocks noGrp="1"/>
-              </p:cNvSpPr>
-              <p:nvPr>
-                <p:ph idx="1"/>
-              </p:nvPr>
-            </p:nvSpPr>
-            <p:spPr/>
-            <p:txBody>
-              <a:bodyPr>
-                <a:noAutofit/>
-              </a:bodyPr>
-              <a:lstStyle/>
-              <a:p>
-                <a:pPr marL="0" indent="0">
-                  <a:buNone/>
-                </a:pPr>
-                <a:r>
-                  <a:rPr lang="en-GB" dirty="0"/>
-                  <a:t>The </a:t>
-                </a:r>
-                <a:r>
-                  <a:rPr lang="en-GB" b="1" dirty="0"/>
-                  <a:t>vanishing</a:t>
-                </a:r>
-                <a:r>
-                  <a:rPr lang="en-GB" dirty="0"/>
-                  <a:t> </a:t>
-                </a:r>
-                <a:r>
-                  <a:rPr lang="en-GB" b="1" dirty="0"/>
-                  <a:t>gradient</a:t>
-                </a:r>
-                <a:r>
-                  <a:rPr lang="en-GB" dirty="0"/>
-                  <a:t> </a:t>
-                </a:r>
-                <a:r>
-                  <a:rPr lang="en-GB" b="1" dirty="0"/>
-                  <a:t>problem</a:t>
-                </a:r>
-                <a:r>
-                  <a:rPr lang="en-GB" dirty="0"/>
-                  <a:t> can often occur in RNNs during training. </a:t>
-                </a:r>
-              </a:p>
-              <a:p>
-                <a:r>
-                  <a:rPr lang="en-GB" dirty="0"/>
-                  <a:t>In RNNs, each hidden state </a:t>
-                </a:r>
-                <a14:m>
-                  <m:oMath xmlns:m="http://schemas.openxmlformats.org/officeDocument/2006/math">
-                    <m:sSub>
-                      <m:sSubPr>
-                        <m:ctrlPr>
-                          <a:rPr lang="en-GB" i="1" dirty="0" smtClean="0">
-                            <a:latin typeface="Cambria Math" panose="02040503050406030204" pitchFamily="18" charset="0"/>
-                          </a:rPr>
-                        </m:ctrlPr>
-                      </m:sSubPr>
-                      <m:e>
-                        <m:r>
-                          <a:rPr lang="en-GB" i="1" dirty="0" smtClean="0">
-                            <a:latin typeface="Cambria Math" panose="02040503050406030204" pitchFamily="18" charset="0"/>
-                          </a:rPr>
-                          <m:t>h</m:t>
-                        </m:r>
-                      </m:e>
-                      <m:sub>
-                        <m:r>
-                          <a:rPr lang="en-GB" i="1" dirty="0" smtClean="0">
-                            <a:latin typeface="Cambria Math" panose="02040503050406030204" pitchFamily="18" charset="0"/>
-                          </a:rPr>
-                          <m:t>𝑡</m:t>
-                        </m:r>
-                        <m:r>
-                          <a:rPr lang="en-GB" b="0" i="1" dirty="0" smtClean="0">
-                            <a:latin typeface="Cambria Math" panose="02040503050406030204" pitchFamily="18" charset="0"/>
-                          </a:rPr>
-                          <m:t>+1</m:t>
-                        </m:r>
-                      </m:sub>
-                    </m:sSub>
-                  </m:oMath>
-                </a14:m>
-                <a:r>
-                  <a:rPr lang="en-GB" dirty="0"/>
-                  <a:t> is updated via a function of the previous hidden state </a:t>
-                </a:r>
-                <a14:m>
-                  <m:oMath xmlns:m="http://schemas.openxmlformats.org/officeDocument/2006/math">
-                    <m:sSub>
-                      <m:sSubPr>
-                        <m:ctrlPr>
-                          <a:rPr lang="en-GB" b="0" i="1" smtClean="0">
-                            <a:latin typeface="Cambria Math" panose="02040503050406030204" pitchFamily="18" charset="0"/>
-                          </a:rPr>
-                        </m:ctrlPr>
-                      </m:sSubPr>
-                      <m:e>
-                        <m:r>
-                          <a:rPr lang="en-GB" b="0" i="1" smtClean="0">
-                            <a:latin typeface="Cambria Math" panose="02040503050406030204" pitchFamily="18" charset="0"/>
-                          </a:rPr>
-                          <m:t>h</m:t>
-                        </m:r>
-                      </m:e>
-                      <m:sub>
-                        <m:r>
-                          <a:rPr lang="en-GB" b="0" i="1" smtClean="0">
-                            <a:latin typeface="Cambria Math" panose="02040503050406030204" pitchFamily="18" charset="0"/>
-                          </a:rPr>
-                          <m:t>𝑡</m:t>
-                        </m:r>
-                      </m:sub>
-                    </m:sSub>
-                  </m:oMath>
-                </a14:m>
-                <a:r>
-                  <a:rPr lang="en-GB" dirty="0"/>
-                  <a:t> and the input </a:t>
-                </a:r>
-                <a14:m>
-                  <m:oMath xmlns:m="http://schemas.openxmlformats.org/officeDocument/2006/math">
-                    <m:sSub>
-                      <m:sSubPr>
-                        <m:ctrlPr>
-                          <a:rPr lang="en-GB" b="0" i="1" smtClean="0">
-                            <a:latin typeface="Cambria Math" panose="02040503050406030204" pitchFamily="18" charset="0"/>
-                          </a:rPr>
-                        </m:ctrlPr>
-                      </m:sSubPr>
-                      <m:e>
-                        <m:r>
-                          <a:rPr lang="en-GB" b="0" i="1" smtClean="0">
-                            <a:latin typeface="Cambria Math" panose="02040503050406030204" pitchFamily="18" charset="0"/>
-                          </a:rPr>
-                          <m:t>𝑥</m:t>
-                        </m:r>
-                      </m:e>
-                      <m:sub>
-                        <m:r>
-                          <a:rPr lang="en-GB" b="0" i="1" smtClean="0">
-                            <a:latin typeface="Cambria Math" panose="02040503050406030204" pitchFamily="18" charset="0"/>
-                          </a:rPr>
-                          <m:t>𝑡</m:t>
-                        </m:r>
-                      </m:sub>
-                    </m:sSub>
-                  </m:oMath>
-                </a14:m>
-                <a:r>
-                  <a:rPr lang="en-GB" dirty="0"/>
-                  <a:t>.</a:t>
-                </a:r>
-              </a:p>
-              <a:p>
-                <a:r>
-                  <a:rPr lang="en-GB" dirty="0"/>
-                  <a:t>The memory vector will attempt to integrate “new” information, but ultimately will have to discard “old” information to make space for the “new” information.</a:t>
-                </a:r>
-              </a:p>
-              <a:p>
-                <a:r>
-                  <a:rPr lang="en-GB" dirty="0"/>
-                  <a:t>Eventually “old” information will slowly be lost over time, which </a:t>
-                </a:r>
-                <a:r>
-                  <a:rPr lang="en-GB" dirty="0" err="1"/>
-                  <a:t>iis</a:t>
-                </a:r>
-                <a:r>
-                  <a:rPr lang="en-GB" dirty="0"/>
-                  <a:t> unfortunate as it could have proven useful in some predictions…</a:t>
-                </a:r>
-                <a:endParaRPr lang="en-SG" dirty="0"/>
-              </a:p>
-            </p:txBody>
-          </p:sp>
-        </mc:Choice>
-        <mc:Fallback xmlns="">
-          <p:sp>
-            <p:nvSpPr>
-              <p:cNvPr id="3" name="Content Placeholder 2">
-                <a:extLst>
-                  <a:ext uri="{FF2B5EF4-FFF2-40B4-BE49-F238E27FC236}">
-                    <a16:creationId xmlns:a16="http://schemas.microsoft.com/office/drawing/2014/main" id="{C27E85C4-C37D-BCBC-37B4-67BAAE68237E}"/>
-                  </a:ext>
-                </a:extLst>
-              </p:cNvPr>
-              <p:cNvSpPr>
-                <a:spLocks noGrp="1" noRot="1" noChangeAspect="1" noMove="1" noResize="1" noEditPoints="1" noAdjustHandles="1" noChangeArrowheads="1" noChangeShapeType="1" noTextEdit="1"/>
-              </p:cNvSpPr>
-              <p:nvPr>
-                <p:ph idx="1"/>
-              </p:nvPr>
-            </p:nvSpPr>
-            <p:spPr>
-              <a:blipFill>
-                <a:blip r:embed="rId2"/>
-                <a:stretch>
-                  <a:fillRect l="-1217" t="-2241"/>
-                </a:stretch>
-              </a:blipFill>
-            </p:spPr>
-            <p:txBody>
-              <a:bodyPr/>
-              <a:lstStyle/>
-              <a:p>
-                <a:r>
-                  <a:rPr lang="en-GB">
-                    <a:noFill/>
-                  </a:rPr>
-                  <a:t> </a:t>
-                </a:r>
-              </a:p>
-            </p:txBody>
-          </p:sp>
-        </mc:Fallback>
-      </mc:AlternateContent>
-    </p:spTree>
-    <p:extLst>
-      <p:ext uri="{BB962C8B-B14F-4D97-AF65-F5344CB8AC3E}">
-        <p14:creationId xmlns:p14="http://schemas.microsoft.com/office/powerpoint/2010/main" val="3425780644"/>
       </p:ext>
     </p:extLst>
   </p:cSld>
@@ -27577,6 +24903,297 @@
 </file>
 
 <file path=ppt/slides/slide50.xml><?xml version="1.0" encoding="utf-8"?>
+<p:sld xmlns:a="http://schemas.openxmlformats.org/drawingml/2006/main" xmlns:r="http://schemas.openxmlformats.org/officeDocument/2006/relationships" xmlns:p="http://schemas.openxmlformats.org/presentationml/2006/main">
+  <p:cSld>
+    <p:spTree>
+      <p:nvGrpSpPr>
+        <p:cNvPr id="1" name=""/>
+        <p:cNvGrpSpPr/>
+        <p:nvPr/>
+      </p:nvGrpSpPr>
+      <p:grpSpPr>
+        <a:xfrm>
+          <a:off x="0" y="0"/>
+          <a:ext cx="0" cy="0"/>
+          <a:chOff x="0" y="0"/>
+          <a:chExt cx="0" cy="0"/>
+        </a:xfrm>
+      </p:grpSpPr>
+      <p:sp>
+        <p:nvSpPr>
+          <p:cNvPr id="2" name="Title 1">
+            <a:extLst>
+              <a:ext uri="{FF2B5EF4-FFF2-40B4-BE49-F238E27FC236}">
+                <a16:creationId xmlns:a16="http://schemas.microsoft.com/office/drawing/2014/main" id="{837744AD-8C96-9D7F-5FF3-DFA6E36E9AD6}"/>
+              </a:ext>
+            </a:extLst>
+          </p:cNvPr>
+          <p:cNvSpPr>
+            <a:spLocks noGrp="1"/>
+          </p:cNvSpPr>
+          <p:nvPr>
+            <p:ph type="title"/>
+          </p:nvPr>
+        </p:nvSpPr>
+        <p:spPr/>
+        <p:txBody>
+          <a:bodyPr/>
+          <a:lstStyle/>
+          <a:p>
+            <a:r>
+              <a:rPr lang="en-GB" dirty="0"/>
+              <a:t>The vanishing gradient problem (part 3)</a:t>
+            </a:r>
+            <a:endParaRPr lang="en-SG" dirty="0"/>
+          </a:p>
+        </p:txBody>
+      </p:sp>
+      <mc:AlternateContent xmlns:mc="http://schemas.openxmlformats.org/markup-compatibility/2006" xmlns:a14="http://schemas.microsoft.com/office/drawing/2010/main">
+        <mc:Choice Requires="a14">
+          <p:sp>
+            <p:nvSpPr>
+              <p:cNvPr id="3" name="Content Placeholder 2">
+                <a:extLst>
+                  <a:ext uri="{FF2B5EF4-FFF2-40B4-BE49-F238E27FC236}">
+                    <a16:creationId xmlns:a16="http://schemas.microsoft.com/office/drawing/2014/main" id="{C27E85C4-C37D-BCBC-37B4-67BAAE68237E}"/>
+                  </a:ext>
+                </a:extLst>
+              </p:cNvPr>
+              <p:cNvSpPr>
+                <a:spLocks noGrp="1"/>
+              </p:cNvSpPr>
+              <p:nvPr>
+                <p:ph idx="1"/>
+              </p:nvPr>
+            </p:nvSpPr>
+            <p:spPr/>
+            <p:txBody>
+              <a:bodyPr>
+                <a:noAutofit/>
+              </a:bodyPr>
+              <a:lstStyle/>
+              <a:p>
+                <a:pPr marL="0" indent="0">
+                  <a:buNone/>
+                </a:pPr>
+                <a:r>
+                  <a:rPr lang="en-GB" dirty="0"/>
+                  <a:t>The </a:t>
+                </a:r>
+                <a:r>
+                  <a:rPr lang="en-GB" b="1" dirty="0"/>
+                  <a:t>vanishing</a:t>
+                </a:r>
+                <a:r>
+                  <a:rPr lang="en-GB" dirty="0"/>
+                  <a:t> </a:t>
+                </a:r>
+                <a:r>
+                  <a:rPr lang="en-GB" b="1" dirty="0"/>
+                  <a:t>gradient</a:t>
+                </a:r>
+                <a:r>
+                  <a:rPr lang="en-GB" dirty="0"/>
+                  <a:t> </a:t>
+                </a:r>
+                <a:r>
+                  <a:rPr lang="en-GB" b="1" dirty="0"/>
+                  <a:t>problem</a:t>
+                </a:r>
+                <a:r>
+                  <a:rPr lang="en-GB" dirty="0"/>
+                  <a:t> can often occur in RNNs during training. </a:t>
+                </a:r>
+              </a:p>
+              <a:p>
+                <a:r>
+                  <a:rPr lang="en-GB" dirty="0"/>
+                  <a:t>In RNNs, each hidden state </a:t>
+                </a:r>
+                <a14:m>
+                  <m:oMath xmlns:m="http://schemas.openxmlformats.org/officeDocument/2006/math">
+                    <m:sSub>
+                      <m:sSubPr>
+                        <m:ctrlPr>
+                          <a:rPr lang="en-GB" i="1" dirty="0" smtClean="0">
+                            <a:latin typeface="Cambria Math" panose="02040503050406030204" pitchFamily="18" charset="0"/>
+                          </a:rPr>
+                        </m:ctrlPr>
+                      </m:sSubPr>
+                      <m:e>
+                        <m:r>
+                          <a:rPr lang="en-GB" i="1" dirty="0" smtClean="0">
+                            <a:latin typeface="Cambria Math" panose="02040503050406030204" pitchFamily="18" charset="0"/>
+                          </a:rPr>
+                          <m:t>h</m:t>
+                        </m:r>
+                      </m:e>
+                      <m:sub>
+                        <m:r>
+                          <a:rPr lang="en-GB" i="1" dirty="0" smtClean="0">
+                            <a:latin typeface="Cambria Math" panose="02040503050406030204" pitchFamily="18" charset="0"/>
+                          </a:rPr>
+                          <m:t>𝑡</m:t>
+                        </m:r>
+                        <m:r>
+                          <a:rPr lang="en-GB" b="0" i="1" dirty="0" smtClean="0">
+                            <a:latin typeface="Cambria Math" panose="02040503050406030204" pitchFamily="18" charset="0"/>
+                          </a:rPr>
+                          <m:t>+1</m:t>
+                        </m:r>
+                      </m:sub>
+                    </m:sSub>
+                  </m:oMath>
+                </a14:m>
+                <a:r>
+                  <a:rPr lang="en-GB" dirty="0"/>
+                  <a:t> is updated via a function of the previous hidden state </a:t>
+                </a:r>
+                <a14:m>
+                  <m:oMath xmlns:m="http://schemas.openxmlformats.org/officeDocument/2006/math">
+                    <m:sSub>
+                      <m:sSubPr>
+                        <m:ctrlPr>
+                          <a:rPr lang="en-GB" b="0" i="1" smtClean="0">
+                            <a:latin typeface="Cambria Math" panose="02040503050406030204" pitchFamily="18" charset="0"/>
+                          </a:rPr>
+                        </m:ctrlPr>
+                      </m:sSubPr>
+                      <m:e>
+                        <m:r>
+                          <a:rPr lang="en-GB" b="0" i="1" smtClean="0">
+                            <a:latin typeface="Cambria Math" panose="02040503050406030204" pitchFamily="18" charset="0"/>
+                          </a:rPr>
+                          <m:t>h</m:t>
+                        </m:r>
+                      </m:e>
+                      <m:sub>
+                        <m:r>
+                          <a:rPr lang="en-GB" b="0" i="1" smtClean="0">
+                            <a:latin typeface="Cambria Math" panose="02040503050406030204" pitchFamily="18" charset="0"/>
+                          </a:rPr>
+                          <m:t>𝑡</m:t>
+                        </m:r>
+                      </m:sub>
+                    </m:sSub>
+                  </m:oMath>
+                </a14:m>
+                <a:r>
+                  <a:rPr lang="en-GB" dirty="0"/>
+                  <a:t> and the input </a:t>
+                </a:r>
+                <a14:m>
+                  <m:oMath xmlns:m="http://schemas.openxmlformats.org/officeDocument/2006/math">
+                    <m:sSub>
+                      <m:sSubPr>
+                        <m:ctrlPr>
+                          <a:rPr lang="en-GB" b="0" i="1" smtClean="0">
+                            <a:latin typeface="Cambria Math" panose="02040503050406030204" pitchFamily="18" charset="0"/>
+                          </a:rPr>
+                        </m:ctrlPr>
+                      </m:sSubPr>
+                      <m:e>
+                        <m:r>
+                          <a:rPr lang="en-GB" b="0" i="1" smtClean="0">
+                            <a:latin typeface="Cambria Math" panose="02040503050406030204" pitchFamily="18" charset="0"/>
+                          </a:rPr>
+                          <m:t>𝑥</m:t>
+                        </m:r>
+                      </m:e>
+                      <m:sub>
+                        <m:r>
+                          <a:rPr lang="en-GB" b="0" i="1" smtClean="0">
+                            <a:latin typeface="Cambria Math" panose="02040503050406030204" pitchFamily="18" charset="0"/>
+                          </a:rPr>
+                          <m:t>𝑡</m:t>
+                        </m:r>
+                      </m:sub>
+                    </m:sSub>
+                  </m:oMath>
+                </a14:m>
+                <a:r>
+                  <a:rPr lang="en-GB" dirty="0"/>
+                  <a:t>.</a:t>
+                </a:r>
+              </a:p>
+              <a:p>
+                <a:r>
+                  <a:rPr lang="en-GB" dirty="0"/>
+                  <a:t>The memory vector will attempt to integrate “new” information, but ultimately will have to discard “old” information to make space for the “new” information.</a:t>
+                </a:r>
+              </a:p>
+              <a:p>
+                <a:r>
+                  <a:rPr lang="en-GB" dirty="0"/>
+                  <a:t>Eventually “old” information will slowly be lost over time, which </a:t>
+                </a:r>
+                <a:r>
+                  <a:rPr lang="en-GB" dirty="0" err="1"/>
+                  <a:t>iis</a:t>
+                </a:r>
+                <a:r>
+                  <a:rPr lang="en-GB" dirty="0"/>
+                  <a:t> unfortunate as it could have proven useful in some predictions…</a:t>
+                </a:r>
+                <a:endParaRPr lang="en-SG" dirty="0"/>
+              </a:p>
+            </p:txBody>
+          </p:sp>
+        </mc:Choice>
+        <mc:Fallback xmlns="">
+          <p:sp>
+            <p:nvSpPr>
+              <p:cNvPr id="3" name="Content Placeholder 2">
+                <a:extLst>
+                  <a:ext uri="{FF2B5EF4-FFF2-40B4-BE49-F238E27FC236}">
+                    <a16:creationId xmlns:a16="http://schemas.microsoft.com/office/drawing/2014/main" id="{C27E85C4-C37D-BCBC-37B4-67BAAE68237E}"/>
+                  </a:ext>
+                </a:extLst>
+              </p:cNvPr>
+              <p:cNvSpPr>
+                <a:spLocks noGrp="1" noRot="1" noChangeAspect="1" noMove="1" noResize="1" noEditPoints="1" noAdjustHandles="1" noChangeArrowheads="1" noChangeShapeType="1" noTextEdit="1"/>
+              </p:cNvSpPr>
+              <p:nvPr>
+                <p:ph idx="1"/>
+              </p:nvPr>
+            </p:nvSpPr>
+            <p:spPr>
+              <a:blipFill>
+                <a:blip r:embed="rId2"/>
+                <a:stretch>
+                  <a:fillRect l="-1217" t="-2241"/>
+                </a:stretch>
+              </a:blipFill>
+            </p:spPr>
+            <p:txBody>
+              <a:bodyPr/>
+              <a:lstStyle/>
+              <a:p>
+                <a:r>
+                  <a:rPr lang="en-GB">
+                    <a:noFill/>
+                  </a:rPr>
+                  <a:t> </a:t>
+                </a:r>
+              </a:p>
+            </p:txBody>
+          </p:sp>
+        </mc:Fallback>
+      </mc:AlternateContent>
+    </p:spTree>
+    <p:extLst>
+      <p:ext uri="{BB962C8B-B14F-4D97-AF65-F5344CB8AC3E}">
+        <p14:creationId xmlns:p14="http://schemas.microsoft.com/office/powerpoint/2010/main" val="3425780644"/>
+      </p:ext>
+    </p:extLst>
+  </p:cSld>
+  <p:clrMapOvr>
+    <a:masterClrMapping/>
+  </p:clrMapOvr>
+</p:sld>
+</file>
+
+<file path=ppt/slides/slide51.xml><?xml version="1.0" encoding="utf-8"?>
 <p:sld xmlns:a="http://schemas.openxmlformats.org/drawingml/2006/main" xmlns:r="http://schemas.openxmlformats.org/officeDocument/2006/relationships" xmlns:p="http://schemas.openxmlformats.org/presentationml/2006/main">
   <p:cSld>
     <p:spTree>
@@ -28043,7 +25660,7 @@
 </p:sld>
 </file>
 
-<file path=ppt/slides/slide51.xml><?xml version="1.0" encoding="utf-8"?>
+<file path=ppt/slides/slide52.xml><?xml version="1.0" encoding="utf-8"?>
 <p:sld xmlns:a="http://schemas.openxmlformats.org/drawingml/2006/main" xmlns:r="http://schemas.openxmlformats.org/officeDocument/2006/relationships" xmlns:p="http://schemas.openxmlformats.org/presentationml/2006/main">
   <p:cSld>
     <p:spTree>
@@ -28353,7 +25970,7 @@
 </p:sld>
 </file>
 
-<file path=ppt/slides/slide52.xml><?xml version="1.0" encoding="utf-8"?>
+<file path=ppt/slides/slide53.xml><?xml version="1.0" encoding="utf-8"?>
 <p:sld xmlns:a="http://schemas.openxmlformats.org/drawingml/2006/main" xmlns:r="http://schemas.openxmlformats.org/officeDocument/2006/relationships" xmlns:p="http://schemas.openxmlformats.org/presentationml/2006/main">
   <p:cSld>
     <p:spTree>
@@ -28490,7 +26107,7 @@
 </p:sld>
 </file>
 
-<file path=ppt/slides/slide53.xml><?xml version="1.0" encoding="utf-8"?>
+<file path=ppt/slides/slide54.xml><?xml version="1.0" encoding="utf-8"?>
 <p:sld xmlns:a="http://schemas.openxmlformats.org/drawingml/2006/main" xmlns:r="http://schemas.openxmlformats.org/officeDocument/2006/relationships" xmlns:p="http://schemas.openxmlformats.org/presentationml/2006/main">
   <p:cSld>
     <p:spTree>

--- a/W5/1. W5S1 final/W5S1.pptx
+++ b/W5/1. W5S1 final/W5S1.pptx
@@ -277,7 +277,7 @@
 <file path=ppt/revisionInfo.xml><?xml version="1.0" encoding="utf-8"?>
 <p1510:revInfo xmlns:a="http://schemas.openxmlformats.org/drawingml/2006/main" xmlns:r="http://schemas.openxmlformats.org/officeDocument/2006/relationships" xmlns:p1510="http://schemas.microsoft.com/office/powerpoint/2015/10/main">
   <p1510:revLst>
-    <p1510:client id="{FF5E96C2-CAD4-4467-9AE0-F3D89E678849}" v="1" dt="2026-01-06T03:43:54.783"/>
+    <p1510:client id="{FF5E96C2-CAD4-4467-9AE0-F3D89E678849}" v="4" dt="2026-01-06T04:47:15.759"/>
   </p1510:revLst>
 </p1510:revInfo>
 </file>
@@ -287,24 +287,48 @@
   <pc:docChgLst>
     <pc:chgData name="Matthieu De Mari" userId="dfb708c9-d8dc-439f-9a3b-c772bf4a311c" providerId="ADAL" clId="{81E9B007-0C2C-493E-9B93-55A62C9C1F12}"/>
     <pc:docChg chg="custSel addSld modSld">
-      <pc:chgData name="Matthieu De Mari" userId="dfb708c9-d8dc-439f-9a3b-c772bf4a311c" providerId="ADAL" clId="{81E9B007-0C2C-493E-9B93-55A62C9C1F12}" dt="2026-01-06T03:45:07.009" v="303" actId="20577"/>
+      <pc:chgData name="Matthieu De Mari" userId="dfb708c9-d8dc-439f-9a3b-c772bf4a311c" providerId="ADAL" clId="{81E9B007-0C2C-493E-9B93-55A62C9C1F12}" dt="2026-01-06T04:47:34.642" v="359" actId="14100"/>
       <pc:docMkLst>
         <pc:docMk/>
       </pc:docMkLst>
-      <pc:sldChg chg="modSp add mod">
-        <pc:chgData name="Matthieu De Mari" userId="dfb708c9-d8dc-439f-9a3b-c772bf4a311c" providerId="ADAL" clId="{81E9B007-0C2C-493E-9B93-55A62C9C1F12}" dt="2026-01-06T03:45:07.009" v="303" actId="20577"/>
+      <pc:sldChg chg="addSp delSp modSp add mod chgLayout">
+        <pc:chgData name="Matthieu De Mari" userId="dfb708c9-d8dc-439f-9a3b-c772bf4a311c" providerId="ADAL" clId="{81E9B007-0C2C-493E-9B93-55A62C9C1F12}" dt="2026-01-06T04:47:34.642" v="359" actId="14100"/>
         <pc:sldMkLst>
           <pc:docMk/>
           <pc:sldMk cId="559955036" sldId="672"/>
         </pc:sldMkLst>
-        <pc:spChg chg="mod">
-          <ac:chgData name="Matthieu De Mari" userId="dfb708c9-d8dc-439f-9a3b-c772bf4a311c" providerId="ADAL" clId="{81E9B007-0C2C-493E-9B93-55A62C9C1F12}" dt="2026-01-06T03:45:07.009" v="303" actId="20577"/>
+        <pc:spChg chg="add mod ord">
+          <ac:chgData name="Matthieu De Mari" userId="dfb708c9-d8dc-439f-9a3b-c772bf4a311c" providerId="ADAL" clId="{81E9B007-0C2C-493E-9B93-55A62C9C1F12}" dt="2026-01-06T04:47:34.642" v="359" actId="14100"/>
+          <ac:spMkLst>
+            <pc:docMk/>
+            <pc:sldMk cId="559955036" sldId="672"/>
+            <ac:spMk id="2" creationId="{D7B27C08-981B-D29E-667C-0CA05F528EE4}"/>
+          </ac:spMkLst>
+        </pc:spChg>
+        <pc:spChg chg="mod ord">
+          <ac:chgData name="Matthieu De Mari" userId="dfb708c9-d8dc-439f-9a3b-c772bf4a311c" providerId="ADAL" clId="{81E9B007-0C2C-493E-9B93-55A62C9C1F12}" dt="2026-01-06T04:45:27.906" v="305" actId="700"/>
+          <ac:spMkLst>
+            <pc:docMk/>
+            <pc:sldMk cId="559955036" sldId="672"/>
+            <ac:spMk id="5" creationId="{2FA62BAB-0365-E25F-E7AA-0B21849DE445}"/>
+          </ac:spMkLst>
+        </pc:spChg>
+        <pc:spChg chg="mod ord">
+          <ac:chgData name="Matthieu De Mari" userId="dfb708c9-d8dc-439f-9a3b-c772bf4a311c" providerId="ADAL" clId="{81E9B007-0C2C-493E-9B93-55A62C9C1F12}" dt="2026-01-06T04:47:28.169" v="356" actId="12"/>
           <ac:spMkLst>
             <pc:docMk/>
             <pc:sldMk cId="559955036" sldId="672"/>
             <ac:spMk id="6" creationId="{A3CE3216-BB60-B2EA-0A77-7CD1D1669BBE}"/>
           </ac:spMkLst>
         </pc:spChg>
+        <pc:picChg chg="del">
+          <ac:chgData name="Matthieu De Mari" userId="dfb708c9-d8dc-439f-9a3b-c772bf4a311c" providerId="ADAL" clId="{81E9B007-0C2C-493E-9B93-55A62C9C1F12}" dt="2026-01-06T04:45:24.743" v="304" actId="478"/>
+          <ac:picMkLst>
+            <pc:docMk/>
+            <pc:sldMk cId="559955036" sldId="672"/>
+            <ac:picMk id="3" creationId="{2FBCE472-B101-706E-49C1-78BEAA685A6A}"/>
+          </ac:picMkLst>
+        </pc:picChg>
       </pc:sldChg>
     </pc:docChg>
   </pc:docChgLst>
@@ -4391,7 +4415,7 @@
         <p:spPr>
           <a:xfrm>
             <a:off x="838200" y="1825624"/>
-            <a:ext cx="4256314" cy="5032375"/>
+            <a:ext cx="5181600" cy="5032375"/>
           </a:xfrm>
         </p:spPr>
         <p:txBody>
@@ -4409,8 +4433,73 @@
             </a:r>
             <a:r>
               <a:rPr lang="en-GB" dirty="0"/>
-              <a:t>is technically out-of-scope for 50.039 DL, but it can give great insights about your data set before you dive into training AI models.</a:t>
-            </a:r>
+              <a:t>is technically out-of-scope for 50.039 DL, but it can give great insights about your dataset before you dive into training AI models.</a:t>
+            </a:r>
+          </a:p>
+          <a:p>
+            <a:r>
+              <a:rPr lang="en-GB" dirty="0"/>
+              <a:t>Time series decomposition helps uncover underlying patterns, like trend and seasonality, before training an AI model, allowing you to assess whether meaningful structure exists in the data.</a:t>
+            </a:r>
+          </a:p>
+        </p:txBody>
+      </p:sp>
+      <p:sp>
+        <p:nvSpPr>
+          <p:cNvPr id="2" name="Content Placeholder 1">
+            <a:extLst>
+              <a:ext uri="{FF2B5EF4-FFF2-40B4-BE49-F238E27FC236}">
+                <a16:creationId xmlns:a16="http://schemas.microsoft.com/office/drawing/2014/main" id="{D7B27C08-981B-D29E-667C-0CA05F528EE4}"/>
+              </a:ext>
+            </a:extLst>
+          </p:cNvPr>
+          <p:cNvSpPr>
+            <a:spLocks noGrp="1"/>
+          </p:cNvSpPr>
+          <p:nvPr>
+            <p:ph sz="half" idx="2"/>
+          </p:nvPr>
+        </p:nvSpPr>
+        <p:spPr>
+          <a:xfrm>
+            <a:off x="6172199" y="1825624"/>
+            <a:ext cx="5452353" cy="5032375"/>
+          </a:xfrm>
+        </p:spPr>
+        <p:txBody>
+          <a:bodyPr>
+            <a:normAutofit/>
+          </a:bodyPr>
+          <a:lstStyle/>
+          <a:p>
+            <a:r>
+              <a:rPr lang="en-GB" dirty="0"/>
+              <a:t>This insight can guide model selection, feature engineering, and preprocessing decisions, such as detrending or </a:t>
+            </a:r>
+            <a:r>
+              <a:rPr lang="en-GB" dirty="0" err="1"/>
+              <a:t>deseasonalizing</a:t>
+            </a:r>
+            <a:r>
+              <a:rPr lang="en-GB" dirty="0"/>
+              <a:t>. </a:t>
+            </a:r>
+          </a:p>
+          <a:p>
+            <a:r>
+              <a:rPr lang="en-GB" dirty="0"/>
+              <a:t>It also helps ensure the model focuses on learnable signals rather than unpredictable noise.</a:t>
+            </a:r>
+          </a:p>
+          <a:p>
+            <a:pPr marL="0" indent="0">
+              <a:buNone/>
+            </a:pPr>
+            <a:r>
+              <a:rPr lang="en-GB" dirty="0"/>
+              <a:t>We attach to these lecture slides an additional “bonus” notebook, which briefly introducing these concepts.</a:t>
+            </a:r>
+            <a:endParaRPr lang="en-SG" dirty="0"/>
           </a:p>
           <a:p>
             <a:pPr marL="0" indent="0">
@@ -4418,62 +4507,8 @@
             </a:pPr>
             <a:endParaRPr lang="en-GB" dirty="0"/>
           </a:p>
-          <a:p>
-            <a:pPr marL="0" indent="0">
-              <a:buNone/>
-            </a:pPr>
-            <a:r>
-              <a:rPr lang="en-GB" dirty="0"/>
-              <a:t>We attach to these lecture slides an additional “bonus” notebook</a:t>
-            </a:r>
-            <a:r>
-              <a:rPr lang="en-GB"/>
-              <a:t>, which briefly </a:t>
-            </a:r>
-            <a:r>
-              <a:rPr lang="en-GB" dirty="0"/>
-              <a:t>introducing these concepts.</a:t>
-            </a:r>
-            <a:endParaRPr lang="en-SG" dirty="0"/>
-          </a:p>
         </p:txBody>
       </p:sp>
-      <p:pic>
-        <p:nvPicPr>
-          <p:cNvPr id="3" name="Picture 2" descr="Chart, line chart&#10;&#10;Description automatically generated">
-            <a:extLst>
-              <a:ext uri="{FF2B5EF4-FFF2-40B4-BE49-F238E27FC236}">
-                <a16:creationId xmlns:a16="http://schemas.microsoft.com/office/drawing/2014/main" id="{2FBCE472-B101-706E-49C1-78BEAA685A6A}"/>
-              </a:ext>
-            </a:extLst>
-          </p:cNvPr>
-          <p:cNvPicPr>
-            <a:picLocks noChangeAspect="1"/>
-          </p:cNvPicPr>
-          <p:nvPr/>
-        </p:nvPicPr>
-        <p:blipFill>
-          <a:blip r:embed="rId2">
-            <a:extLst>
-              <a:ext uri="{28A0092B-C50C-407E-A947-70E740481C1C}">
-                <a14:useLocalDpi xmlns:a14="http://schemas.microsoft.com/office/drawing/2010/main" val="0"/>
-              </a:ext>
-            </a:extLst>
-          </a:blip>
-          <a:stretch>
-            <a:fillRect/>
-          </a:stretch>
-        </p:blipFill>
-        <p:spPr>
-          <a:xfrm>
-            <a:off x="5383763" y="1499053"/>
-            <a:ext cx="6808237" cy="5106178"/>
-          </a:xfrm>
-          <a:prstGeom prst="rect">
-            <a:avLst/>
-          </a:prstGeom>
-        </p:spPr>
-      </p:pic>
     </p:spTree>
     <p:extLst>
       <p:ext uri="{BB962C8B-B14F-4D97-AF65-F5344CB8AC3E}">
